--- a/LabBook_010.pptx
+++ b/LabBook_010.pptx
@@ -5,17 +5,19 @@
     <p:sldMasterId id="2147483648" r:id="rId4"/>
   </p:sldMasterIdLst>
   <p:notesMasterIdLst>
-    <p:notesMasterId r:id="rId10"/>
+    <p:notesMasterId r:id="rId12"/>
   </p:notesMasterIdLst>
   <p:handoutMasterIdLst>
-    <p:handoutMasterId r:id="rId11"/>
+    <p:handoutMasterId r:id="rId13"/>
   </p:handoutMasterIdLst>
   <p:sldIdLst>
     <p:sldId id="256" r:id="rId5"/>
     <p:sldId id="289" r:id="rId6"/>
     <p:sldId id="290" r:id="rId7"/>
-    <p:sldId id="291" r:id="rId8"/>
-    <p:sldId id="288" r:id="rId9"/>
+    <p:sldId id="292" r:id="rId8"/>
+    <p:sldId id="291" r:id="rId9"/>
+    <p:sldId id="293" r:id="rId10"/>
+    <p:sldId id="288" r:id="rId11"/>
   </p:sldIdLst>
   <p:sldSz cx="12192000" cy="6858000"/>
   <p:notesSz cx="12192000" cy="6858000"/>
@@ -238,7 +240,7 @@
           <a:p>
             <a:fld id="{8438F8DC-35B0-48E6-A86E-42F1F08DD00F}" type="datetimeFigureOut">
               <a:rPr lang="es-ES" smtClean="0"/>
-              <a:t>09/02/2026</a:t>
+              <a:t>16/02/2026</a:t>
             </a:fld>
             <a:endParaRPr lang="es-ES"/>
           </a:p>
@@ -415,7 +417,7 @@
           <a:p>
             <a:fld id="{FACBDC12-F39B-4B97-8F4D-6734F9D366FF}" type="datetimeFigureOut">
               <a:rPr lang="es-ES" smtClean="0"/>
-              <a:t>09/02/2026</a:t>
+              <a:t>16/02/2026</a:t>
             </a:fld>
             <a:endParaRPr lang="es-ES"/>
           </a:p>
@@ -855,7 +857,7 @@
           <a:p>
             <a:fld id="{676223B9-C868-4436-87D9-1A3152E1157A}" type="slidenum">
               <a:rPr lang="es-ES" smtClean="0"/>
-              <a:t>4</a:t>
+              <a:t>5</a:t>
             </a:fld>
             <a:endParaRPr lang="es-ES"/>
           </a:p>
@@ -5886,7 +5888,7 @@
         <p:spPr>
           <a:xfrm>
             <a:off x="609441" y="4860334"/>
-            <a:ext cx="11199971" cy="1200329"/>
+            <a:ext cx="11199971" cy="1384995"/>
           </a:xfrm>
           <a:prstGeom prst="rect">
             <a:avLst/>
@@ -5914,40 +5916,343 @@
                 <a:latin typeface="Arial" panose="020B0604020202020204" pitchFamily="34" charset="0"/>
                 <a:cs typeface="Arial" panose="020B0604020202020204" pitchFamily="34" charset="0"/>
               </a:rPr>
-              <a:t>Document all your results (neff, plot fields </a:t>
-            </a:r>
-            <a:r>
-              <a:rPr lang="en-US" sz="1200">
-                <a:latin typeface="Arial" panose="020B0604020202020204" pitchFamily="34" charset="0"/>
-                <a:cs typeface="Arial" panose="020B0604020202020204" pitchFamily="34" charset="0"/>
-              </a:rPr>
-              <a:t>of different modes, </a:t>
+              <a:t>Document all your results (neff, plot fields of different modes, comparison between different polarizations…)</a:t>
+            </a:r>
+          </a:p>
+          <a:p>
+            <a:pPr algn="just"/>
+            <a:r>
+              <a:rPr lang="en-US" sz="1200" dirty="0" err="1">
+                <a:latin typeface="Arial" panose="020B0604020202020204" pitchFamily="34" charset="0"/>
+                <a:cs typeface="Arial" panose="020B0604020202020204" pitchFamily="34" charset="0"/>
+              </a:rPr>
+              <a:t>Tenemos</a:t>
             </a:r>
             <a:r>
               <a:rPr lang="en-US" sz="1200" dirty="0">
                 <a:latin typeface="Arial" panose="020B0604020202020204" pitchFamily="34" charset="0"/>
                 <a:cs typeface="Arial" panose="020B0604020202020204" pitchFamily="34" charset="0"/>
               </a:rPr>
-              <a:t>comparison between </a:t>
-            </a:r>
-            <a:r>
-              <a:rPr lang="en-US" sz="1200">
-                <a:latin typeface="Arial" panose="020B0604020202020204" pitchFamily="34" charset="0"/>
-                <a:cs typeface="Arial" panose="020B0604020202020204" pitchFamily="34" charset="0"/>
-              </a:rPr>
-              <a:t>different polarizations…)</a:t>
-            </a:r>
-            <a:endParaRPr lang="en-US" sz="1200" dirty="0">
-              <a:latin typeface="Arial" panose="020B0604020202020204" pitchFamily="34" charset="0"/>
-              <a:cs typeface="Arial" panose="020B0604020202020204" pitchFamily="34" charset="0"/>
-            </a:endParaRPr>
+              <a:t> 4 </a:t>
+            </a:r>
+            <a:r>
+              <a:rPr lang="en-US" sz="1200" dirty="0" err="1">
+                <a:latin typeface="Arial" panose="020B0604020202020204" pitchFamily="34" charset="0"/>
+                <a:cs typeface="Arial" panose="020B0604020202020204" pitchFamily="34" charset="0"/>
+              </a:rPr>
+              <a:t>modos</a:t>
+            </a:r>
+            <a:r>
+              <a:rPr lang="en-US" sz="1200" dirty="0">
+                <a:latin typeface="Arial" panose="020B0604020202020204" pitchFamily="34" charset="0"/>
+                <a:cs typeface="Arial" panose="020B0604020202020204" pitchFamily="34" charset="0"/>
+              </a:rPr>
+              <a:t> </a:t>
+            </a:r>
+            <a:r>
+              <a:rPr lang="en-US" sz="1200" dirty="0" err="1">
+                <a:latin typeface="Arial" panose="020B0604020202020204" pitchFamily="34" charset="0"/>
+                <a:cs typeface="Arial" panose="020B0604020202020204" pitchFamily="34" charset="0"/>
+              </a:rPr>
+              <a:t>que</a:t>
+            </a:r>
+            <a:r>
+              <a:rPr lang="en-US" sz="1200" dirty="0">
+                <a:latin typeface="Arial" panose="020B0604020202020204" pitchFamily="34" charset="0"/>
+                <a:cs typeface="Arial" panose="020B0604020202020204" pitchFamily="34" charset="0"/>
+              </a:rPr>
+              <a:t> se </a:t>
+            </a:r>
+            <a:r>
+              <a:rPr lang="en-US" sz="1200" dirty="0" err="1">
+                <a:latin typeface="Arial" panose="020B0604020202020204" pitchFamily="34" charset="0"/>
+                <a:cs typeface="Arial" panose="020B0604020202020204" pitchFamily="34" charset="0"/>
+              </a:rPr>
+              <a:t>propagan</a:t>
+            </a:r>
+            <a:r>
+              <a:rPr lang="en-US" sz="1200" dirty="0">
+                <a:latin typeface="Arial" panose="020B0604020202020204" pitchFamily="34" charset="0"/>
+                <a:cs typeface="Arial" panose="020B0604020202020204" pitchFamily="34" charset="0"/>
+              </a:rPr>
+              <a:t>: </a:t>
+            </a:r>
+            <a:r>
+              <a:rPr lang="en-US" sz="1200" dirty="0" err="1">
+                <a:latin typeface="Arial" panose="020B0604020202020204" pitchFamily="34" charset="0"/>
+                <a:cs typeface="Arial" panose="020B0604020202020204" pitchFamily="34" charset="0"/>
+              </a:rPr>
+              <a:t>los</a:t>
+            </a:r>
+            <a:r>
+              <a:rPr lang="en-US" sz="1200" dirty="0">
+                <a:latin typeface="Arial" panose="020B0604020202020204" pitchFamily="34" charset="0"/>
+                <a:cs typeface="Arial" panose="020B0604020202020204" pitchFamily="34" charset="0"/>
+              </a:rPr>
+              <a:t> </a:t>
+            </a:r>
+            <a:r>
+              <a:rPr lang="en-US" sz="1200" dirty="0" err="1">
+                <a:latin typeface="Arial" panose="020B0604020202020204" pitchFamily="34" charset="0"/>
+                <a:cs typeface="Arial" panose="020B0604020202020204" pitchFamily="34" charset="0"/>
+              </a:rPr>
+              <a:t>modos</a:t>
+            </a:r>
+            <a:r>
+              <a:rPr lang="en-US" sz="1200" dirty="0">
+                <a:latin typeface="Arial" panose="020B0604020202020204" pitchFamily="34" charset="0"/>
+                <a:cs typeface="Arial" panose="020B0604020202020204" pitchFamily="34" charset="0"/>
+              </a:rPr>
+              <a:t> 0 y 2 son </a:t>
+            </a:r>
+            <a:r>
+              <a:rPr lang="en-US" sz="1200" dirty="0" err="1">
+                <a:latin typeface="Arial" panose="020B0604020202020204" pitchFamily="34" charset="0"/>
+                <a:cs typeface="Arial" panose="020B0604020202020204" pitchFamily="34" charset="0"/>
+              </a:rPr>
+              <a:t>modos</a:t>
+            </a:r>
+            <a:r>
+              <a:rPr lang="en-US" sz="1200" dirty="0">
+                <a:latin typeface="Arial" panose="020B0604020202020204" pitchFamily="34" charset="0"/>
+                <a:cs typeface="Arial" panose="020B0604020202020204" pitchFamily="34" charset="0"/>
+              </a:rPr>
+              <a:t> TE y </a:t>
+            </a:r>
+            <a:r>
+              <a:rPr lang="en-US" sz="1200" dirty="0" err="1">
+                <a:latin typeface="Arial" panose="020B0604020202020204" pitchFamily="34" charset="0"/>
+                <a:cs typeface="Arial" panose="020B0604020202020204" pitchFamily="34" charset="0"/>
+              </a:rPr>
+              <a:t>los</a:t>
+            </a:r>
+            <a:r>
+              <a:rPr lang="en-US" sz="1200" dirty="0">
+                <a:latin typeface="Arial" panose="020B0604020202020204" pitchFamily="34" charset="0"/>
+                <a:cs typeface="Arial" panose="020B0604020202020204" pitchFamily="34" charset="0"/>
+              </a:rPr>
+              <a:t> </a:t>
+            </a:r>
+            <a:r>
+              <a:rPr lang="en-US" sz="1200" dirty="0" err="1">
+                <a:latin typeface="Arial" panose="020B0604020202020204" pitchFamily="34" charset="0"/>
+                <a:cs typeface="Arial" panose="020B0604020202020204" pitchFamily="34" charset="0"/>
+              </a:rPr>
+              <a:t>modos</a:t>
+            </a:r>
+            <a:r>
+              <a:rPr lang="en-US" sz="1200" dirty="0">
+                <a:latin typeface="Arial" panose="020B0604020202020204" pitchFamily="34" charset="0"/>
+                <a:cs typeface="Arial" panose="020B0604020202020204" pitchFamily="34" charset="0"/>
+              </a:rPr>
+              <a:t> 1 y 3 son TM.</a:t>
+            </a:r>
           </a:p>
           <a:p>
             <a:pPr algn="just"/>
-            <a:endParaRPr lang="en-US" sz="1200" dirty="0">
-              <a:latin typeface="Arial" panose="020B0604020202020204" pitchFamily="34" charset="0"/>
-              <a:cs typeface="Arial" panose="020B0604020202020204" pitchFamily="34" charset="0"/>
-            </a:endParaRPr>
+            <a:r>
+              <a:rPr lang="en-US" sz="1200" dirty="0">
+                <a:latin typeface="Arial" panose="020B0604020202020204" pitchFamily="34" charset="0"/>
+                <a:cs typeface="Arial" panose="020B0604020202020204" pitchFamily="34" charset="0"/>
+              </a:rPr>
+              <a:t>Se </a:t>
+            </a:r>
+            <a:r>
+              <a:rPr lang="en-US" sz="1200" dirty="0" err="1">
+                <a:latin typeface="Arial" panose="020B0604020202020204" pitchFamily="34" charset="0"/>
+                <a:cs typeface="Arial" panose="020B0604020202020204" pitchFamily="34" charset="0"/>
+              </a:rPr>
+              <a:t>puede</a:t>
+            </a:r>
+            <a:r>
+              <a:rPr lang="en-US" sz="1200" dirty="0">
+                <a:latin typeface="Arial" panose="020B0604020202020204" pitchFamily="34" charset="0"/>
+                <a:cs typeface="Arial" panose="020B0604020202020204" pitchFamily="34" charset="0"/>
+              </a:rPr>
+              <a:t> </a:t>
+            </a:r>
+            <a:r>
+              <a:rPr lang="en-US" sz="1200" dirty="0" err="1">
+                <a:latin typeface="Arial" panose="020B0604020202020204" pitchFamily="34" charset="0"/>
+                <a:cs typeface="Arial" panose="020B0604020202020204" pitchFamily="34" charset="0"/>
+              </a:rPr>
+              <a:t>observar</a:t>
+            </a:r>
+            <a:r>
+              <a:rPr lang="en-US" sz="1200" dirty="0">
+                <a:latin typeface="Arial" panose="020B0604020202020204" pitchFamily="34" charset="0"/>
+                <a:cs typeface="Arial" panose="020B0604020202020204" pitchFamily="34" charset="0"/>
+              </a:rPr>
+              <a:t> </a:t>
+            </a:r>
+            <a:r>
+              <a:rPr lang="en-US" sz="1200" dirty="0" err="1">
+                <a:latin typeface="Arial" panose="020B0604020202020204" pitchFamily="34" charset="0"/>
+                <a:cs typeface="Arial" panose="020B0604020202020204" pitchFamily="34" charset="0"/>
+              </a:rPr>
+              <a:t>en</a:t>
+            </a:r>
+            <a:r>
+              <a:rPr lang="en-US" sz="1200" dirty="0">
+                <a:latin typeface="Arial" panose="020B0604020202020204" pitchFamily="34" charset="0"/>
+                <a:cs typeface="Arial" panose="020B0604020202020204" pitchFamily="34" charset="0"/>
+              </a:rPr>
+              <a:t> </a:t>
+            </a:r>
+            <a:r>
+              <a:rPr lang="en-US" sz="1200" dirty="0" err="1">
+                <a:latin typeface="Arial" panose="020B0604020202020204" pitchFamily="34" charset="0"/>
+                <a:cs typeface="Arial" panose="020B0604020202020204" pitchFamily="34" charset="0"/>
+              </a:rPr>
+              <a:t>los</a:t>
+            </a:r>
+            <a:r>
+              <a:rPr lang="en-US" sz="1200" dirty="0">
+                <a:latin typeface="Arial" panose="020B0604020202020204" pitchFamily="34" charset="0"/>
+                <a:cs typeface="Arial" panose="020B0604020202020204" pitchFamily="34" charset="0"/>
+              </a:rPr>
+              <a:t> plots </a:t>
+            </a:r>
+            <a:r>
+              <a:rPr lang="en-US" sz="1200" dirty="0" err="1">
+                <a:latin typeface="Arial" panose="020B0604020202020204" pitchFamily="34" charset="0"/>
+                <a:cs typeface="Arial" panose="020B0604020202020204" pitchFamily="34" charset="0"/>
+              </a:rPr>
+              <a:t>que</a:t>
+            </a:r>
+            <a:r>
+              <a:rPr lang="en-US" sz="1200" dirty="0">
+                <a:latin typeface="Arial" panose="020B0604020202020204" pitchFamily="34" charset="0"/>
+                <a:cs typeface="Arial" panose="020B0604020202020204" pitchFamily="34" charset="0"/>
+              </a:rPr>
+              <a:t> </a:t>
+            </a:r>
+            <a:r>
+              <a:rPr lang="en-US" sz="1200" dirty="0" err="1">
+                <a:latin typeface="Arial" panose="020B0604020202020204" pitchFamily="34" charset="0"/>
+                <a:cs typeface="Arial" panose="020B0604020202020204" pitchFamily="34" charset="0"/>
+              </a:rPr>
+              <a:t>el</a:t>
+            </a:r>
+            <a:r>
+              <a:rPr lang="en-US" sz="1200" dirty="0">
+                <a:latin typeface="Arial" panose="020B0604020202020204" pitchFamily="34" charset="0"/>
+                <a:cs typeface="Arial" panose="020B0604020202020204" pitchFamily="34" charset="0"/>
+              </a:rPr>
+              <a:t> campo </a:t>
+            </a:r>
+            <a:r>
+              <a:rPr lang="en-US" sz="1200" dirty="0" err="1">
+                <a:latin typeface="Arial" panose="020B0604020202020204" pitchFamily="34" charset="0"/>
+                <a:cs typeface="Arial" panose="020B0604020202020204" pitchFamily="34" charset="0"/>
+              </a:rPr>
+              <a:t>en</a:t>
+            </a:r>
+            <a:r>
+              <a:rPr lang="en-US" sz="1200" dirty="0">
+                <a:latin typeface="Arial" panose="020B0604020202020204" pitchFamily="34" charset="0"/>
+                <a:cs typeface="Arial" panose="020B0604020202020204" pitchFamily="34" charset="0"/>
+              </a:rPr>
+              <a:t> </a:t>
+            </a:r>
+            <a:r>
+              <a:rPr lang="en-US" sz="1200" dirty="0" err="1">
+                <a:latin typeface="Arial" panose="020B0604020202020204" pitchFamily="34" charset="0"/>
+                <a:cs typeface="Arial" panose="020B0604020202020204" pitchFamily="34" charset="0"/>
+              </a:rPr>
+              <a:t>los</a:t>
+            </a:r>
+            <a:r>
+              <a:rPr lang="en-US" sz="1200" dirty="0">
+                <a:latin typeface="Arial" panose="020B0604020202020204" pitchFamily="34" charset="0"/>
+                <a:cs typeface="Arial" panose="020B0604020202020204" pitchFamily="34" charset="0"/>
+              </a:rPr>
+              <a:t> </a:t>
+            </a:r>
+            <a:r>
+              <a:rPr lang="en-US" sz="1200" dirty="0" err="1">
+                <a:latin typeface="Arial" panose="020B0604020202020204" pitchFamily="34" charset="0"/>
+                <a:cs typeface="Arial" panose="020B0604020202020204" pitchFamily="34" charset="0"/>
+              </a:rPr>
+              <a:t>modos</a:t>
+            </a:r>
+            <a:r>
+              <a:rPr lang="en-US" sz="1200" dirty="0">
+                <a:latin typeface="Arial" panose="020B0604020202020204" pitchFamily="34" charset="0"/>
+                <a:cs typeface="Arial" panose="020B0604020202020204" pitchFamily="34" charset="0"/>
+              </a:rPr>
+              <a:t> 0 (TE) y 1 (TM) </a:t>
+            </a:r>
+            <a:r>
+              <a:rPr lang="en-US" sz="1200" dirty="0" err="1">
+                <a:latin typeface="Arial" panose="020B0604020202020204" pitchFamily="34" charset="0"/>
+                <a:cs typeface="Arial" panose="020B0604020202020204" pitchFamily="34" charset="0"/>
+              </a:rPr>
+              <a:t>estan</a:t>
+            </a:r>
+            <a:r>
+              <a:rPr lang="en-US" sz="1200" dirty="0">
+                <a:latin typeface="Arial" panose="020B0604020202020204" pitchFamily="34" charset="0"/>
+                <a:cs typeface="Arial" panose="020B0604020202020204" pitchFamily="34" charset="0"/>
+              </a:rPr>
+              <a:t> </a:t>
+            </a:r>
+            <a:r>
+              <a:rPr lang="en-US" sz="1200" dirty="0" err="1">
+                <a:latin typeface="Arial" panose="020B0604020202020204" pitchFamily="34" charset="0"/>
+                <a:cs typeface="Arial" panose="020B0604020202020204" pitchFamily="34" charset="0"/>
+              </a:rPr>
+              <a:t>confinados</a:t>
+            </a:r>
+            <a:r>
+              <a:rPr lang="en-US" sz="1200" dirty="0">
+                <a:latin typeface="Arial" panose="020B0604020202020204" pitchFamily="34" charset="0"/>
+                <a:cs typeface="Arial" panose="020B0604020202020204" pitchFamily="34" charset="0"/>
+              </a:rPr>
+              <a:t> a </a:t>
+            </a:r>
+            <a:r>
+              <a:rPr lang="en-US" sz="1200" dirty="0" err="1">
+                <a:latin typeface="Arial" panose="020B0604020202020204" pitchFamily="34" charset="0"/>
+                <a:cs typeface="Arial" panose="020B0604020202020204" pitchFamily="34" charset="0"/>
+              </a:rPr>
+              <a:t>difernecia</a:t>
+            </a:r>
+            <a:r>
+              <a:rPr lang="en-US" sz="1200" dirty="0">
+                <a:latin typeface="Arial" panose="020B0604020202020204" pitchFamily="34" charset="0"/>
+                <a:cs typeface="Arial" panose="020B0604020202020204" pitchFamily="34" charset="0"/>
+              </a:rPr>
+              <a:t> de </a:t>
+            </a:r>
+            <a:r>
+              <a:rPr lang="en-US" sz="1200" dirty="0" err="1">
+                <a:latin typeface="Arial" panose="020B0604020202020204" pitchFamily="34" charset="0"/>
+                <a:cs typeface="Arial" panose="020B0604020202020204" pitchFamily="34" charset="0"/>
+              </a:rPr>
+              <a:t>los</a:t>
+            </a:r>
+            <a:r>
+              <a:rPr lang="en-US" sz="1200" dirty="0">
+                <a:latin typeface="Arial" panose="020B0604020202020204" pitchFamily="34" charset="0"/>
+                <a:cs typeface="Arial" panose="020B0604020202020204" pitchFamily="34" charset="0"/>
+              </a:rPr>
+              <a:t> </a:t>
+            </a:r>
+            <a:r>
+              <a:rPr lang="en-US" sz="1200" dirty="0" err="1">
+                <a:latin typeface="Arial" panose="020B0604020202020204" pitchFamily="34" charset="0"/>
+                <a:cs typeface="Arial" panose="020B0604020202020204" pitchFamily="34" charset="0"/>
+              </a:rPr>
+              <a:t>modos</a:t>
+            </a:r>
+            <a:r>
+              <a:rPr lang="en-US" sz="1200" dirty="0">
+                <a:latin typeface="Arial" panose="020B0604020202020204" pitchFamily="34" charset="0"/>
+                <a:cs typeface="Arial" panose="020B0604020202020204" pitchFamily="34" charset="0"/>
+              </a:rPr>
+              <a:t> 2 (TE) y 3 (TM).</a:t>
+            </a:r>
           </a:p>
           <a:p>
             <a:pPr algn="just"/>
@@ -5993,6 +6298,806 @@
 </file>
 
 <file path=ppt/slides/slide4.xml><?xml version="1.0" encoding="utf-8"?>
+<p:sld xmlns:a="http://schemas.openxmlformats.org/drawingml/2006/main" xmlns:r="http://schemas.openxmlformats.org/officeDocument/2006/relationships" xmlns:p="http://schemas.openxmlformats.org/presentationml/2006/main">
+  <p:cSld>
+    <p:spTree>
+      <p:nvGrpSpPr>
+        <p:cNvPr id="1" name=""/>
+        <p:cNvGrpSpPr/>
+        <p:nvPr/>
+      </p:nvGrpSpPr>
+      <p:grpSpPr>
+        <a:xfrm>
+          <a:off x="0" y="0"/>
+          <a:ext cx="0" cy="0"/>
+          <a:chOff x="0" y="0"/>
+          <a:chExt cx="0" cy="0"/>
+        </a:xfrm>
+      </p:grpSpPr>
+      <p:sp>
+        <p:nvSpPr>
+          <p:cNvPr id="2" name="Título 1">
+            <a:extLst>
+              <a:ext uri="{FF2B5EF4-FFF2-40B4-BE49-F238E27FC236}">
+                <a16:creationId xmlns:a16="http://schemas.microsoft.com/office/drawing/2014/main" id="{5F9E763E-BC09-F2D2-5B5F-BA40B7820425}"/>
+              </a:ext>
+            </a:extLst>
+          </p:cNvPr>
+          <p:cNvSpPr>
+            <a:spLocks noGrp="1"/>
+          </p:cNvSpPr>
+          <p:nvPr>
+            <p:ph type="title"/>
+          </p:nvPr>
+        </p:nvSpPr>
+        <p:spPr/>
+        <p:txBody>
+          <a:bodyPr/>
+          <a:lstStyle/>
+          <a:p>
+            <a:r>
+              <a:rPr lang="es-ES" dirty="0"/>
+              <a:t>Comentario resultados obtenidos</a:t>
+            </a:r>
+          </a:p>
+        </p:txBody>
+      </p:sp>
+      <p:sp>
+        <p:nvSpPr>
+          <p:cNvPr id="3" name="Marcador de texto 2">
+            <a:extLst>
+              <a:ext uri="{FF2B5EF4-FFF2-40B4-BE49-F238E27FC236}">
+                <a16:creationId xmlns:a16="http://schemas.microsoft.com/office/drawing/2014/main" id="{88D9BAE8-7464-7A8D-1505-101CD955D4A9}"/>
+              </a:ext>
+            </a:extLst>
+          </p:cNvPr>
+          <p:cNvSpPr>
+            <a:spLocks noGrp="1"/>
+          </p:cNvSpPr>
+          <p:nvPr>
+            <p:ph type="body" idx="1"/>
+          </p:nvPr>
+        </p:nvSpPr>
+        <p:spPr>
+          <a:xfrm>
+            <a:off x="543897" y="667952"/>
+            <a:ext cx="3991341" cy="646331"/>
+          </a:xfrm>
+        </p:spPr>
+        <p:txBody>
+          <a:bodyPr/>
+          <a:lstStyle/>
+          <a:p>
+            <a:pPr algn="just"/>
+            <a:r>
+              <a:rPr lang="en-US" sz="1400" dirty="0" err="1">
+                <a:latin typeface="Arial" panose="020B0604020202020204" pitchFamily="34" charset="0"/>
+                <a:cs typeface="Arial" panose="020B0604020202020204" pitchFamily="34" charset="0"/>
+              </a:rPr>
+              <a:t>Tenemos</a:t>
+            </a:r>
+            <a:r>
+              <a:rPr lang="en-US" sz="1400" dirty="0">
+                <a:latin typeface="Arial" panose="020B0604020202020204" pitchFamily="34" charset="0"/>
+                <a:cs typeface="Arial" panose="020B0604020202020204" pitchFamily="34" charset="0"/>
+              </a:rPr>
+              <a:t> 4 </a:t>
+            </a:r>
+            <a:r>
+              <a:rPr lang="en-US" sz="1400" dirty="0" err="1">
+                <a:latin typeface="Arial" panose="020B0604020202020204" pitchFamily="34" charset="0"/>
+                <a:cs typeface="Arial" panose="020B0604020202020204" pitchFamily="34" charset="0"/>
+              </a:rPr>
+              <a:t>modos</a:t>
+            </a:r>
+            <a:r>
+              <a:rPr lang="en-US" sz="1400" dirty="0">
+                <a:latin typeface="Arial" panose="020B0604020202020204" pitchFamily="34" charset="0"/>
+                <a:cs typeface="Arial" panose="020B0604020202020204" pitchFamily="34" charset="0"/>
+              </a:rPr>
+              <a:t> </a:t>
+            </a:r>
+            <a:r>
+              <a:rPr lang="en-US" sz="1400" dirty="0" err="1">
+                <a:latin typeface="Arial" panose="020B0604020202020204" pitchFamily="34" charset="0"/>
+                <a:cs typeface="Arial" panose="020B0604020202020204" pitchFamily="34" charset="0"/>
+              </a:rPr>
+              <a:t>que</a:t>
+            </a:r>
+            <a:r>
+              <a:rPr lang="en-US" sz="1400" dirty="0">
+                <a:latin typeface="Arial" panose="020B0604020202020204" pitchFamily="34" charset="0"/>
+                <a:cs typeface="Arial" panose="020B0604020202020204" pitchFamily="34" charset="0"/>
+              </a:rPr>
+              <a:t> se </a:t>
+            </a:r>
+            <a:r>
+              <a:rPr lang="en-US" sz="1400" dirty="0" err="1">
+                <a:latin typeface="Arial" panose="020B0604020202020204" pitchFamily="34" charset="0"/>
+                <a:cs typeface="Arial" panose="020B0604020202020204" pitchFamily="34" charset="0"/>
+              </a:rPr>
+              <a:t>propagan</a:t>
+            </a:r>
+            <a:r>
+              <a:rPr lang="en-US" sz="1400" dirty="0">
+                <a:latin typeface="Arial" panose="020B0604020202020204" pitchFamily="34" charset="0"/>
+                <a:cs typeface="Arial" panose="020B0604020202020204" pitchFamily="34" charset="0"/>
+              </a:rPr>
+              <a:t>: </a:t>
+            </a:r>
+            <a:r>
+              <a:rPr lang="en-US" sz="1400" dirty="0" err="1">
+                <a:latin typeface="Arial" panose="020B0604020202020204" pitchFamily="34" charset="0"/>
+                <a:cs typeface="Arial" panose="020B0604020202020204" pitchFamily="34" charset="0"/>
+              </a:rPr>
+              <a:t>los</a:t>
+            </a:r>
+            <a:r>
+              <a:rPr lang="en-US" sz="1400" dirty="0">
+                <a:latin typeface="Arial" panose="020B0604020202020204" pitchFamily="34" charset="0"/>
+                <a:cs typeface="Arial" panose="020B0604020202020204" pitchFamily="34" charset="0"/>
+              </a:rPr>
+              <a:t> </a:t>
+            </a:r>
+            <a:r>
+              <a:rPr lang="en-US" sz="1400" dirty="0" err="1">
+                <a:latin typeface="Arial" panose="020B0604020202020204" pitchFamily="34" charset="0"/>
+                <a:cs typeface="Arial" panose="020B0604020202020204" pitchFamily="34" charset="0"/>
+              </a:rPr>
+              <a:t>modos</a:t>
+            </a:r>
+            <a:r>
+              <a:rPr lang="en-US" sz="1400" dirty="0">
+                <a:latin typeface="Arial" panose="020B0604020202020204" pitchFamily="34" charset="0"/>
+                <a:cs typeface="Arial" panose="020B0604020202020204" pitchFamily="34" charset="0"/>
+              </a:rPr>
+              <a:t> 0 y 2 son </a:t>
+            </a:r>
+            <a:r>
+              <a:rPr lang="en-US" sz="1400" dirty="0" err="1">
+                <a:latin typeface="Arial" panose="020B0604020202020204" pitchFamily="34" charset="0"/>
+                <a:cs typeface="Arial" panose="020B0604020202020204" pitchFamily="34" charset="0"/>
+              </a:rPr>
+              <a:t>modos</a:t>
+            </a:r>
+            <a:r>
+              <a:rPr lang="en-US" sz="1400" dirty="0">
+                <a:latin typeface="Arial" panose="020B0604020202020204" pitchFamily="34" charset="0"/>
+                <a:cs typeface="Arial" panose="020B0604020202020204" pitchFamily="34" charset="0"/>
+              </a:rPr>
+              <a:t> TE y </a:t>
+            </a:r>
+            <a:r>
+              <a:rPr lang="en-US" sz="1400" dirty="0" err="1">
+                <a:latin typeface="Arial" panose="020B0604020202020204" pitchFamily="34" charset="0"/>
+                <a:cs typeface="Arial" panose="020B0604020202020204" pitchFamily="34" charset="0"/>
+              </a:rPr>
+              <a:t>los</a:t>
+            </a:r>
+            <a:r>
+              <a:rPr lang="en-US" sz="1400" dirty="0">
+                <a:latin typeface="Arial" panose="020B0604020202020204" pitchFamily="34" charset="0"/>
+                <a:cs typeface="Arial" panose="020B0604020202020204" pitchFamily="34" charset="0"/>
+              </a:rPr>
+              <a:t> </a:t>
+            </a:r>
+            <a:r>
+              <a:rPr lang="en-US" sz="1400" dirty="0" err="1">
+                <a:latin typeface="Arial" panose="020B0604020202020204" pitchFamily="34" charset="0"/>
+                <a:cs typeface="Arial" panose="020B0604020202020204" pitchFamily="34" charset="0"/>
+              </a:rPr>
+              <a:t>modos</a:t>
+            </a:r>
+            <a:r>
+              <a:rPr lang="en-US" sz="1400" dirty="0">
+                <a:latin typeface="Arial" panose="020B0604020202020204" pitchFamily="34" charset="0"/>
+                <a:cs typeface="Arial" panose="020B0604020202020204" pitchFamily="34" charset="0"/>
+              </a:rPr>
+              <a:t> 1 y 3 son TM.</a:t>
+            </a:r>
+          </a:p>
+          <a:p>
+            <a:endParaRPr lang="es-ES" sz="1400" dirty="0"/>
+          </a:p>
+        </p:txBody>
+      </p:sp>
+      <p:sp>
+        <p:nvSpPr>
+          <p:cNvPr id="4" name="Marcador de pie de página 3">
+            <a:extLst>
+              <a:ext uri="{FF2B5EF4-FFF2-40B4-BE49-F238E27FC236}">
+                <a16:creationId xmlns:a16="http://schemas.microsoft.com/office/drawing/2014/main" id="{F050BDDD-47A2-CCA3-6DFC-17F74A4D8525}"/>
+              </a:ext>
+            </a:extLst>
+          </p:cNvPr>
+          <p:cNvSpPr>
+            <a:spLocks noGrp="1"/>
+          </p:cNvSpPr>
+          <p:nvPr>
+            <p:ph type="ftr" sz="quarter" idx="5"/>
+          </p:nvPr>
+        </p:nvSpPr>
+        <p:spPr/>
+        <p:txBody>
+          <a:bodyPr/>
+          <a:lstStyle/>
+          <a:p>
+            <a:pPr marL="12700">
+              <a:spcBef>
+                <a:spcPts val="15"/>
+              </a:spcBef>
+            </a:pPr>
+            <a:r>
+              <a:rPr lang="es-ES" spc="-5"/>
+              <a:t>LAB 0.1. MODESOLVER</a:t>
+            </a:r>
+            <a:endParaRPr lang="es-ES" spc="-5" dirty="0"/>
+          </a:p>
+        </p:txBody>
+      </p:sp>
+      <p:sp>
+        <p:nvSpPr>
+          <p:cNvPr id="5" name="Marcador de número de diapositiva 4">
+            <a:extLst>
+              <a:ext uri="{FF2B5EF4-FFF2-40B4-BE49-F238E27FC236}">
+                <a16:creationId xmlns:a16="http://schemas.microsoft.com/office/drawing/2014/main" id="{000B7220-4CEE-6025-7B44-69AD7E721AE8}"/>
+              </a:ext>
+            </a:extLst>
+          </p:cNvPr>
+          <p:cNvSpPr>
+            <a:spLocks noGrp="1"/>
+          </p:cNvSpPr>
+          <p:nvPr>
+            <p:ph type="sldNum" sz="quarter" idx="7"/>
+          </p:nvPr>
+        </p:nvSpPr>
+        <p:spPr/>
+        <p:txBody>
+          <a:bodyPr/>
+          <a:lstStyle/>
+          <a:p>
+            <a:fld id="{B6F15528-21DE-4FAA-801E-634DDDAF4B2B}" type="slidenum">
+              <a:rPr lang="es-ES" smtClean="0"/>
+              <a:t>4</a:t>
+            </a:fld>
+            <a:endParaRPr lang="es-ES"/>
+          </a:p>
+        </p:txBody>
+      </p:sp>
+      <p:pic>
+        <p:nvPicPr>
+          <p:cNvPr id="7" name="Imagen 6" descr="Interfaz de usuario gráfica, Texto&#10;&#10;El contenido generado por IA puede ser incorrecto.">
+            <a:extLst>
+              <a:ext uri="{FF2B5EF4-FFF2-40B4-BE49-F238E27FC236}">
+                <a16:creationId xmlns:a16="http://schemas.microsoft.com/office/drawing/2014/main" id="{D0052FFC-265F-BD00-A1F5-79369E296432}"/>
+              </a:ext>
+            </a:extLst>
+          </p:cNvPr>
+          <p:cNvPicPr>
+            <a:picLocks noChangeAspect="1"/>
+          </p:cNvPicPr>
+          <p:nvPr/>
+        </p:nvPicPr>
+        <p:blipFill>
+          <a:blip r:embed="rId2"/>
+          <a:stretch>
+            <a:fillRect/>
+          </a:stretch>
+        </p:blipFill>
+        <p:spPr>
+          <a:xfrm>
+            <a:off x="701979" y="1451633"/>
+            <a:ext cx="3448050" cy="1736563"/>
+          </a:xfrm>
+          <a:prstGeom prst="rect">
+            <a:avLst/>
+          </a:prstGeom>
+        </p:spPr>
+      </p:pic>
+      <p:sp>
+        <p:nvSpPr>
+          <p:cNvPr id="8" name="Marcador de texto 2">
+            <a:extLst>
+              <a:ext uri="{FF2B5EF4-FFF2-40B4-BE49-F238E27FC236}">
+                <a16:creationId xmlns:a16="http://schemas.microsoft.com/office/drawing/2014/main" id="{AE70B213-9763-4DA9-8BF3-C01D20E65E05}"/>
+              </a:ext>
+            </a:extLst>
+          </p:cNvPr>
+          <p:cNvSpPr txBox="1">
+            <a:spLocks/>
+          </p:cNvSpPr>
+          <p:nvPr/>
+        </p:nvSpPr>
+        <p:spPr>
+          <a:xfrm>
+            <a:off x="5257800" y="548287"/>
+            <a:ext cx="6553200" cy="1292662"/>
+          </a:xfrm>
+          <a:prstGeom prst="rect">
+            <a:avLst/>
+          </a:prstGeom>
+        </p:spPr>
+        <p:txBody>
+          <a:bodyPr wrap="square" lIns="0" tIns="0" rIns="0" bIns="0">
+            <a:spAutoFit/>
+          </a:bodyPr>
+          <a:lstStyle>
+            <a:lvl1pPr marL="0">
+              <a:defRPr>
+                <a:latin typeface="+mn-lt"/>
+                <a:ea typeface="+mn-ea"/>
+                <a:cs typeface="+mn-cs"/>
+              </a:defRPr>
+            </a:lvl1pPr>
+            <a:lvl2pPr marL="457200">
+              <a:defRPr>
+                <a:latin typeface="+mn-lt"/>
+                <a:ea typeface="+mn-ea"/>
+                <a:cs typeface="+mn-cs"/>
+              </a:defRPr>
+            </a:lvl2pPr>
+            <a:lvl3pPr marL="914400">
+              <a:defRPr>
+                <a:latin typeface="+mn-lt"/>
+                <a:ea typeface="+mn-ea"/>
+                <a:cs typeface="+mn-cs"/>
+              </a:defRPr>
+            </a:lvl3pPr>
+            <a:lvl4pPr marL="1371600">
+              <a:defRPr>
+                <a:latin typeface="+mn-lt"/>
+                <a:ea typeface="+mn-ea"/>
+                <a:cs typeface="+mn-cs"/>
+              </a:defRPr>
+            </a:lvl4pPr>
+            <a:lvl5pPr marL="1828800">
+              <a:defRPr>
+                <a:latin typeface="+mn-lt"/>
+                <a:ea typeface="+mn-ea"/>
+                <a:cs typeface="+mn-cs"/>
+              </a:defRPr>
+            </a:lvl5pPr>
+            <a:lvl6pPr marL="2286000">
+              <a:defRPr>
+                <a:latin typeface="+mn-lt"/>
+                <a:ea typeface="+mn-ea"/>
+                <a:cs typeface="+mn-cs"/>
+              </a:defRPr>
+            </a:lvl6pPr>
+            <a:lvl7pPr marL="2743200">
+              <a:defRPr>
+                <a:latin typeface="+mn-lt"/>
+                <a:ea typeface="+mn-ea"/>
+                <a:cs typeface="+mn-cs"/>
+              </a:defRPr>
+            </a:lvl7pPr>
+            <a:lvl8pPr marL="3200400">
+              <a:defRPr>
+                <a:latin typeface="+mn-lt"/>
+                <a:ea typeface="+mn-ea"/>
+                <a:cs typeface="+mn-cs"/>
+              </a:defRPr>
+            </a:lvl8pPr>
+            <a:lvl9pPr marL="3657600">
+              <a:defRPr>
+                <a:latin typeface="+mn-lt"/>
+                <a:ea typeface="+mn-ea"/>
+                <a:cs typeface="+mn-cs"/>
+              </a:defRPr>
+            </a:lvl9pPr>
+          </a:lstStyle>
+          <a:p>
+            <a:pPr algn="just"/>
+            <a:r>
+              <a:rPr lang="en-US" sz="1400" dirty="0">
+                <a:latin typeface="Arial" panose="020B0604020202020204" pitchFamily="34" charset="0"/>
+                <a:cs typeface="Arial" panose="020B0604020202020204" pitchFamily="34" charset="0"/>
+              </a:rPr>
+              <a:t>Se </a:t>
+            </a:r>
+            <a:r>
+              <a:rPr lang="en-US" sz="1400" dirty="0" err="1">
+                <a:latin typeface="Arial" panose="020B0604020202020204" pitchFamily="34" charset="0"/>
+                <a:cs typeface="Arial" panose="020B0604020202020204" pitchFamily="34" charset="0"/>
+              </a:rPr>
+              <a:t>puede</a:t>
+            </a:r>
+            <a:r>
+              <a:rPr lang="en-US" sz="1400" dirty="0">
+                <a:latin typeface="Arial" panose="020B0604020202020204" pitchFamily="34" charset="0"/>
+                <a:cs typeface="Arial" panose="020B0604020202020204" pitchFamily="34" charset="0"/>
+              </a:rPr>
+              <a:t> </a:t>
+            </a:r>
+            <a:r>
+              <a:rPr lang="en-US" sz="1400" dirty="0" err="1">
+                <a:latin typeface="Arial" panose="020B0604020202020204" pitchFamily="34" charset="0"/>
+                <a:cs typeface="Arial" panose="020B0604020202020204" pitchFamily="34" charset="0"/>
+              </a:rPr>
+              <a:t>observar</a:t>
+            </a:r>
+            <a:r>
+              <a:rPr lang="en-US" sz="1400" dirty="0">
+                <a:latin typeface="Arial" panose="020B0604020202020204" pitchFamily="34" charset="0"/>
+                <a:cs typeface="Arial" panose="020B0604020202020204" pitchFamily="34" charset="0"/>
+              </a:rPr>
+              <a:t> </a:t>
+            </a:r>
+            <a:r>
+              <a:rPr lang="en-US" sz="1400" dirty="0" err="1">
+                <a:latin typeface="Arial" panose="020B0604020202020204" pitchFamily="34" charset="0"/>
+                <a:cs typeface="Arial" panose="020B0604020202020204" pitchFamily="34" charset="0"/>
+              </a:rPr>
+              <a:t>en</a:t>
+            </a:r>
+            <a:r>
+              <a:rPr lang="en-US" sz="1400" dirty="0">
+                <a:latin typeface="Arial" panose="020B0604020202020204" pitchFamily="34" charset="0"/>
+                <a:cs typeface="Arial" panose="020B0604020202020204" pitchFamily="34" charset="0"/>
+              </a:rPr>
+              <a:t> </a:t>
+            </a:r>
+            <a:r>
+              <a:rPr lang="en-US" sz="1400" dirty="0" err="1">
+                <a:latin typeface="Arial" panose="020B0604020202020204" pitchFamily="34" charset="0"/>
+                <a:cs typeface="Arial" panose="020B0604020202020204" pitchFamily="34" charset="0"/>
+              </a:rPr>
+              <a:t>los</a:t>
+            </a:r>
+            <a:r>
+              <a:rPr lang="en-US" sz="1400" dirty="0">
+                <a:latin typeface="Arial" panose="020B0604020202020204" pitchFamily="34" charset="0"/>
+                <a:cs typeface="Arial" panose="020B0604020202020204" pitchFamily="34" charset="0"/>
+              </a:rPr>
+              <a:t> plots </a:t>
+            </a:r>
+            <a:r>
+              <a:rPr lang="en-US" sz="1400" dirty="0" err="1">
+                <a:latin typeface="Arial" panose="020B0604020202020204" pitchFamily="34" charset="0"/>
+                <a:cs typeface="Arial" panose="020B0604020202020204" pitchFamily="34" charset="0"/>
+              </a:rPr>
+              <a:t>que</a:t>
+            </a:r>
+            <a:r>
+              <a:rPr lang="en-US" sz="1400" dirty="0">
+                <a:latin typeface="Arial" panose="020B0604020202020204" pitchFamily="34" charset="0"/>
+                <a:cs typeface="Arial" panose="020B0604020202020204" pitchFamily="34" charset="0"/>
+              </a:rPr>
+              <a:t> </a:t>
+            </a:r>
+            <a:r>
+              <a:rPr lang="en-US" sz="1400" dirty="0" err="1">
+                <a:latin typeface="Arial" panose="020B0604020202020204" pitchFamily="34" charset="0"/>
+                <a:cs typeface="Arial" panose="020B0604020202020204" pitchFamily="34" charset="0"/>
+              </a:rPr>
+              <a:t>el</a:t>
+            </a:r>
+            <a:r>
+              <a:rPr lang="en-US" sz="1400" dirty="0">
+                <a:latin typeface="Arial" panose="020B0604020202020204" pitchFamily="34" charset="0"/>
+                <a:cs typeface="Arial" panose="020B0604020202020204" pitchFamily="34" charset="0"/>
+              </a:rPr>
+              <a:t> campo </a:t>
+            </a:r>
+            <a:r>
+              <a:rPr lang="en-US" sz="1400" dirty="0" err="1">
+                <a:latin typeface="Arial" panose="020B0604020202020204" pitchFamily="34" charset="0"/>
+                <a:cs typeface="Arial" panose="020B0604020202020204" pitchFamily="34" charset="0"/>
+              </a:rPr>
+              <a:t>en</a:t>
+            </a:r>
+            <a:r>
+              <a:rPr lang="en-US" sz="1400" dirty="0">
+                <a:latin typeface="Arial" panose="020B0604020202020204" pitchFamily="34" charset="0"/>
+                <a:cs typeface="Arial" panose="020B0604020202020204" pitchFamily="34" charset="0"/>
+              </a:rPr>
+              <a:t> </a:t>
+            </a:r>
+            <a:r>
+              <a:rPr lang="en-US" sz="1400" dirty="0" err="1">
+                <a:latin typeface="Arial" panose="020B0604020202020204" pitchFamily="34" charset="0"/>
+                <a:cs typeface="Arial" panose="020B0604020202020204" pitchFamily="34" charset="0"/>
+              </a:rPr>
+              <a:t>los</a:t>
+            </a:r>
+            <a:r>
+              <a:rPr lang="en-US" sz="1400" dirty="0">
+                <a:latin typeface="Arial" panose="020B0604020202020204" pitchFamily="34" charset="0"/>
+                <a:cs typeface="Arial" panose="020B0604020202020204" pitchFamily="34" charset="0"/>
+              </a:rPr>
+              <a:t> </a:t>
+            </a:r>
+            <a:r>
+              <a:rPr lang="en-US" sz="1400" dirty="0" err="1">
+                <a:latin typeface="Arial" panose="020B0604020202020204" pitchFamily="34" charset="0"/>
+                <a:cs typeface="Arial" panose="020B0604020202020204" pitchFamily="34" charset="0"/>
+              </a:rPr>
+              <a:t>modos</a:t>
+            </a:r>
+            <a:r>
+              <a:rPr lang="en-US" sz="1400" dirty="0">
+                <a:latin typeface="Arial" panose="020B0604020202020204" pitchFamily="34" charset="0"/>
+                <a:cs typeface="Arial" panose="020B0604020202020204" pitchFamily="34" charset="0"/>
+              </a:rPr>
+              <a:t> 0 (TE) y 1 (TM) </a:t>
+            </a:r>
+            <a:r>
+              <a:rPr lang="en-US" sz="1400" dirty="0" err="1">
+                <a:latin typeface="Arial" panose="020B0604020202020204" pitchFamily="34" charset="0"/>
+                <a:cs typeface="Arial" panose="020B0604020202020204" pitchFamily="34" charset="0"/>
+              </a:rPr>
+              <a:t>estan</a:t>
+            </a:r>
+            <a:r>
+              <a:rPr lang="en-US" sz="1400" dirty="0">
+                <a:latin typeface="Arial" panose="020B0604020202020204" pitchFamily="34" charset="0"/>
+                <a:cs typeface="Arial" panose="020B0604020202020204" pitchFamily="34" charset="0"/>
+              </a:rPr>
+              <a:t> </a:t>
+            </a:r>
+            <a:r>
+              <a:rPr lang="en-US" sz="1400" dirty="0" err="1">
+                <a:latin typeface="Arial" panose="020B0604020202020204" pitchFamily="34" charset="0"/>
+                <a:cs typeface="Arial" panose="020B0604020202020204" pitchFamily="34" charset="0"/>
+              </a:rPr>
+              <a:t>confinados</a:t>
+            </a:r>
+            <a:r>
+              <a:rPr lang="en-US" sz="1400" dirty="0">
+                <a:latin typeface="Arial" panose="020B0604020202020204" pitchFamily="34" charset="0"/>
+                <a:cs typeface="Arial" panose="020B0604020202020204" pitchFamily="34" charset="0"/>
+              </a:rPr>
+              <a:t> a </a:t>
+            </a:r>
+            <a:r>
+              <a:rPr lang="en-US" sz="1400" dirty="0" err="1">
+                <a:latin typeface="Arial" panose="020B0604020202020204" pitchFamily="34" charset="0"/>
+                <a:cs typeface="Arial" panose="020B0604020202020204" pitchFamily="34" charset="0"/>
+              </a:rPr>
+              <a:t>diferencia</a:t>
+            </a:r>
+            <a:r>
+              <a:rPr lang="en-US" sz="1400" dirty="0">
+                <a:latin typeface="Arial" panose="020B0604020202020204" pitchFamily="34" charset="0"/>
+                <a:cs typeface="Arial" panose="020B0604020202020204" pitchFamily="34" charset="0"/>
+              </a:rPr>
+              <a:t> de </a:t>
+            </a:r>
+            <a:r>
+              <a:rPr lang="en-US" sz="1400" dirty="0" err="1">
+                <a:latin typeface="Arial" panose="020B0604020202020204" pitchFamily="34" charset="0"/>
+                <a:cs typeface="Arial" panose="020B0604020202020204" pitchFamily="34" charset="0"/>
+              </a:rPr>
+              <a:t>los</a:t>
+            </a:r>
+            <a:r>
+              <a:rPr lang="en-US" sz="1400" dirty="0">
+                <a:latin typeface="Arial" panose="020B0604020202020204" pitchFamily="34" charset="0"/>
+                <a:cs typeface="Arial" panose="020B0604020202020204" pitchFamily="34" charset="0"/>
+              </a:rPr>
+              <a:t> </a:t>
+            </a:r>
+            <a:r>
+              <a:rPr lang="en-US" sz="1400" dirty="0" err="1">
+                <a:latin typeface="Arial" panose="020B0604020202020204" pitchFamily="34" charset="0"/>
+                <a:cs typeface="Arial" panose="020B0604020202020204" pitchFamily="34" charset="0"/>
+              </a:rPr>
+              <a:t>modos</a:t>
+            </a:r>
+            <a:r>
+              <a:rPr lang="en-US" sz="1400" dirty="0">
+                <a:latin typeface="Arial" panose="020B0604020202020204" pitchFamily="34" charset="0"/>
+                <a:cs typeface="Arial" panose="020B0604020202020204" pitchFamily="34" charset="0"/>
+              </a:rPr>
+              <a:t> 2 (TE) y 3 (TM) </a:t>
+            </a:r>
+            <a:r>
+              <a:rPr lang="en-US" sz="1400" dirty="0" err="1">
+                <a:latin typeface="Arial" panose="020B0604020202020204" pitchFamily="34" charset="0"/>
+                <a:cs typeface="Arial" panose="020B0604020202020204" pitchFamily="34" charset="0"/>
+              </a:rPr>
+              <a:t>que</a:t>
+            </a:r>
+            <a:r>
+              <a:rPr lang="en-US" sz="1400" dirty="0">
+                <a:latin typeface="Arial" panose="020B0604020202020204" pitchFamily="34" charset="0"/>
+                <a:cs typeface="Arial" panose="020B0604020202020204" pitchFamily="34" charset="0"/>
+              </a:rPr>
+              <a:t> no </a:t>
+            </a:r>
+            <a:r>
+              <a:rPr lang="en-US" sz="1400" dirty="0" err="1">
+                <a:latin typeface="Arial" panose="020B0604020202020204" pitchFamily="34" charset="0"/>
+                <a:cs typeface="Arial" panose="020B0604020202020204" pitchFamily="34" charset="0"/>
+              </a:rPr>
+              <a:t>estan</a:t>
+            </a:r>
+            <a:r>
+              <a:rPr lang="en-US" sz="1400" dirty="0">
+                <a:latin typeface="Arial" panose="020B0604020202020204" pitchFamily="34" charset="0"/>
+                <a:cs typeface="Arial" panose="020B0604020202020204" pitchFamily="34" charset="0"/>
+              </a:rPr>
+              <a:t> </a:t>
+            </a:r>
+            <a:r>
+              <a:rPr lang="en-US" sz="1400" dirty="0" err="1">
+                <a:latin typeface="Arial" panose="020B0604020202020204" pitchFamily="34" charset="0"/>
+                <a:cs typeface="Arial" panose="020B0604020202020204" pitchFamily="34" charset="0"/>
+              </a:rPr>
+              <a:t>confinados</a:t>
+            </a:r>
+            <a:r>
+              <a:rPr lang="en-US" sz="1400" dirty="0">
+                <a:latin typeface="Arial" panose="020B0604020202020204" pitchFamily="34" charset="0"/>
+                <a:cs typeface="Arial" panose="020B0604020202020204" pitchFamily="34" charset="0"/>
+              </a:rPr>
+              <a:t>.</a:t>
+            </a:r>
+          </a:p>
+          <a:p>
+            <a:pPr algn="just"/>
+            <a:endParaRPr lang="en-US" sz="1400" dirty="0">
+              <a:latin typeface="Arial" panose="020B0604020202020204" pitchFamily="34" charset="0"/>
+              <a:cs typeface="Arial" panose="020B0604020202020204" pitchFamily="34" charset="0"/>
+            </a:endParaRPr>
+          </a:p>
+          <a:p>
+            <a:pPr algn="just"/>
+            <a:endParaRPr lang="en-US" sz="1400" dirty="0">
+              <a:latin typeface="Arial" panose="020B0604020202020204" pitchFamily="34" charset="0"/>
+              <a:cs typeface="Arial" panose="020B0604020202020204" pitchFamily="34" charset="0"/>
+            </a:endParaRPr>
+          </a:p>
+          <a:p>
+            <a:pPr algn="just"/>
+            <a:endParaRPr lang="en-US" sz="1400" dirty="0">
+              <a:latin typeface="Arial" panose="020B0604020202020204" pitchFamily="34" charset="0"/>
+              <a:cs typeface="Arial" panose="020B0604020202020204" pitchFamily="34" charset="0"/>
+            </a:endParaRPr>
+          </a:p>
+          <a:p>
+            <a:endParaRPr lang="es-ES" sz="1400" kern="0" dirty="0">
+              <a:solidFill>
+                <a:sysClr val="windowText" lastClr="000000"/>
+              </a:solidFill>
+            </a:endParaRPr>
+          </a:p>
+        </p:txBody>
+      </p:sp>
+      <p:pic>
+        <p:nvPicPr>
+          <p:cNvPr id="10" name="Imagen 9" descr="Histograma&#10;&#10;El contenido generado por IA puede ser incorrecto.">
+            <a:extLst>
+              <a:ext uri="{FF2B5EF4-FFF2-40B4-BE49-F238E27FC236}">
+                <a16:creationId xmlns:a16="http://schemas.microsoft.com/office/drawing/2014/main" id="{B48F81A6-BE1C-E6C0-6D02-DBCAA7D1FF29}"/>
+              </a:ext>
+            </a:extLst>
+          </p:cNvPr>
+          <p:cNvPicPr>
+            <a:picLocks noChangeAspect="1"/>
+          </p:cNvPicPr>
+          <p:nvPr/>
+        </p:nvPicPr>
+        <p:blipFill>
+          <a:blip r:embed="rId3"/>
+          <a:stretch>
+            <a:fillRect/>
+          </a:stretch>
+        </p:blipFill>
+        <p:spPr>
+          <a:xfrm>
+            <a:off x="5790452" y="1147735"/>
+            <a:ext cx="2210548" cy="1292662"/>
+          </a:xfrm>
+          <a:prstGeom prst="rect">
+            <a:avLst/>
+          </a:prstGeom>
+        </p:spPr>
+      </p:pic>
+      <p:pic>
+        <p:nvPicPr>
+          <p:cNvPr id="12" name="Imagen 11" descr="Gráfico&#10;&#10;El contenido generado por IA puede ser incorrecto.">
+            <a:extLst>
+              <a:ext uri="{FF2B5EF4-FFF2-40B4-BE49-F238E27FC236}">
+                <a16:creationId xmlns:a16="http://schemas.microsoft.com/office/drawing/2014/main" id="{60E818AF-B43A-E6B8-9A93-97D8F70C9F19}"/>
+              </a:ext>
+            </a:extLst>
+          </p:cNvPr>
+          <p:cNvPicPr>
+            <a:picLocks noChangeAspect="1"/>
+          </p:cNvPicPr>
+          <p:nvPr/>
+        </p:nvPicPr>
+        <p:blipFill>
+          <a:blip r:embed="rId4"/>
+          <a:stretch>
+            <a:fillRect/>
+          </a:stretch>
+        </p:blipFill>
+        <p:spPr>
+          <a:xfrm>
+            <a:off x="8001000" y="1043326"/>
+            <a:ext cx="2412289" cy="1292662"/>
+          </a:xfrm>
+          <a:prstGeom prst="rect">
+            <a:avLst/>
+          </a:prstGeom>
+        </p:spPr>
+      </p:pic>
+      <p:pic>
+        <p:nvPicPr>
+          <p:cNvPr id="14" name="Imagen 13" descr="Imagen que contiene Gráfico&#10;&#10;El contenido generado por IA puede ser incorrecto.">
+            <a:extLst>
+              <a:ext uri="{FF2B5EF4-FFF2-40B4-BE49-F238E27FC236}">
+                <a16:creationId xmlns:a16="http://schemas.microsoft.com/office/drawing/2014/main" id="{E9C2C45D-E055-687E-57E6-23AC6E64ADB1}"/>
+              </a:ext>
+            </a:extLst>
+          </p:cNvPr>
+          <p:cNvPicPr>
+            <a:picLocks noChangeAspect="1"/>
+          </p:cNvPicPr>
+          <p:nvPr/>
+        </p:nvPicPr>
+        <p:blipFill>
+          <a:blip r:embed="rId5"/>
+          <a:stretch>
+            <a:fillRect/>
+          </a:stretch>
+        </p:blipFill>
+        <p:spPr>
+          <a:xfrm>
+            <a:off x="5962855" y="2474155"/>
+            <a:ext cx="2073912" cy="1116503"/>
+          </a:xfrm>
+          <a:prstGeom prst="rect">
+            <a:avLst/>
+          </a:prstGeom>
+        </p:spPr>
+      </p:pic>
+      <p:pic>
+        <p:nvPicPr>
+          <p:cNvPr id="16" name="Imagen 15" descr="Imagen que contiene Gráfico&#10;&#10;El contenido generado por IA puede ser incorrecto.">
+            <a:extLst>
+              <a:ext uri="{FF2B5EF4-FFF2-40B4-BE49-F238E27FC236}">
+                <a16:creationId xmlns:a16="http://schemas.microsoft.com/office/drawing/2014/main" id="{7F999343-8AEB-DF27-2556-89F7BEEFAD30}"/>
+              </a:ext>
+            </a:extLst>
+          </p:cNvPr>
+          <p:cNvPicPr>
+            <a:picLocks noChangeAspect="1"/>
+          </p:cNvPicPr>
+          <p:nvPr/>
+        </p:nvPicPr>
+        <p:blipFill>
+          <a:blip r:embed="rId6"/>
+          <a:stretch>
+            <a:fillRect/>
+          </a:stretch>
+        </p:blipFill>
+        <p:spPr>
+          <a:xfrm>
+            <a:off x="8214369" y="2474155"/>
+            <a:ext cx="2234687" cy="1126655"/>
+          </a:xfrm>
+          <a:prstGeom prst="rect">
+            <a:avLst/>
+          </a:prstGeom>
+        </p:spPr>
+      </p:pic>
+    </p:spTree>
+    <p:extLst>
+      <p:ext uri="{BB962C8B-B14F-4D97-AF65-F5344CB8AC3E}">
+        <p14:creationId xmlns:p14="http://schemas.microsoft.com/office/powerpoint/2010/main" val="219364629"/>
+      </p:ext>
+    </p:extLst>
+  </p:cSld>
+  <p:clrMapOvr>
+    <a:masterClrMapping/>
+  </p:clrMapOvr>
+</p:sld>
+</file>
+
+<file path=ppt/slides/slide5.xml><?xml version="1.0" encoding="utf-8"?>
 <p:sld xmlns:a="http://schemas.openxmlformats.org/drawingml/2006/main" xmlns:r="http://schemas.openxmlformats.org/officeDocument/2006/relationships" xmlns:p="http://schemas.openxmlformats.org/presentationml/2006/main">
   <p:cSld>
     <p:spTree>
@@ -6134,7 +7239,7 @@
           <a:p>
             <a:fld id="{B6F15528-21DE-4FAA-801E-634DDDAF4B2B}" type="slidenum">
               <a:rPr lang="es-ES" smtClean="0"/>
-              <a:t>4</a:t>
+              <a:t>5</a:t>
             </a:fld>
             <a:endParaRPr lang="es-ES"/>
           </a:p>
@@ -6188,7 +7293,7 @@
         <p:spPr>
           <a:xfrm>
             <a:off x="609441" y="4860334"/>
-            <a:ext cx="11199971" cy="1384995"/>
+            <a:ext cx="11199971" cy="830997"/>
           </a:xfrm>
           <a:prstGeom prst="rect">
             <a:avLst/>
@@ -6303,13 +7408,111 @@
                 <a:latin typeface="Arial" panose="020B0604020202020204" pitchFamily="34" charset="0"/>
                 <a:cs typeface="Arial" panose="020B0604020202020204" pitchFamily="34" charset="0"/>
               </a:rPr>
-              <a:t>, </a:t>
+              <a:t> </a:t>
             </a:r>
             <a:r>
               <a:rPr lang="en-US" sz="1200" dirty="0" err="1">
                 <a:latin typeface="Arial" panose="020B0604020202020204" pitchFamily="34" charset="0"/>
                 <a:cs typeface="Arial" panose="020B0604020202020204" pitchFamily="34" charset="0"/>
               </a:rPr>
+              <a:t>ya</a:t>
+            </a:r>
+            <a:r>
+              <a:rPr lang="en-US" sz="1200" dirty="0">
+                <a:latin typeface="Arial" panose="020B0604020202020204" pitchFamily="34" charset="0"/>
+                <a:cs typeface="Arial" panose="020B0604020202020204" pitchFamily="34" charset="0"/>
+              </a:rPr>
+              <a:t> </a:t>
+            </a:r>
+            <a:r>
+              <a:rPr lang="en-US" sz="1200" dirty="0" err="1">
+                <a:latin typeface="Arial" panose="020B0604020202020204" pitchFamily="34" charset="0"/>
+                <a:cs typeface="Arial" panose="020B0604020202020204" pitchFamily="34" charset="0"/>
+              </a:rPr>
+              <a:t>que</a:t>
+            </a:r>
+            <a:r>
+              <a:rPr lang="en-US" sz="1200" dirty="0">
+                <a:latin typeface="Arial" panose="020B0604020202020204" pitchFamily="34" charset="0"/>
+                <a:cs typeface="Arial" panose="020B0604020202020204" pitchFamily="34" charset="0"/>
+              </a:rPr>
+              <a:t> </a:t>
+            </a:r>
+            <a:r>
+              <a:rPr lang="en-US" sz="1200" dirty="0" err="1">
+                <a:latin typeface="Arial" panose="020B0604020202020204" pitchFamily="34" charset="0"/>
+                <a:cs typeface="Arial" panose="020B0604020202020204" pitchFamily="34" charset="0"/>
+              </a:rPr>
+              <a:t>su</a:t>
+            </a:r>
+            <a:r>
+              <a:rPr lang="en-US" sz="1200" dirty="0">
+                <a:latin typeface="Arial" panose="020B0604020202020204" pitchFamily="34" charset="0"/>
+                <a:cs typeface="Arial" panose="020B0604020202020204" pitchFamily="34" charset="0"/>
+              </a:rPr>
+              <a:t> </a:t>
+            </a:r>
+            <a:r>
+              <a:rPr lang="en-US" sz="1200" dirty="0" err="1">
+                <a:latin typeface="Arial" panose="020B0604020202020204" pitchFamily="34" charset="0"/>
+                <a:cs typeface="Arial" panose="020B0604020202020204" pitchFamily="34" charset="0"/>
+              </a:rPr>
+              <a:t>indice</a:t>
+            </a:r>
+            <a:r>
+              <a:rPr lang="en-US" sz="1200" dirty="0">
+                <a:latin typeface="Arial" panose="020B0604020202020204" pitchFamily="34" charset="0"/>
+                <a:cs typeface="Arial" panose="020B0604020202020204" pitchFamily="34" charset="0"/>
+              </a:rPr>
+              <a:t> de </a:t>
+            </a:r>
+            <a:r>
+              <a:rPr lang="en-US" sz="1200" dirty="0" err="1">
+                <a:latin typeface="Arial" panose="020B0604020202020204" pitchFamily="34" charset="0"/>
+                <a:cs typeface="Arial" panose="020B0604020202020204" pitchFamily="34" charset="0"/>
+              </a:rPr>
+              <a:t>refracción</a:t>
+            </a:r>
+            <a:r>
+              <a:rPr lang="en-US" sz="1200" dirty="0">
+                <a:latin typeface="Arial" panose="020B0604020202020204" pitchFamily="34" charset="0"/>
+                <a:cs typeface="Arial" panose="020B0604020202020204" pitchFamily="34" charset="0"/>
+              </a:rPr>
+              <a:t> </a:t>
+            </a:r>
+            <a:r>
+              <a:rPr lang="en-US" sz="1200" dirty="0" err="1">
+                <a:latin typeface="Arial" panose="020B0604020202020204" pitchFamily="34" charset="0"/>
+                <a:cs typeface="Arial" panose="020B0604020202020204" pitchFamily="34" charset="0"/>
+              </a:rPr>
+              <a:t>efectivo</a:t>
+            </a:r>
+            <a:r>
+              <a:rPr lang="en-US" sz="1200" dirty="0">
+                <a:latin typeface="Arial" panose="020B0604020202020204" pitchFamily="34" charset="0"/>
+                <a:cs typeface="Arial" panose="020B0604020202020204" pitchFamily="34" charset="0"/>
+              </a:rPr>
+              <a:t> es superior al </a:t>
+            </a:r>
+            <a:r>
+              <a:rPr lang="en-US" sz="1200" dirty="0" err="1">
+                <a:latin typeface="Arial" panose="020B0604020202020204" pitchFamily="34" charset="0"/>
+                <a:cs typeface="Arial" panose="020B0604020202020204" pitchFamily="34" charset="0"/>
+              </a:rPr>
+              <a:t>índice</a:t>
+            </a:r>
+            <a:r>
+              <a:rPr lang="en-US" sz="1200" dirty="0">
+                <a:latin typeface="Arial" panose="020B0604020202020204" pitchFamily="34" charset="0"/>
+                <a:cs typeface="Arial" panose="020B0604020202020204" pitchFamily="34" charset="0"/>
+              </a:rPr>
+              <a:t> del SiO2 , </a:t>
+            </a:r>
+            <a:r>
+              <a:rPr lang="en-US" sz="1200" dirty="0" err="1">
+                <a:latin typeface="Arial" panose="020B0604020202020204" pitchFamily="34" charset="0"/>
+                <a:cs typeface="Arial" panose="020B0604020202020204" pitchFamily="34" charset="0"/>
+              </a:rPr>
               <a:t>en</a:t>
             </a:r>
             <a:r>
@@ -6487,159 +7690,6 @@
               </a:rPr>
               <a:t> del cladding.</a:t>
             </a:r>
-          </a:p>
-          <a:p>
-            <a:pPr algn="just"/>
-            <a:r>
-              <a:rPr lang="en-US" sz="1200" dirty="0">
-                <a:latin typeface="Arial" panose="020B0604020202020204" pitchFamily="34" charset="0"/>
-                <a:cs typeface="Arial" panose="020B0604020202020204" pitchFamily="34" charset="0"/>
-              </a:rPr>
-              <a:t>Con la </a:t>
-            </a:r>
-            <a:r>
-              <a:rPr lang="en-US" sz="1200" dirty="0" err="1">
-                <a:latin typeface="Arial" panose="020B0604020202020204" pitchFamily="34" charset="0"/>
-                <a:cs typeface="Arial" panose="020B0604020202020204" pitchFamily="34" charset="0"/>
-              </a:rPr>
-              <a:t>guia</a:t>
-            </a:r>
-            <a:r>
-              <a:rPr lang="en-US" sz="1200" dirty="0">
-                <a:latin typeface="Arial" panose="020B0604020202020204" pitchFamily="34" charset="0"/>
-                <a:cs typeface="Arial" panose="020B0604020202020204" pitchFamily="34" charset="0"/>
-              </a:rPr>
-              <a:t> shallow </a:t>
-            </a:r>
-            <a:r>
-              <a:rPr lang="en-US" sz="1200" dirty="0" err="1">
-                <a:latin typeface="Arial" panose="020B0604020202020204" pitchFamily="34" charset="0"/>
-                <a:cs typeface="Arial" panose="020B0604020202020204" pitchFamily="34" charset="0"/>
-              </a:rPr>
-              <a:t>los</a:t>
-            </a:r>
-            <a:r>
-              <a:rPr lang="en-US" sz="1200" dirty="0">
-                <a:latin typeface="Arial" panose="020B0604020202020204" pitchFamily="34" charset="0"/>
-                <a:cs typeface="Arial" panose="020B0604020202020204" pitchFamily="34" charset="0"/>
-              </a:rPr>
-              <a:t> </a:t>
-            </a:r>
-            <a:r>
-              <a:rPr lang="en-US" sz="1200" dirty="0" err="1">
-                <a:latin typeface="Arial" panose="020B0604020202020204" pitchFamily="34" charset="0"/>
-                <a:cs typeface="Arial" panose="020B0604020202020204" pitchFamily="34" charset="0"/>
-              </a:rPr>
-              <a:t>modos</a:t>
-            </a:r>
-            <a:r>
-              <a:rPr lang="en-US" sz="1200" dirty="0">
-                <a:latin typeface="Arial" panose="020B0604020202020204" pitchFamily="34" charset="0"/>
-                <a:cs typeface="Arial" panose="020B0604020202020204" pitchFamily="34" charset="0"/>
-              </a:rPr>
-              <a:t> 0,y 3 son TE y </a:t>
-            </a:r>
-            <a:r>
-              <a:rPr lang="en-US" sz="1200" dirty="0" err="1">
-                <a:latin typeface="Arial" panose="020B0604020202020204" pitchFamily="34" charset="0"/>
-                <a:cs typeface="Arial" panose="020B0604020202020204" pitchFamily="34" charset="0"/>
-              </a:rPr>
-              <a:t>el</a:t>
-            </a:r>
-            <a:r>
-              <a:rPr lang="en-US" sz="1200" dirty="0">
-                <a:latin typeface="Arial" panose="020B0604020202020204" pitchFamily="34" charset="0"/>
-                <a:cs typeface="Arial" panose="020B0604020202020204" pitchFamily="34" charset="0"/>
-              </a:rPr>
-              <a:t> modo 2 es TM. El modo 1 es </a:t>
-            </a:r>
-            <a:r>
-              <a:rPr lang="en-US" sz="1200" dirty="0" err="1">
-                <a:latin typeface="Arial" panose="020B0604020202020204" pitchFamily="34" charset="0"/>
-                <a:cs typeface="Arial" panose="020B0604020202020204" pitchFamily="34" charset="0"/>
-              </a:rPr>
-              <a:t>hibrido</a:t>
-            </a:r>
-            <a:r>
-              <a:rPr lang="en-US" sz="1200" dirty="0">
-                <a:latin typeface="Arial" panose="020B0604020202020204" pitchFamily="34" charset="0"/>
-                <a:cs typeface="Arial" panose="020B0604020202020204" pitchFamily="34" charset="0"/>
-              </a:rPr>
-              <a:t>.</a:t>
-            </a:r>
-          </a:p>
-          <a:p>
-            <a:pPr algn="just"/>
-            <a:r>
-              <a:rPr lang="en-US" sz="1200" dirty="0">
-                <a:latin typeface="Arial" panose="020B0604020202020204" pitchFamily="34" charset="0"/>
-                <a:cs typeface="Arial" panose="020B0604020202020204" pitchFamily="34" charset="0"/>
-              </a:rPr>
-              <a:t>Con la </a:t>
-            </a:r>
-            <a:r>
-              <a:rPr lang="en-US" sz="1200" dirty="0" err="1">
-                <a:latin typeface="Arial" panose="020B0604020202020204" pitchFamily="34" charset="0"/>
-                <a:cs typeface="Arial" panose="020B0604020202020204" pitchFamily="34" charset="0"/>
-              </a:rPr>
-              <a:t>guia</a:t>
-            </a:r>
-            <a:r>
-              <a:rPr lang="en-US" sz="1200" dirty="0">
-                <a:latin typeface="Arial" panose="020B0604020202020204" pitchFamily="34" charset="0"/>
-                <a:cs typeface="Arial" panose="020B0604020202020204" pitchFamily="34" charset="0"/>
-              </a:rPr>
-              <a:t> deep </a:t>
-            </a:r>
-            <a:r>
-              <a:rPr lang="en-US" sz="1200" dirty="0" err="1">
-                <a:latin typeface="Arial" panose="020B0604020202020204" pitchFamily="34" charset="0"/>
-                <a:cs typeface="Arial" panose="020B0604020202020204" pitchFamily="34" charset="0"/>
-              </a:rPr>
-              <a:t>los</a:t>
-            </a:r>
-            <a:r>
-              <a:rPr lang="en-US" sz="1200" dirty="0">
-                <a:latin typeface="Arial" panose="020B0604020202020204" pitchFamily="34" charset="0"/>
-                <a:cs typeface="Arial" panose="020B0604020202020204" pitchFamily="34" charset="0"/>
-              </a:rPr>
-              <a:t> </a:t>
-            </a:r>
-            <a:r>
-              <a:rPr lang="en-US" sz="1200" dirty="0" err="1">
-                <a:latin typeface="Arial" panose="020B0604020202020204" pitchFamily="34" charset="0"/>
-                <a:cs typeface="Arial" panose="020B0604020202020204" pitchFamily="34" charset="0"/>
-              </a:rPr>
-              <a:t>modos</a:t>
-            </a:r>
-            <a:r>
-              <a:rPr lang="en-US" sz="1200" dirty="0">
-                <a:latin typeface="Arial" panose="020B0604020202020204" pitchFamily="34" charset="0"/>
-                <a:cs typeface="Arial" panose="020B0604020202020204" pitchFamily="34" charset="0"/>
-              </a:rPr>
-              <a:t> 0 y 2 son TE y </a:t>
-            </a:r>
-            <a:r>
-              <a:rPr lang="en-US" sz="1200" dirty="0" err="1">
-                <a:latin typeface="Arial" panose="020B0604020202020204" pitchFamily="34" charset="0"/>
-                <a:cs typeface="Arial" panose="020B0604020202020204" pitchFamily="34" charset="0"/>
-              </a:rPr>
-              <a:t>el</a:t>
-            </a:r>
-            <a:r>
-              <a:rPr lang="en-US" sz="1200" dirty="0">
-                <a:latin typeface="Arial" panose="020B0604020202020204" pitchFamily="34" charset="0"/>
-                <a:cs typeface="Arial" panose="020B0604020202020204" pitchFamily="34" charset="0"/>
-              </a:rPr>
-              <a:t> 1 y 3 son TM.</a:t>
-            </a:r>
-          </a:p>
-          <a:p>
-            <a:pPr algn="just"/>
-            <a:endParaRPr lang="en-US" sz="1200" dirty="0">
-              <a:latin typeface="Arial" panose="020B0604020202020204" pitchFamily="34" charset="0"/>
-              <a:cs typeface="Arial" panose="020B0604020202020204" pitchFamily="34" charset="0"/>
-            </a:endParaRPr>
           </a:p>
         </p:txBody>
       </p:sp>
@@ -6962,7 +8012,7 @@
 </p:sld>
 </file>
 
-<file path=ppt/slides/slide5.xml><?xml version="1.0" encoding="utf-8"?>
+<file path=ppt/slides/slide6.xml><?xml version="1.0" encoding="utf-8"?>
 <p:sld xmlns:a="http://schemas.openxmlformats.org/drawingml/2006/main" xmlns:r="http://schemas.openxmlformats.org/officeDocument/2006/relationships" xmlns:p="http://schemas.openxmlformats.org/presentationml/2006/main">
   <p:cSld>
     <p:spTree>
@@ -6981,6 +8031,1283 @@
       </p:grpSpPr>
       <p:sp>
         <p:nvSpPr>
+          <p:cNvPr id="2" name="Título 1">
+            <a:extLst>
+              <a:ext uri="{FF2B5EF4-FFF2-40B4-BE49-F238E27FC236}">
+                <a16:creationId xmlns:a16="http://schemas.microsoft.com/office/drawing/2014/main" id="{74E64652-1DB7-E694-D36B-985DB6D75567}"/>
+              </a:ext>
+            </a:extLst>
+          </p:cNvPr>
+          <p:cNvSpPr>
+            <a:spLocks noGrp="1"/>
+          </p:cNvSpPr>
+          <p:nvPr>
+            <p:ph type="title"/>
+          </p:nvPr>
+        </p:nvSpPr>
+        <p:spPr/>
+        <p:txBody>
+          <a:bodyPr/>
+          <a:lstStyle/>
+          <a:p>
+            <a:r>
+              <a:rPr lang="es-ES" dirty="0"/>
+              <a:t>Comentarios</a:t>
+            </a:r>
+          </a:p>
+        </p:txBody>
+      </p:sp>
+      <p:sp>
+        <p:nvSpPr>
+          <p:cNvPr id="3" name="Marcador de texto 2">
+            <a:extLst>
+              <a:ext uri="{FF2B5EF4-FFF2-40B4-BE49-F238E27FC236}">
+                <a16:creationId xmlns:a16="http://schemas.microsoft.com/office/drawing/2014/main" id="{CD70538A-68E4-F5CA-1BBB-7CD552AAD551}"/>
+              </a:ext>
+            </a:extLst>
+          </p:cNvPr>
+          <p:cNvSpPr>
+            <a:spLocks noGrp="1"/>
+          </p:cNvSpPr>
+          <p:nvPr>
+            <p:ph type="body" idx="1"/>
+          </p:nvPr>
+        </p:nvSpPr>
+        <p:spPr>
+          <a:xfrm>
+            <a:off x="590550" y="685800"/>
+            <a:ext cx="5200650" cy="430887"/>
+          </a:xfrm>
+        </p:spPr>
+        <p:txBody>
+          <a:bodyPr/>
+          <a:lstStyle/>
+          <a:p>
+            <a:pPr algn="just"/>
+            <a:r>
+              <a:rPr lang="en-US" sz="1400" dirty="0">
+                <a:latin typeface="Arial" panose="020B0604020202020204" pitchFamily="34" charset="0"/>
+                <a:cs typeface="Arial" panose="020B0604020202020204" pitchFamily="34" charset="0"/>
+              </a:rPr>
+              <a:t>Con la </a:t>
+            </a:r>
+            <a:r>
+              <a:rPr lang="en-US" sz="1400" dirty="0" err="1">
+                <a:latin typeface="Arial" panose="020B0604020202020204" pitchFamily="34" charset="0"/>
+                <a:cs typeface="Arial" panose="020B0604020202020204" pitchFamily="34" charset="0"/>
+              </a:rPr>
+              <a:t>guia</a:t>
+            </a:r>
+            <a:r>
+              <a:rPr lang="en-US" sz="1400" dirty="0">
+                <a:latin typeface="Arial" panose="020B0604020202020204" pitchFamily="34" charset="0"/>
+                <a:cs typeface="Arial" panose="020B0604020202020204" pitchFamily="34" charset="0"/>
+              </a:rPr>
+              <a:t> shallow </a:t>
+            </a:r>
+            <a:r>
+              <a:rPr lang="en-US" sz="1400" dirty="0" err="1">
+                <a:latin typeface="Arial" panose="020B0604020202020204" pitchFamily="34" charset="0"/>
+                <a:cs typeface="Arial" panose="020B0604020202020204" pitchFamily="34" charset="0"/>
+              </a:rPr>
+              <a:t>los</a:t>
+            </a:r>
+            <a:r>
+              <a:rPr lang="en-US" sz="1400" dirty="0">
+                <a:latin typeface="Arial" panose="020B0604020202020204" pitchFamily="34" charset="0"/>
+                <a:cs typeface="Arial" panose="020B0604020202020204" pitchFamily="34" charset="0"/>
+              </a:rPr>
+              <a:t> </a:t>
+            </a:r>
+            <a:r>
+              <a:rPr lang="en-US" sz="1400" dirty="0" err="1">
+                <a:latin typeface="Arial" panose="020B0604020202020204" pitchFamily="34" charset="0"/>
+                <a:cs typeface="Arial" panose="020B0604020202020204" pitchFamily="34" charset="0"/>
+              </a:rPr>
+              <a:t>modos</a:t>
+            </a:r>
+            <a:r>
+              <a:rPr lang="en-US" sz="1400" dirty="0">
+                <a:latin typeface="Arial" panose="020B0604020202020204" pitchFamily="34" charset="0"/>
+                <a:cs typeface="Arial" panose="020B0604020202020204" pitchFamily="34" charset="0"/>
+              </a:rPr>
+              <a:t> 0,y 3 son TE y </a:t>
+            </a:r>
+            <a:r>
+              <a:rPr lang="en-US" sz="1400" dirty="0" err="1">
+                <a:latin typeface="Arial" panose="020B0604020202020204" pitchFamily="34" charset="0"/>
+                <a:cs typeface="Arial" panose="020B0604020202020204" pitchFamily="34" charset="0"/>
+              </a:rPr>
+              <a:t>los</a:t>
+            </a:r>
+            <a:r>
+              <a:rPr lang="en-US" sz="1400" dirty="0">
+                <a:latin typeface="Arial" panose="020B0604020202020204" pitchFamily="34" charset="0"/>
+                <a:cs typeface="Arial" panose="020B0604020202020204" pitchFamily="34" charset="0"/>
+              </a:rPr>
+              <a:t> </a:t>
+            </a:r>
+            <a:r>
+              <a:rPr lang="en-US" sz="1400" dirty="0" err="1">
+                <a:latin typeface="Arial" panose="020B0604020202020204" pitchFamily="34" charset="0"/>
+                <a:cs typeface="Arial" panose="020B0604020202020204" pitchFamily="34" charset="0"/>
+              </a:rPr>
+              <a:t>modos</a:t>
+            </a:r>
+            <a:r>
+              <a:rPr lang="en-US" sz="1400" dirty="0">
+                <a:latin typeface="Arial" panose="020B0604020202020204" pitchFamily="34" charset="0"/>
+                <a:cs typeface="Arial" panose="020B0604020202020204" pitchFamily="34" charset="0"/>
+              </a:rPr>
+              <a:t> 1 y 2 son </a:t>
+            </a:r>
+            <a:r>
+              <a:rPr lang="en-US" sz="1400" dirty="0" err="1">
+                <a:latin typeface="Arial" panose="020B0604020202020204" pitchFamily="34" charset="0"/>
+                <a:cs typeface="Arial" panose="020B0604020202020204" pitchFamily="34" charset="0"/>
+              </a:rPr>
+              <a:t>hibridos</a:t>
+            </a:r>
+            <a:r>
+              <a:rPr lang="en-US" sz="1400" dirty="0">
+                <a:latin typeface="Arial" panose="020B0604020202020204" pitchFamily="34" charset="0"/>
+                <a:cs typeface="Arial" panose="020B0604020202020204" pitchFamily="34" charset="0"/>
+              </a:rPr>
+              <a:t>, </a:t>
+            </a:r>
+            <a:r>
+              <a:rPr lang="en-US" sz="1400" dirty="0" err="1">
+                <a:latin typeface="Arial" panose="020B0604020202020204" pitchFamily="34" charset="0"/>
+                <a:cs typeface="Arial" panose="020B0604020202020204" pitchFamily="34" charset="0"/>
+              </a:rPr>
+              <a:t>mayoritariamente</a:t>
+            </a:r>
+            <a:r>
+              <a:rPr lang="en-US" sz="1400" dirty="0">
+                <a:latin typeface="Arial" panose="020B0604020202020204" pitchFamily="34" charset="0"/>
+                <a:cs typeface="Arial" panose="020B0604020202020204" pitchFamily="34" charset="0"/>
+              </a:rPr>
+              <a:t> TE.</a:t>
+            </a:r>
+          </a:p>
+          <a:p>
+            <a:endParaRPr lang="es-ES" sz="1400" dirty="0"/>
+          </a:p>
+        </p:txBody>
+      </p:sp>
+      <p:sp>
+        <p:nvSpPr>
+          <p:cNvPr id="4" name="Marcador de pie de página 3">
+            <a:extLst>
+              <a:ext uri="{FF2B5EF4-FFF2-40B4-BE49-F238E27FC236}">
+                <a16:creationId xmlns:a16="http://schemas.microsoft.com/office/drawing/2014/main" id="{69A70AEF-A0E3-E117-BB88-746F97AD7C23}"/>
+              </a:ext>
+            </a:extLst>
+          </p:cNvPr>
+          <p:cNvSpPr>
+            <a:spLocks noGrp="1"/>
+          </p:cNvSpPr>
+          <p:nvPr>
+            <p:ph type="ftr" sz="quarter" idx="5"/>
+          </p:nvPr>
+        </p:nvSpPr>
+        <p:spPr/>
+        <p:txBody>
+          <a:bodyPr/>
+          <a:lstStyle/>
+          <a:p>
+            <a:pPr marL="12700">
+              <a:spcBef>
+                <a:spcPts val="15"/>
+              </a:spcBef>
+            </a:pPr>
+            <a:r>
+              <a:rPr lang="es-ES" spc="-5"/>
+              <a:t>LAB 0.1. MODESOLVER</a:t>
+            </a:r>
+            <a:endParaRPr lang="es-ES" spc="-5" dirty="0"/>
+          </a:p>
+        </p:txBody>
+      </p:sp>
+      <p:sp>
+        <p:nvSpPr>
+          <p:cNvPr id="5" name="Marcador de número de diapositiva 4">
+            <a:extLst>
+              <a:ext uri="{FF2B5EF4-FFF2-40B4-BE49-F238E27FC236}">
+                <a16:creationId xmlns:a16="http://schemas.microsoft.com/office/drawing/2014/main" id="{B196C78E-166D-AE50-D427-CD26140F5941}"/>
+              </a:ext>
+            </a:extLst>
+          </p:cNvPr>
+          <p:cNvSpPr>
+            <a:spLocks noGrp="1"/>
+          </p:cNvSpPr>
+          <p:nvPr>
+            <p:ph type="sldNum" sz="quarter" idx="7"/>
+          </p:nvPr>
+        </p:nvSpPr>
+        <p:spPr/>
+        <p:txBody>
+          <a:bodyPr/>
+          <a:lstStyle/>
+          <a:p>
+            <a:fld id="{B6F15528-21DE-4FAA-801E-634DDDAF4B2B}" type="slidenum">
+              <a:rPr lang="es-ES" smtClean="0"/>
+              <a:t>6</a:t>
+            </a:fld>
+            <a:endParaRPr lang="es-ES"/>
+          </a:p>
+        </p:txBody>
+      </p:sp>
+      <p:pic>
+        <p:nvPicPr>
+          <p:cNvPr id="7" name="Imagen 6" descr="Texto&#10;&#10;El contenido generado por IA puede ser incorrecto.">
+            <a:extLst>
+              <a:ext uri="{FF2B5EF4-FFF2-40B4-BE49-F238E27FC236}">
+                <a16:creationId xmlns:a16="http://schemas.microsoft.com/office/drawing/2014/main" id="{D5E8ED96-2A1A-07AC-B725-88D2612B8CB6}"/>
+              </a:ext>
+            </a:extLst>
+          </p:cNvPr>
+          <p:cNvPicPr>
+            <a:picLocks noChangeAspect="1"/>
+          </p:cNvPicPr>
+          <p:nvPr/>
+        </p:nvPicPr>
+        <p:blipFill>
+          <a:blip r:embed="rId2"/>
+          <a:stretch>
+            <a:fillRect/>
+          </a:stretch>
+        </p:blipFill>
+        <p:spPr>
+          <a:xfrm>
+            <a:off x="590550" y="1224396"/>
+            <a:ext cx="5104614" cy="2562476"/>
+          </a:xfrm>
+          <a:prstGeom prst="rect">
+            <a:avLst/>
+          </a:prstGeom>
+        </p:spPr>
+      </p:pic>
+      <p:sp>
+        <p:nvSpPr>
+          <p:cNvPr id="8" name="Marcador de texto 2">
+            <a:extLst>
+              <a:ext uri="{FF2B5EF4-FFF2-40B4-BE49-F238E27FC236}">
+                <a16:creationId xmlns:a16="http://schemas.microsoft.com/office/drawing/2014/main" id="{15A913E1-D1BA-3C75-C94A-64EE39100AAA}"/>
+              </a:ext>
+            </a:extLst>
+          </p:cNvPr>
+          <p:cNvSpPr txBox="1">
+            <a:spLocks/>
+          </p:cNvSpPr>
+          <p:nvPr/>
+        </p:nvSpPr>
+        <p:spPr>
+          <a:xfrm>
+            <a:off x="6096000" y="685800"/>
+            <a:ext cx="5200650" cy="215444"/>
+          </a:xfrm>
+          <a:prstGeom prst="rect">
+            <a:avLst/>
+          </a:prstGeom>
+        </p:spPr>
+        <p:txBody>
+          <a:bodyPr wrap="square" lIns="0" tIns="0" rIns="0" bIns="0">
+            <a:spAutoFit/>
+          </a:bodyPr>
+          <a:lstStyle>
+            <a:lvl1pPr marL="0">
+              <a:defRPr>
+                <a:latin typeface="+mn-lt"/>
+                <a:ea typeface="+mn-ea"/>
+                <a:cs typeface="+mn-cs"/>
+              </a:defRPr>
+            </a:lvl1pPr>
+            <a:lvl2pPr marL="457200">
+              <a:defRPr>
+                <a:latin typeface="+mn-lt"/>
+                <a:ea typeface="+mn-ea"/>
+                <a:cs typeface="+mn-cs"/>
+              </a:defRPr>
+            </a:lvl2pPr>
+            <a:lvl3pPr marL="914400">
+              <a:defRPr>
+                <a:latin typeface="+mn-lt"/>
+                <a:ea typeface="+mn-ea"/>
+                <a:cs typeface="+mn-cs"/>
+              </a:defRPr>
+            </a:lvl3pPr>
+            <a:lvl4pPr marL="1371600">
+              <a:defRPr>
+                <a:latin typeface="+mn-lt"/>
+                <a:ea typeface="+mn-ea"/>
+                <a:cs typeface="+mn-cs"/>
+              </a:defRPr>
+            </a:lvl4pPr>
+            <a:lvl5pPr marL="1828800">
+              <a:defRPr>
+                <a:latin typeface="+mn-lt"/>
+                <a:ea typeface="+mn-ea"/>
+                <a:cs typeface="+mn-cs"/>
+              </a:defRPr>
+            </a:lvl5pPr>
+            <a:lvl6pPr marL="2286000">
+              <a:defRPr>
+                <a:latin typeface="+mn-lt"/>
+                <a:ea typeface="+mn-ea"/>
+                <a:cs typeface="+mn-cs"/>
+              </a:defRPr>
+            </a:lvl6pPr>
+            <a:lvl7pPr marL="2743200">
+              <a:defRPr>
+                <a:latin typeface="+mn-lt"/>
+                <a:ea typeface="+mn-ea"/>
+                <a:cs typeface="+mn-cs"/>
+              </a:defRPr>
+            </a:lvl7pPr>
+            <a:lvl8pPr marL="3200400">
+              <a:defRPr>
+                <a:latin typeface="+mn-lt"/>
+                <a:ea typeface="+mn-ea"/>
+                <a:cs typeface="+mn-cs"/>
+              </a:defRPr>
+            </a:lvl8pPr>
+            <a:lvl9pPr marL="3657600">
+              <a:defRPr>
+                <a:latin typeface="+mn-lt"/>
+                <a:ea typeface="+mn-ea"/>
+                <a:cs typeface="+mn-cs"/>
+              </a:defRPr>
+            </a:lvl9pPr>
+          </a:lstStyle>
+          <a:p>
+            <a:pPr algn="just"/>
+            <a:r>
+              <a:rPr lang="en-US" sz="1400" dirty="0">
+                <a:latin typeface="Arial" panose="020B0604020202020204" pitchFamily="34" charset="0"/>
+                <a:cs typeface="Arial" panose="020B0604020202020204" pitchFamily="34" charset="0"/>
+              </a:rPr>
+              <a:t>Con la </a:t>
+            </a:r>
+            <a:r>
+              <a:rPr lang="en-US" sz="1400" dirty="0" err="1">
+                <a:latin typeface="Arial" panose="020B0604020202020204" pitchFamily="34" charset="0"/>
+                <a:cs typeface="Arial" panose="020B0604020202020204" pitchFamily="34" charset="0"/>
+              </a:rPr>
+              <a:t>guia</a:t>
+            </a:r>
+            <a:r>
+              <a:rPr lang="en-US" sz="1400" dirty="0">
+                <a:latin typeface="Arial" panose="020B0604020202020204" pitchFamily="34" charset="0"/>
+                <a:cs typeface="Arial" panose="020B0604020202020204" pitchFamily="34" charset="0"/>
+              </a:rPr>
+              <a:t> deep </a:t>
+            </a:r>
+            <a:r>
+              <a:rPr lang="en-US" sz="1400" dirty="0" err="1">
+                <a:latin typeface="Arial" panose="020B0604020202020204" pitchFamily="34" charset="0"/>
+                <a:cs typeface="Arial" panose="020B0604020202020204" pitchFamily="34" charset="0"/>
+              </a:rPr>
+              <a:t>los</a:t>
+            </a:r>
+            <a:r>
+              <a:rPr lang="en-US" sz="1400" dirty="0">
+                <a:latin typeface="Arial" panose="020B0604020202020204" pitchFamily="34" charset="0"/>
+                <a:cs typeface="Arial" panose="020B0604020202020204" pitchFamily="34" charset="0"/>
+              </a:rPr>
+              <a:t> </a:t>
+            </a:r>
+            <a:r>
+              <a:rPr lang="en-US" sz="1400" dirty="0" err="1">
+                <a:latin typeface="Arial" panose="020B0604020202020204" pitchFamily="34" charset="0"/>
+                <a:cs typeface="Arial" panose="020B0604020202020204" pitchFamily="34" charset="0"/>
+              </a:rPr>
+              <a:t>modos</a:t>
+            </a:r>
+            <a:r>
+              <a:rPr lang="en-US" sz="1400" dirty="0">
+                <a:latin typeface="Arial" panose="020B0604020202020204" pitchFamily="34" charset="0"/>
+                <a:cs typeface="Arial" panose="020B0604020202020204" pitchFamily="34" charset="0"/>
+              </a:rPr>
+              <a:t> 0 y 2 son TE y </a:t>
+            </a:r>
+            <a:r>
+              <a:rPr lang="en-US" sz="1400" dirty="0" err="1">
+                <a:latin typeface="Arial" panose="020B0604020202020204" pitchFamily="34" charset="0"/>
+                <a:cs typeface="Arial" panose="020B0604020202020204" pitchFamily="34" charset="0"/>
+              </a:rPr>
+              <a:t>el</a:t>
+            </a:r>
+            <a:r>
+              <a:rPr lang="en-US" sz="1400" dirty="0">
+                <a:latin typeface="Arial" panose="020B0604020202020204" pitchFamily="34" charset="0"/>
+                <a:cs typeface="Arial" panose="020B0604020202020204" pitchFamily="34" charset="0"/>
+              </a:rPr>
+              <a:t> 1 y 3 son TM.</a:t>
+            </a:r>
+            <a:endParaRPr lang="es-ES" sz="1400" kern="0" dirty="0">
+              <a:solidFill>
+                <a:sysClr val="windowText" lastClr="000000"/>
+              </a:solidFill>
+            </a:endParaRPr>
+          </a:p>
+        </p:txBody>
+      </p:sp>
+      <p:pic>
+        <p:nvPicPr>
+          <p:cNvPr id="10" name="Imagen 9" descr="Texto&#10;&#10;El contenido generado por IA puede ser incorrecto.">
+            <a:extLst>
+              <a:ext uri="{FF2B5EF4-FFF2-40B4-BE49-F238E27FC236}">
+                <a16:creationId xmlns:a16="http://schemas.microsoft.com/office/drawing/2014/main" id="{073763D2-9E89-0921-5D36-E754F3F4B585}"/>
+              </a:ext>
+            </a:extLst>
+          </p:cNvPr>
+          <p:cNvPicPr>
+            <a:picLocks noChangeAspect="1"/>
+          </p:cNvPicPr>
+          <p:nvPr/>
+        </p:nvPicPr>
+        <p:blipFill>
+          <a:blip r:embed="rId3"/>
+          <a:stretch>
+            <a:fillRect/>
+          </a:stretch>
+        </p:blipFill>
+        <p:spPr>
+          <a:xfrm>
+            <a:off x="6096000" y="1199514"/>
+            <a:ext cx="4110409" cy="2573601"/>
+          </a:xfrm>
+          <a:prstGeom prst="rect">
+            <a:avLst/>
+          </a:prstGeom>
+        </p:spPr>
+      </p:pic>
+      <p:sp>
+        <p:nvSpPr>
+          <p:cNvPr id="13" name="Marcador de texto 2">
+            <a:extLst>
+              <a:ext uri="{FF2B5EF4-FFF2-40B4-BE49-F238E27FC236}">
+                <a16:creationId xmlns:a16="http://schemas.microsoft.com/office/drawing/2014/main" id="{067A748D-6BA9-60B0-DFF2-EC88EBA606B0}"/>
+              </a:ext>
+            </a:extLst>
+          </p:cNvPr>
+          <p:cNvSpPr txBox="1">
+            <a:spLocks/>
+          </p:cNvSpPr>
+          <p:nvPr/>
+        </p:nvSpPr>
+        <p:spPr>
+          <a:xfrm>
+            <a:off x="609600" y="4114800"/>
+            <a:ext cx="9982200" cy="1508105"/>
+          </a:xfrm>
+          <a:prstGeom prst="rect">
+            <a:avLst/>
+          </a:prstGeom>
+        </p:spPr>
+        <p:txBody>
+          <a:bodyPr wrap="square" lIns="0" tIns="0" rIns="0" bIns="0">
+            <a:spAutoFit/>
+          </a:bodyPr>
+          <a:lstStyle>
+            <a:lvl1pPr marL="0">
+              <a:defRPr>
+                <a:latin typeface="+mn-lt"/>
+                <a:ea typeface="+mn-ea"/>
+                <a:cs typeface="+mn-cs"/>
+              </a:defRPr>
+            </a:lvl1pPr>
+            <a:lvl2pPr marL="457200">
+              <a:defRPr>
+                <a:latin typeface="+mn-lt"/>
+                <a:ea typeface="+mn-ea"/>
+                <a:cs typeface="+mn-cs"/>
+              </a:defRPr>
+            </a:lvl2pPr>
+            <a:lvl3pPr marL="914400">
+              <a:defRPr>
+                <a:latin typeface="+mn-lt"/>
+                <a:ea typeface="+mn-ea"/>
+                <a:cs typeface="+mn-cs"/>
+              </a:defRPr>
+            </a:lvl3pPr>
+            <a:lvl4pPr marL="1371600">
+              <a:defRPr>
+                <a:latin typeface="+mn-lt"/>
+                <a:ea typeface="+mn-ea"/>
+                <a:cs typeface="+mn-cs"/>
+              </a:defRPr>
+            </a:lvl4pPr>
+            <a:lvl5pPr marL="1828800">
+              <a:defRPr>
+                <a:latin typeface="+mn-lt"/>
+                <a:ea typeface="+mn-ea"/>
+                <a:cs typeface="+mn-cs"/>
+              </a:defRPr>
+            </a:lvl5pPr>
+            <a:lvl6pPr marL="2286000">
+              <a:defRPr>
+                <a:latin typeface="+mn-lt"/>
+                <a:ea typeface="+mn-ea"/>
+                <a:cs typeface="+mn-cs"/>
+              </a:defRPr>
+            </a:lvl6pPr>
+            <a:lvl7pPr marL="2743200">
+              <a:defRPr>
+                <a:latin typeface="+mn-lt"/>
+                <a:ea typeface="+mn-ea"/>
+                <a:cs typeface="+mn-cs"/>
+              </a:defRPr>
+            </a:lvl7pPr>
+            <a:lvl8pPr marL="3200400">
+              <a:defRPr>
+                <a:latin typeface="+mn-lt"/>
+                <a:ea typeface="+mn-ea"/>
+                <a:cs typeface="+mn-cs"/>
+              </a:defRPr>
+            </a:lvl8pPr>
+            <a:lvl9pPr marL="3657600">
+              <a:defRPr>
+                <a:latin typeface="+mn-lt"/>
+                <a:ea typeface="+mn-ea"/>
+                <a:cs typeface="+mn-cs"/>
+              </a:defRPr>
+            </a:lvl9pPr>
+          </a:lstStyle>
+          <a:p>
+            <a:pPr algn="just"/>
+            <a:r>
+              <a:rPr lang="en-US" sz="1400" dirty="0">
+                <a:latin typeface="Arial" panose="020B0604020202020204" pitchFamily="34" charset="0"/>
+                <a:cs typeface="Arial" panose="020B0604020202020204" pitchFamily="34" charset="0"/>
+              </a:rPr>
+              <a:t>El </a:t>
+            </a:r>
+            <a:r>
+              <a:rPr lang="en-US" sz="1400" dirty="0" err="1">
+                <a:latin typeface="Arial" panose="020B0604020202020204" pitchFamily="34" charset="0"/>
+                <a:cs typeface="Arial" panose="020B0604020202020204" pitchFamily="34" charset="0"/>
+              </a:rPr>
+              <a:t>indice</a:t>
+            </a:r>
+            <a:r>
+              <a:rPr lang="en-US" sz="1400" dirty="0">
+                <a:latin typeface="Arial" panose="020B0604020202020204" pitchFamily="34" charset="0"/>
+                <a:cs typeface="Arial" panose="020B0604020202020204" pitchFamily="34" charset="0"/>
+              </a:rPr>
+              <a:t> </a:t>
+            </a:r>
+            <a:r>
+              <a:rPr lang="en-US" sz="1400" dirty="0" err="1">
+                <a:latin typeface="Arial" panose="020B0604020202020204" pitchFamily="34" charset="0"/>
+                <a:cs typeface="Arial" panose="020B0604020202020204" pitchFamily="34" charset="0"/>
+              </a:rPr>
+              <a:t>efectivo</a:t>
+            </a:r>
+            <a:r>
+              <a:rPr lang="en-US" sz="1400" dirty="0">
+                <a:latin typeface="Arial" panose="020B0604020202020204" pitchFamily="34" charset="0"/>
+                <a:cs typeface="Arial" panose="020B0604020202020204" pitchFamily="34" charset="0"/>
+              </a:rPr>
+              <a:t> no es </a:t>
+            </a:r>
+            <a:r>
+              <a:rPr lang="en-US" sz="1400" dirty="0" err="1">
+                <a:latin typeface="Arial" panose="020B0604020202020204" pitchFamily="34" charset="0"/>
+                <a:cs typeface="Arial" panose="020B0604020202020204" pitchFamily="34" charset="0"/>
+              </a:rPr>
+              <a:t>constante</a:t>
+            </a:r>
+            <a:r>
+              <a:rPr lang="en-US" sz="1400" dirty="0">
+                <a:latin typeface="Arial" panose="020B0604020202020204" pitchFamily="34" charset="0"/>
+                <a:cs typeface="Arial" panose="020B0604020202020204" pitchFamily="34" charset="0"/>
+              </a:rPr>
+              <a:t> y </a:t>
+            </a:r>
+            <a:r>
+              <a:rPr lang="en-US" sz="1400" dirty="0" err="1">
+                <a:latin typeface="Arial" panose="020B0604020202020204" pitchFamily="34" charset="0"/>
+                <a:cs typeface="Arial" panose="020B0604020202020204" pitchFamily="34" charset="0"/>
+              </a:rPr>
+              <a:t>vamos</a:t>
+            </a:r>
+            <a:r>
+              <a:rPr lang="en-US" sz="1400" dirty="0">
+                <a:latin typeface="Arial" panose="020B0604020202020204" pitchFamily="34" charset="0"/>
+                <a:cs typeface="Arial" panose="020B0604020202020204" pitchFamily="34" charset="0"/>
+              </a:rPr>
+              <a:t> a </a:t>
+            </a:r>
+            <a:r>
+              <a:rPr lang="en-US" sz="1400" dirty="0" err="1">
+                <a:latin typeface="Arial" panose="020B0604020202020204" pitchFamily="34" charset="0"/>
+                <a:cs typeface="Arial" panose="020B0604020202020204" pitchFamily="34" charset="0"/>
+              </a:rPr>
+              <a:t>tener</a:t>
+            </a:r>
+            <a:r>
+              <a:rPr lang="en-US" sz="1400" dirty="0">
+                <a:latin typeface="Arial" panose="020B0604020202020204" pitchFamily="34" charset="0"/>
+                <a:cs typeface="Arial" panose="020B0604020202020204" pitchFamily="34" charset="0"/>
+              </a:rPr>
+              <a:t> </a:t>
+            </a:r>
+            <a:r>
+              <a:rPr lang="en-US" sz="1400" dirty="0" err="1">
+                <a:latin typeface="Arial" panose="020B0604020202020204" pitchFamily="34" charset="0"/>
+                <a:cs typeface="Arial" panose="020B0604020202020204" pitchFamily="34" charset="0"/>
+              </a:rPr>
+              <a:t>dependencia</a:t>
+            </a:r>
+            <a:r>
+              <a:rPr lang="en-US" sz="1400" dirty="0">
+                <a:latin typeface="Arial" panose="020B0604020202020204" pitchFamily="34" charset="0"/>
+                <a:cs typeface="Arial" panose="020B0604020202020204" pitchFamily="34" charset="0"/>
+              </a:rPr>
+              <a:t> con la </a:t>
+            </a:r>
+            <a:r>
+              <a:rPr lang="en-US" sz="1400" dirty="0" err="1">
+                <a:latin typeface="Arial" panose="020B0604020202020204" pitchFamily="34" charset="0"/>
+                <a:cs typeface="Arial" panose="020B0604020202020204" pitchFamily="34" charset="0"/>
+              </a:rPr>
+              <a:t>longitud</a:t>
+            </a:r>
+            <a:r>
+              <a:rPr lang="en-US" sz="1400" dirty="0">
+                <a:latin typeface="Arial" panose="020B0604020202020204" pitchFamily="34" charset="0"/>
+                <a:cs typeface="Arial" panose="020B0604020202020204" pitchFamily="34" charset="0"/>
+              </a:rPr>
+              <a:t> de </a:t>
+            </a:r>
+            <a:r>
+              <a:rPr lang="en-US" sz="1400" dirty="0" err="1">
+                <a:latin typeface="Arial" panose="020B0604020202020204" pitchFamily="34" charset="0"/>
+                <a:cs typeface="Arial" panose="020B0604020202020204" pitchFamily="34" charset="0"/>
+              </a:rPr>
+              <a:t>onda</a:t>
+            </a:r>
+            <a:r>
+              <a:rPr lang="en-US" sz="1400" dirty="0">
+                <a:latin typeface="Arial" panose="020B0604020202020204" pitchFamily="34" charset="0"/>
+                <a:cs typeface="Arial" panose="020B0604020202020204" pitchFamily="34" charset="0"/>
+              </a:rPr>
+              <a:t> del </a:t>
+            </a:r>
+            <a:r>
+              <a:rPr lang="en-US" sz="1400" dirty="0" err="1">
+                <a:latin typeface="Arial" panose="020B0604020202020204" pitchFamily="34" charset="0"/>
+                <a:cs typeface="Arial" panose="020B0604020202020204" pitchFamily="34" charset="0"/>
+              </a:rPr>
+              <a:t>dispositivo</a:t>
+            </a:r>
+            <a:r>
+              <a:rPr lang="en-US" sz="1400" dirty="0">
+                <a:latin typeface="Arial" panose="020B0604020202020204" pitchFamily="34" charset="0"/>
+                <a:cs typeface="Arial" panose="020B0604020202020204" pitchFamily="34" charset="0"/>
+              </a:rPr>
+              <a:t>. </a:t>
+            </a:r>
+          </a:p>
+          <a:p>
+            <a:pPr algn="just"/>
+            <a:endParaRPr lang="en-US" sz="1400" dirty="0">
+              <a:latin typeface="Arial" panose="020B0604020202020204" pitchFamily="34" charset="0"/>
+              <a:cs typeface="Arial" panose="020B0604020202020204" pitchFamily="34" charset="0"/>
+            </a:endParaRPr>
+          </a:p>
+          <a:p>
+            <a:pPr algn="just"/>
+            <a:r>
+              <a:rPr lang="en-US" sz="1400" dirty="0" err="1">
+                <a:latin typeface="Arial" panose="020B0604020202020204" pitchFamily="34" charset="0"/>
+                <a:cs typeface="Arial" panose="020B0604020202020204" pitchFamily="34" charset="0"/>
+              </a:rPr>
+              <a:t>Respecto</a:t>
+            </a:r>
+            <a:r>
+              <a:rPr lang="en-US" sz="1400" dirty="0">
+                <a:latin typeface="Arial" panose="020B0604020202020204" pitchFamily="34" charset="0"/>
+                <a:cs typeface="Arial" panose="020B0604020202020204" pitchFamily="34" charset="0"/>
+              </a:rPr>
+              <a:t> al </a:t>
+            </a:r>
+            <a:r>
+              <a:rPr lang="en-US" sz="1400" dirty="0" err="1">
+                <a:latin typeface="Arial" panose="020B0604020202020204" pitchFamily="34" charset="0"/>
+                <a:cs typeface="Arial" panose="020B0604020202020204" pitchFamily="34" charset="0"/>
+              </a:rPr>
+              <a:t>confinamiento</a:t>
+            </a:r>
+            <a:r>
+              <a:rPr lang="en-US" sz="1400" dirty="0">
+                <a:latin typeface="Arial" panose="020B0604020202020204" pitchFamily="34" charset="0"/>
+                <a:cs typeface="Arial" panose="020B0604020202020204" pitchFamily="34" charset="0"/>
+              </a:rPr>
+              <a:t> de </a:t>
+            </a:r>
+            <a:r>
+              <a:rPr lang="en-US" sz="1400" dirty="0" err="1">
+                <a:latin typeface="Arial" panose="020B0604020202020204" pitchFamily="34" charset="0"/>
+                <a:cs typeface="Arial" panose="020B0604020202020204" pitchFamily="34" charset="0"/>
+              </a:rPr>
+              <a:t>esta</a:t>
+            </a:r>
+            <a:r>
+              <a:rPr lang="en-US" sz="1400" dirty="0">
+                <a:latin typeface="Arial" panose="020B0604020202020204" pitchFamily="34" charset="0"/>
+                <a:cs typeface="Arial" panose="020B0604020202020204" pitchFamily="34" charset="0"/>
+              </a:rPr>
+              <a:t> </a:t>
+            </a:r>
+            <a:r>
+              <a:rPr lang="en-US" sz="1400" dirty="0" err="1">
+                <a:latin typeface="Arial" panose="020B0604020202020204" pitchFamily="34" charset="0"/>
+                <a:cs typeface="Arial" panose="020B0604020202020204" pitchFamily="34" charset="0"/>
+              </a:rPr>
+              <a:t>guía</a:t>
+            </a:r>
+            <a:r>
+              <a:rPr lang="en-US" sz="1400" dirty="0">
+                <a:latin typeface="Arial" panose="020B0604020202020204" pitchFamily="34" charset="0"/>
+                <a:cs typeface="Arial" panose="020B0604020202020204" pitchFamily="34" charset="0"/>
+              </a:rPr>
+              <a:t>, </a:t>
+            </a:r>
+            <a:r>
+              <a:rPr lang="en-US" sz="1400" dirty="0" err="1">
+                <a:latin typeface="Arial" panose="020B0604020202020204" pitchFamily="34" charset="0"/>
+                <a:cs typeface="Arial" panose="020B0604020202020204" pitchFamily="34" charset="0"/>
+              </a:rPr>
+              <a:t>los</a:t>
+            </a:r>
+            <a:r>
+              <a:rPr lang="en-US" sz="1400" dirty="0">
+                <a:latin typeface="Arial" panose="020B0604020202020204" pitchFamily="34" charset="0"/>
+                <a:cs typeface="Arial" panose="020B0604020202020204" pitchFamily="34" charset="0"/>
+              </a:rPr>
+              <a:t> </a:t>
+            </a:r>
+            <a:r>
+              <a:rPr lang="en-US" sz="1400" dirty="0" err="1">
+                <a:latin typeface="Arial" panose="020B0604020202020204" pitchFamily="34" charset="0"/>
+                <a:cs typeface="Arial" panose="020B0604020202020204" pitchFamily="34" charset="0"/>
+              </a:rPr>
+              <a:t>modos</a:t>
+            </a:r>
+            <a:r>
+              <a:rPr lang="en-US" sz="1400" dirty="0">
+                <a:latin typeface="Arial" panose="020B0604020202020204" pitchFamily="34" charset="0"/>
+                <a:cs typeface="Arial" panose="020B0604020202020204" pitchFamily="34" charset="0"/>
+              </a:rPr>
+              <a:t> no </a:t>
+            </a:r>
+            <a:r>
+              <a:rPr lang="en-US" sz="1400" dirty="0" err="1">
+                <a:latin typeface="Arial" panose="020B0604020202020204" pitchFamily="34" charset="0"/>
+                <a:cs typeface="Arial" panose="020B0604020202020204" pitchFamily="34" charset="0"/>
+              </a:rPr>
+              <a:t>estan</a:t>
+            </a:r>
+            <a:r>
+              <a:rPr lang="en-US" sz="1400" dirty="0">
+                <a:latin typeface="Arial" panose="020B0604020202020204" pitchFamily="34" charset="0"/>
+                <a:cs typeface="Arial" panose="020B0604020202020204" pitchFamily="34" charset="0"/>
+              </a:rPr>
+              <a:t> </a:t>
+            </a:r>
+            <a:r>
+              <a:rPr lang="en-US" sz="1400" dirty="0" err="1">
+                <a:latin typeface="Arial" panose="020B0604020202020204" pitchFamily="34" charset="0"/>
+                <a:cs typeface="Arial" panose="020B0604020202020204" pitchFamily="34" charset="0"/>
+              </a:rPr>
+              <a:t>muy</a:t>
+            </a:r>
+            <a:r>
+              <a:rPr lang="en-US" sz="1400" dirty="0">
+                <a:latin typeface="Arial" panose="020B0604020202020204" pitchFamily="34" charset="0"/>
+                <a:cs typeface="Arial" panose="020B0604020202020204" pitchFamily="34" charset="0"/>
+              </a:rPr>
+              <a:t> bien </a:t>
+            </a:r>
+            <a:r>
+              <a:rPr lang="en-US" sz="1400" dirty="0" err="1">
+                <a:latin typeface="Arial" panose="020B0604020202020204" pitchFamily="34" charset="0"/>
+                <a:cs typeface="Arial" panose="020B0604020202020204" pitchFamily="34" charset="0"/>
+              </a:rPr>
+              <a:t>confinados</a:t>
+            </a:r>
+            <a:r>
+              <a:rPr lang="en-US" sz="1400" dirty="0">
+                <a:latin typeface="Arial" panose="020B0604020202020204" pitchFamily="34" charset="0"/>
+                <a:cs typeface="Arial" panose="020B0604020202020204" pitchFamily="34" charset="0"/>
+              </a:rPr>
+              <a:t> </a:t>
+            </a:r>
+            <a:r>
+              <a:rPr lang="en-US" sz="1400" dirty="0" err="1">
+                <a:latin typeface="Arial" panose="020B0604020202020204" pitchFamily="34" charset="0"/>
+                <a:cs typeface="Arial" panose="020B0604020202020204" pitchFamily="34" charset="0"/>
+              </a:rPr>
+              <a:t>porque</a:t>
+            </a:r>
+            <a:r>
+              <a:rPr lang="en-US" sz="1400" dirty="0">
+                <a:latin typeface="Arial" panose="020B0604020202020204" pitchFamily="34" charset="0"/>
+                <a:cs typeface="Arial" panose="020B0604020202020204" pitchFamily="34" charset="0"/>
+              </a:rPr>
+              <a:t> temenos un bajo </a:t>
+            </a:r>
+            <a:r>
+              <a:rPr lang="en-US" sz="1400" dirty="0" err="1">
+                <a:latin typeface="Arial" panose="020B0604020202020204" pitchFamily="34" charset="0"/>
+                <a:cs typeface="Arial" panose="020B0604020202020204" pitchFamily="34" charset="0"/>
+              </a:rPr>
+              <a:t>contraste</a:t>
+            </a:r>
+            <a:r>
+              <a:rPr lang="en-US" sz="1400" dirty="0">
+                <a:latin typeface="Arial" panose="020B0604020202020204" pitchFamily="34" charset="0"/>
+                <a:cs typeface="Arial" panose="020B0604020202020204" pitchFamily="34" charset="0"/>
+              </a:rPr>
+              <a:t> de indices entre </a:t>
+            </a:r>
+            <a:r>
+              <a:rPr lang="en-US" sz="1400" dirty="0" err="1">
+                <a:latin typeface="Arial" panose="020B0604020202020204" pitchFamily="34" charset="0"/>
+                <a:cs typeface="Arial" panose="020B0604020202020204" pitchFamily="34" charset="0"/>
+              </a:rPr>
+              <a:t>el</a:t>
+            </a:r>
+            <a:r>
+              <a:rPr lang="en-US" sz="1400" dirty="0">
+                <a:latin typeface="Arial" panose="020B0604020202020204" pitchFamily="34" charset="0"/>
+                <a:cs typeface="Arial" panose="020B0604020202020204" pitchFamily="34" charset="0"/>
+              </a:rPr>
+              <a:t> </a:t>
+            </a:r>
+            <a:r>
+              <a:rPr lang="en-US" sz="1400" dirty="0" err="1">
+                <a:latin typeface="Arial" panose="020B0604020202020204" pitchFamily="34" charset="0"/>
+                <a:cs typeface="Arial" panose="020B0604020202020204" pitchFamily="34" charset="0"/>
+              </a:rPr>
+              <a:t>nucleo</a:t>
+            </a:r>
+            <a:r>
+              <a:rPr lang="en-US" sz="1400" dirty="0">
+                <a:latin typeface="Arial" panose="020B0604020202020204" pitchFamily="34" charset="0"/>
+                <a:cs typeface="Arial" panose="020B0604020202020204" pitchFamily="34" charset="0"/>
+              </a:rPr>
+              <a:t> y </a:t>
+            </a:r>
+            <a:r>
+              <a:rPr lang="en-US" sz="1400" dirty="0" err="1">
+                <a:latin typeface="Arial" panose="020B0604020202020204" pitchFamily="34" charset="0"/>
+                <a:cs typeface="Arial" panose="020B0604020202020204" pitchFamily="34" charset="0"/>
+              </a:rPr>
+              <a:t>el</a:t>
+            </a:r>
+            <a:r>
+              <a:rPr lang="en-US" sz="1400" dirty="0">
+                <a:latin typeface="Arial" panose="020B0604020202020204" pitchFamily="34" charset="0"/>
+                <a:cs typeface="Arial" panose="020B0604020202020204" pitchFamily="34" charset="0"/>
+              </a:rPr>
+              <a:t> cladding </a:t>
+            </a:r>
+            <a:r>
+              <a:rPr lang="en-US" sz="1400" dirty="0" err="1">
+                <a:latin typeface="Arial" panose="020B0604020202020204" pitchFamily="34" charset="0"/>
+                <a:cs typeface="Arial" panose="020B0604020202020204" pitchFamily="34" charset="0"/>
+              </a:rPr>
+              <a:t>en</a:t>
+            </a:r>
+            <a:r>
+              <a:rPr lang="en-US" sz="1400" dirty="0">
+                <a:latin typeface="Arial" panose="020B0604020202020204" pitchFamily="34" charset="0"/>
+                <a:cs typeface="Arial" panose="020B0604020202020204" pitchFamily="34" charset="0"/>
+              </a:rPr>
+              <a:t> </a:t>
+            </a:r>
+            <a:r>
+              <a:rPr lang="en-US" sz="1400" dirty="0" err="1">
+                <a:latin typeface="Arial" panose="020B0604020202020204" pitchFamily="34" charset="0"/>
+                <a:cs typeface="Arial" panose="020B0604020202020204" pitchFamily="34" charset="0"/>
+              </a:rPr>
+              <a:t>los</a:t>
+            </a:r>
+            <a:r>
+              <a:rPr lang="en-US" sz="1400" dirty="0">
+                <a:latin typeface="Arial" panose="020B0604020202020204" pitchFamily="34" charset="0"/>
+                <a:cs typeface="Arial" panose="020B0604020202020204" pitchFamily="34" charset="0"/>
+              </a:rPr>
+              <a:t> dos </a:t>
+            </a:r>
+            <a:r>
+              <a:rPr lang="en-US" sz="1400" dirty="0" err="1">
+                <a:latin typeface="Arial" panose="020B0604020202020204" pitchFamily="34" charset="0"/>
+                <a:cs typeface="Arial" panose="020B0604020202020204" pitchFamily="34" charset="0"/>
+              </a:rPr>
+              <a:t>tipos</a:t>
+            </a:r>
+            <a:r>
+              <a:rPr lang="en-US" sz="1400" dirty="0">
+                <a:latin typeface="Arial" panose="020B0604020202020204" pitchFamily="34" charset="0"/>
+                <a:cs typeface="Arial" panose="020B0604020202020204" pitchFamily="34" charset="0"/>
+              </a:rPr>
+              <a:t> de </a:t>
+            </a:r>
+            <a:r>
+              <a:rPr lang="en-US" sz="1400" dirty="0" err="1">
+                <a:latin typeface="Arial" panose="020B0604020202020204" pitchFamily="34" charset="0"/>
+                <a:cs typeface="Arial" panose="020B0604020202020204" pitchFamily="34" charset="0"/>
+              </a:rPr>
+              <a:t>guia</a:t>
+            </a:r>
+            <a:r>
+              <a:rPr lang="en-US" sz="1400" dirty="0">
+                <a:latin typeface="Arial" panose="020B0604020202020204" pitchFamily="34" charset="0"/>
+                <a:cs typeface="Arial" panose="020B0604020202020204" pitchFamily="34" charset="0"/>
+              </a:rPr>
+              <a:t>. Se </a:t>
+            </a:r>
+            <a:r>
+              <a:rPr lang="en-US" sz="1400" dirty="0" err="1">
+                <a:latin typeface="Arial" panose="020B0604020202020204" pitchFamily="34" charset="0"/>
+                <a:cs typeface="Arial" panose="020B0604020202020204" pitchFamily="34" charset="0"/>
+              </a:rPr>
+              <a:t>observa</a:t>
+            </a:r>
+            <a:r>
+              <a:rPr lang="en-US" sz="1400" dirty="0">
+                <a:latin typeface="Arial" panose="020B0604020202020204" pitchFamily="34" charset="0"/>
+                <a:cs typeface="Arial" panose="020B0604020202020204" pitchFamily="34" charset="0"/>
+              </a:rPr>
+              <a:t> </a:t>
+            </a:r>
+            <a:r>
+              <a:rPr lang="en-US" sz="1400" dirty="0" err="1">
+                <a:latin typeface="Arial" panose="020B0604020202020204" pitchFamily="34" charset="0"/>
+                <a:cs typeface="Arial" panose="020B0604020202020204" pitchFamily="34" charset="0"/>
+              </a:rPr>
+              <a:t>que</a:t>
+            </a:r>
+            <a:r>
+              <a:rPr lang="en-US" sz="1400" dirty="0">
+                <a:latin typeface="Arial" panose="020B0604020202020204" pitchFamily="34" charset="0"/>
+                <a:cs typeface="Arial" panose="020B0604020202020204" pitchFamily="34" charset="0"/>
+              </a:rPr>
+              <a:t> </a:t>
+            </a:r>
+            <a:r>
+              <a:rPr lang="en-US" sz="1400" dirty="0" err="1">
+                <a:latin typeface="Arial" panose="020B0604020202020204" pitchFamily="34" charset="0"/>
+                <a:cs typeface="Arial" panose="020B0604020202020204" pitchFamily="34" charset="0"/>
+              </a:rPr>
+              <a:t>el</a:t>
+            </a:r>
+            <a:r>
+              <a:rPr lang="en-US" sz="1400" dirty="0">
+                <a:latin typeface="Arial" panose="020B0604020202020204" pitchFamily="34" charset="0"/>
+                <a:cs typeface="Arial" panose="020B0604020202020204" pitchFamily="34" charset="0"/>
+              </a:rPr>
+              <a:t> </a:t>
+            </a:r>
+            <a:r>
+              <a:rPr lang="en-US" sz="1400" dirty="0" err="1">
+                <a:latin typeface="Arial" panose="020B0604020202020204" pitchFamily="34" charset="0"/>
+                <a:cs typeface="Arial" panose="020B0604020202020204" pitchFamily="34" charset="0"/>
+              </a:rPr>
+              <a:t>indice</a:t>
+            </a:r>
+            <a:r>
+              <a:rPr lang="en-US" sz="1400" dirty="0">
+                <a:latin typeface="Arial" panose="020B0604020202020204" pitchFamily="34" charset="0"/>
+                <a:cs typeface="Arial" panose="020B0604020202020204" pitchFamily="34" charset="0"/>
+              </a:rPr>
+              <a:t> </a:t>
+            </a:r>
+            <a:r>
+              <a:rPr lang="en-US" sz="1400" dirty="0" err="1">
+                <a:latin typeface="Arial" panose="020B0604020202020204" pitchFamily="34" charset="0"/>
+                <a:cs typeface="Arial" panose="020B0604020202020204" pitchFamily="34" charset="0"/>
+              </a:rPr>
+              <a:t>efectivo</a:t>
+            </a:r>
+            <a:r>
+              <a:rPr lang="en-US" sz="1400" dirty="0">
+                <a:latin typeface="Arial" panose="020B0604020202020204" pitchFamily="34" charset="0"/>
+                <a:cs typeface="Arial" panose="020B0604020202020204" pitchFamily="34" charset="0"/>
+              </a:rPr>
+              <a:t> de </a:t>
+            </a:r>
+            <a:r>
+              <a:rPr lang="en-US" sz="1400" dirty="0" err="1">
+                <a:latin typeface="Arial" panose="020B0604020202020204" pitchFamily="34" charset="0"/>
+                <a:cs typeface="Arial" panose="020B0604020202020204" pitchFamily="34" charset="0"/>
+              </a:rPr>
+              <a:t>los</a:t>
+            </a:r>
+            <a:r>
+              <a:rPr lang="en-US" sz="1400" dirty="0">
+                <a:latin typeface="Arial" panose="020B0604020202020204" pitchFamily="34" charset="0"/>
+                <a:cs typeface="Arial" panose="020B0604020202020204" pitchFamily="34" charset="0"/>
+              </a:rPr>
+              <a:t> </a:t>
+            </a:r>
+            <a:r>
+              <a:rPr lang="en-US" sz="1400" dirty="0" err="1">
+                <a:latin typeface="Arial" panose="020B0604020202020204" pitchFamily="34" charset="0"/>
+                <a:cs typeface="Arial" panose="020B0604020202020204" pitchFamily="34" charset="0"/>
+              </a:rPr>
+              <a:t>modos</a:t>
+            </a:r>
+            <a:r>
+              <a:rPr lang="en-US" sz="1400" dirty="0">
+                <a:latin typeface="Arial" panose="020B0604020202020204" pitchFamily="34" charset="0"/>
+                <a:cs typeface="Arial" panose="020B0604020202020204" pitchFamily="34" charset="0"/>
+              </a:rPr>
+              <a:t> de </a:t>
+            </a:r>
+            <a:r>
+              <a:rPr lang="en-US" sz="1400" dirty="0" err="1">
+                <a:latin typeface="Arial" panose="020B0604020202020204" pitchFamily="34" charset="0"/>
+                <a:cs typeface="Arial" panose="020B0604020202020204" pitchFamily="34" charset="0"/>
+              </a:rPr>
+              <a:t>cada</a:t>
+            </a:r>
+            <a:r>
+              <a:rPr lang="en-US" sz="1400" dirty="0">
+                <a:latin typeface="Arial" panose="020B0604020202020204" pitchFamily="34" charset="0"/>
+                <a:cs typeface="Arial" panose="020B0604020202020204" pitchFamily="34" charset="0"/>
+              </a:rPr>
+              <a:t> </a:t>
+            </a:r>
+            <a:r>
+              <a:rPr lang="en-US" sz="1400" dirty="0" err="1">
+                <a:latin typeface="Arial" panose="020B0604020202020204" pitchFamily="34" charset="0"/>
+                <a:cs typeface="Arial" panose="020B0604020202020204" pitchFamily="34" charset="0"/>
+              </a:rPr>
+              <a:t>una</a:t>
+            </a:r>
+            <a:r>
+              <a:rPr lang="en-US" sz="1400" dirty="0">
+                <a:latin typeface="Arial" panose="020B0604020202020204" pitchFamily="34" charset="0"/>
+                <a:cs typeface="Arial" panose="020B0604020202020204" pitchFamily="34" charset="0"/>
+              </a:rPr>
+              <a:t> de las </a:t>
+            </a:r>
+            <a:r>
+              <a:rPr lang="en-US" sz="1400" dirty="0" err="1">
+                <a:latin typeface="Arial" panose="020B0604020202020204" pitchFamily="34" charset="0"/>
+                <a:cs typeface="Arial" panose="020B0604020202020204" pitchFamily="34" charset="0"/>
+              </a:rPr>
+              <a:t>guias</a:t>
+            </a:r>
+            <a:r>
+              <a:rPr lang="en-US" sz="1400" dirty="0">
+                <a:latin typeface="Arial" panose="020B0604020202020204" pitchFamily="34" charset="0"/>
+                <a:cs typeface="Arial" panose="020B0604020202020204" pitchFamily="34" charset="0"/>
+              </a:rPr>
+              <a:t> son </a:t>
+            </a:r>
+            <a:r>
+              <a:rPr lang="en-US" sz="1400" dirty="0" err="1">
+                <a:latin typeface="Arial" panose="020B0604020202020204" pitchFamily="34" charset="0"/>
+                <a:cs typeface="Arial" panose="020B0604020202020204" pitchFamily="34" charset="0"/>
+              </a:rPr>
+              <a:t>valores</a:t>
+            </a:r>
+            <a:r>
+              <a:rPr lang="en-US" sz="1400" dirty="0">
+                <a:latin typeface="Arial" panose="020B0604020202020204" pitchFamily="34" charset="0"/>
+                <a:cs typeface="Arial" panose="020B0604020202020204" pitchFamily="34" charset="0"/>
+              </a:rPr>
+              <a:t> </a:t>
+            </a:r>
+            <a:r>
+              <a:rPr lang="en-US" sz="1400" dirty="0" err="1">
+                <a:latin typeface="Arial" panose="020B0604020202020204" pitchFamily="34" charset="0"/>
+                <a:cs typeface="Arial" panose="020B0604020202020204" pitchFamily="34" charset="0"/>
+              </a:rPr>
+              <a:t>cercanos</a:t>
+            </a:r>
+            <a:r>
+              <a:rPr lang="en-US" sz="1400" dirty="0">
+                <a:latin typeface="Arial" panose="020B0604020202020204" pitchFamily="34" charset="0"/>
+                <a:cs typeface="Arial" panose="020B0604020202020204" pitchFamily="34" charset="0"/>
+              </a:rPr>
+              <a:t> al </a:t>
+            </a:r>
+            <a:r>
+              <a:rPr lang="en-US" sz="1400" dirty="0" err="1">
+                <a:latin typeface="Arial" panose="020B0604020202020204" pitchFamily="34" charset="0"/>
+                <a:cs typeface="Arial" panose="020B0604020202020204" pitchFamily="34" charset="0"/>
+              </a:rPr>
+              <a:t>indice</a:t>
+            </a:r>
+            <a:r>
+              <a:rPr lang="en-US" sz="1400" dirty="0">
+                <a:latin typeface="Arial" panose="020B0604020202020204" pitchFamily="34" charset="0"/>
+                <a:cs typeface="Arial" panose="020B0604020202020204" pitchFamily="34" charset="0"/>
+              </a:rPr>
+              <a:t> del cladding (1.46). Como </a:t>
+            </a:r>
+            <a:r>
+              <a:rPr lang="en-US" sz="1400" dirty="0" err="1">
+                <a:latin typeface="Arial" panose="020B0604020202020204" pitchFamily="34" charset="0"/>
+                <a:cs typeface="Arial" panose="020B0604020202020204" pitchFamily="34" charset="0"/>
+              </a:rPr>
+              <a:t>el</a:t>
+            </a:r>
+            <a:r>
+              <a:rPr lang="en-US" sz="1400" dirty="0">
+                <a:latin typeface="Arial" panose="020B0604020202020204" pitchFamily="34" charset="0"/>
+                <a:cs typeface="Arial" panose="020B0604020202020204" pitchFamily="34" charset="0"/>
+              </a:rPr>
+              <a:t> </a:t>
+            </a:r>
+            <a:r>
+              <a:rPr lang="en-US" sz="1400" dirty="0" err="1">
+                <a:latin typeface="Arial" panose="020B0604020202020204" pitchFamily="34" charset="0"/>
+                <a:cs typeface="Arial" panose="020B0604020202020204" pitchFamily="34" charset="0"/>
+              </a:rPr>
+              <a:t>indice</a:t>
+            </a:r>
+            <a:r>
+              <a:rPr lang="en-US" sz="1400" dirty="0">
+                <a:latin typeface="Arial" panose="020B0604020202020204" pitchFamily="34" charset="0"/>
+                <a:cs typeface="Arial" panose="020B0604020202020204" pitchFamily="34" charset="0"/>
+              </a:rPr>
+              <a:t> </a:t>
+            </a:r>
+            <a:r>
+              <a:rPr lang="en-US" sz="1400" dirty="0" err="1">
+                <a:latin typeface="Arial" panose="020B0604020202020204" pitchFamily="34" charset="0"/>
+                <a:cs typeface="Arial" panose="020B0604020202020204" pitchFamily="34" charset="0"/>
+              </a:rPr>
+              <a:t>efectivo</a:t>
+            </a:r>
+            <a:r>
+              <a:rPr lang="en-US" sz="1400" dirty="0">
+                <a:latin typeface="Arial" panose="020B0604020202020204" pitchFamily="34" charset="0"/>
+                <a:cs typeface="Arial" panose="020B0604020202020204" pitchFamily="34" charset="0"/>
+              </a:rPr>
+              <a:t> se </a:t>
+            </a:r>
+            <a:r>
+              <a:rPr lang="en-US" sz="1400" dirty="0" err="1">
+                <a:latin typeface="Arial" panose="020B0604020202020204" pitchFamily="34" charset="0"/>
+                <a:cs typeface="Arial" panose="020B0604020202020204" pitchFamily="34" charset="0"/>
+              </a:rPr>
+              <a:t>aproxima</a:t>
+            </a:r>
+            <a:r>
+              <a:rPr lang="en-US" sz="1400" dirty="0">
+                <a:latin typeface="Arial" panose="020B0604020202020204" pitchFamily="34" charset="0"/>
+                <a:cs typeface="Arial" panose="020B0604020202020204" pitchFamily="34" charset="0"/>
+              </a:rPr>
+              <a:t> mas al del cladding </a:t>
+            </a:r>
+            <a:r>
+              <a:rPr lang="en-US" sz="1400" dirty="0" err="1">
+                <a:latin typeface="Arial" panose="020B0604020202020204" pitchFamily="34" charset="0"/>
+                <a:cs typeface="Arial" panose="020B0604020202020204" pitchFamily="34" charset="0"/>
+              </a:rPr>
+              <a:t>que</a:t>
+            </a:r>
+            <a:r>
+              <a:rPr lang="en-US" sz="1400" dirty="0">
+                <a:latin typeface="Arial" panose="020B0604020202020204" pitchFamily="34" charset="0"/>
+                <a:cs typeface="Arial" panose="020B0604020202020204" pitchFamily="34" charset="0"/>
+              </a:rPr>
+              <a:t> al del core no </a:t>
+            </a:r>
+            <a:r>
+              <a:rPr lang="en-US" sz="1400" dirty="0" err="1">
+                <a:latin typeface="Arial" panose="020B0604020202020204" pitchFamily="34" charset="0"/>
+                <a:cs typeface="Arial" panose="020B0604020202020204" pitchFamily="34" charset="0"/>
+              </a:rPr>
+              <a:t>tienen</a:t>
+            </a:r>
+            <a:r>
+              <a:rPr lang="en-US" sz="1400" dirty="0">
+                <a:latin typeface="Arial" panose="020B0604020202020204" pitchFamily="34" charset="0"/>
+                <a:cs typeface="Arial" panose="020B0604020202020204" pitchFamily="34" charset="0"/>
+              </a:rPr>
+              <a:t> un </a:t>
+            </a:r>
+            <a:r>
+              <a:rPr lang="en-US" sz="1400" dirty="0" err="1">
+                <a:latin typeface="Arial" panose="020B0604020202020204" pitchFamily="34" charset="0"/>
+                <a:cs typeface="Arial" panose="020B0604020202020204" pitchFamily="34" charset="0"/>
+              </a:rPr>
+              <a:t>buen</a:t>
+            </a:r>
+            <a:r>
+              <a:rPr lang="en-US" sz="1400" dirty="0">
+                <a:latin typeface="Arial" panose="020B0604020202020204" pitchFamily="34" charset="0"/>
+                <a:cs typeface="Arial" panose="020B0604020202020204" pitchFamily="34" charset="0"/>
+              </a:rPr>
+              <a:t> </a:t>
+            </a:r>
+            <a:r>
+              <a:rPr lang="en-US" sz="1400" dirty="0" err="1">
+                <a:latin typeface="Arial" panose="020B0604020202020204" pitchFamily="34" charset="0"/>
+                <a:cs typeface="Arial" panose="020B0604020202020204" pitchFamily="34" charset="0"/>
+              </a:rPr>
+              <a:t>confinamiento</a:t>
+            </a:r>
+            <a:r>
+              <a:rPr lang="en-US" sz="1400" dirty="0">
+                <a:latin typeface="Arial" panose="020B0604020202020204" pitchFamily="34" charset="0"/>
+                <a:cs typeface="Arial" panose="020B0604020202020204" pitchFamily="34" charset="0"/>
+              </a:rPr>
+              <a:t>.</a:t>
+            </a:r>
+          </a:p>
+          <a:p>
+            <a:endParaRPr lang="es-ES" sz="1400" kern="0" dirty="0">
+              <a:solidFill>
+                <a:sysClr val="windowText" lastClr="000000"/>
+              </a:solidFill>
+            </a:endParaRPr>
+          </a:p>
+        </p:txBody>
+      </p:sp>
+    </p:spTree>
+    <p:extLst>
+      <p:ext uri="{BB962C8B-B14F-4D97-AF65-F5344CB8AC3E}">
+        <p14:creationId xmlns:p14="http://schemas.microsoft.com/office/powerpoint/2010/main" val="444238847"/>
+      </p:ext>
+    </p:extLst>
+  </p:cSld>
+  <p:clrMapOvr>
+    <a:masterClrMapping/>
+  </p:clrMapOvr>
+</p:sld>
+</file>
+
+<file path=ppt/slides/slide7.xml><?xml version="1.0" encoding="utf-8"?>
+<p:sld xmlns:a="http://schemas.openxmlformats.org/drawingml/2006/main" xmlns:r="http://schemas.openxmlformats.org/officeDocument/2006/relationships" xmlns:p="http://schemas.openxmlformats.org/presentationml/2006/main">
+  <p:cSld>
+    <p:spTree>
+      <p:nvGrpSpPr>
+        <p:cNvPr id="1" name=""/>
+        <p:cNvGrpSpPr/>
+        <p:nvPr/>
+      </p:nvGrpSpPr>
+      <p:grpSpPr>
+        <a:xfrm>
+          <a:off x="0" y="0"/>
+          <a:ext cx="0" cy="0"/>
+          <a:chOff x="0" y="0"/>
+          <a:chExt cx="0" cy="0"/>
+        </a:xfrm>
+      </p:grpSpPr>
+      <p:sp>
+        <p:nvSpPr>
           <p:cNvPr id="3" name="object 3"/>
           <p:cNvSpPr/>
           <p:nvPr/>
@@ -7101,7 +9428,7 @@
           <a:p>
             <a:fld id="{B6F15528-21DE-4FAA-801E-634DDDAF4B2B}" type="slidenum">
               <a:rPr lang="es-ES" smtClean="0"/>
-              <a:t>5</a:t>
+              <a:t>7</a:t>
             </a:fld>
             <a:endParaRPr lang="es-ES"/>
           </a:p>
@@ -8029,23 +10356,6 @@
 </file>
 
 <file path=customXml/item1.xml><?xml version="1.0" encoding="utf-8"?>
-<p:properties xmlns:p="http://schemas.microsoft.com/office/2006/metadata/properties" xmlns:xsi="http://www.w3.org/2001/XMLSchema-instance" xmlns:pc="http://schemas.microsoft.com/office/infopath/2007/PartnerControls">
-  <documentManagement>
-    <_activity xmlns="512ad970-e211-4551-badd-1c89141866b5" xsi:nil="true"/>
-  </documentManagement>
-</p:properties>
-</file>
-
-<file path=customXml/item2.xml><?xml version="1.0" encoding="utf-8"?>
-<?mso-contentType ?>
-<FormTemplates xmlns="http://schemas.microsoft.com/sharepoint/v3/contenttype/forms">
-  <Display>DocumentLibraryForm</Display>
-  <Edit>DocumentLibraryForm</Edit>
-  <New>DocumentLibraryForm</New>
-</FormTemplates>
-</file>
-
-<file path=customXml/item3.xml><?xml version="1.0" encoding="utf-8"?>
 <ct:contentTypeSchema xmlns:ct="http://schemas.microsoft.com/office/2006/metadata/contentType" xmlns:ma="http://schemas.microsoft.com/office/2006/metadata/properties/metaAttributes" ct:_="" ma:_="" ma:contentTypeName="Documento" ma:contentTypeID="0x010100B4F9E81278D9EF4B93FEF4C39323CCC6" ma:contentTypeVersion="9" ma:contentTypeDescription="Crear nuevo documento." ma:contentTypeScope="" ma:versionID="d3230f1af0420652ab6bb9cc9a7d79bf">
   <xsd:schema xmlns:xsd="http://www.w3.org/2001/XMLSchema" xmlns:xs="http://www.w3.org/2001/XMLSchema" xmlns:p="http://schemas.microsoft.com/office/2006/metadata/properties" xmlns:ns3="512ad970-e211-4551-badd-1c89141866b5" xmlns:ns4="39b51ea6-d3c9-44a5-b163-cfe7ba19310b" targetNamespace="http://schemas.microsoft.com/office/2006/metadata/properties" ma:root="true" ma:fieldsID="f33886ecf8d1a5727ad2dd4cfd712005" ns3:_="" ns4:_="">
     <xsd:import namespace="512ad970-e211-4551-badd-1c89141866b5"/>
@@ -8240,32 +10550,24 @@
 </ct:contentTypeSchema>
 </file>
 
-<file path=customXml/itemProps1.xml><?xml version="1.0" encoding="utf-8"?>
-<ds:datastoreItem xmlns:ds="http://schemas.openxmlformats.org/officeDocument/2006/customXml" ds:itemID="{672770CA-3061-447B-B38E-0CE919B71026}">
-  <ds:schemaRefs>
-    <ds:schemaRef ds:uri="http://purl.org/dc/terms/"/>
-    <ds:schemaRef ds:uri="http://schemas.openxmlformats.org/package/2006/metadata/core-properties"/>
-    <ds:schemaRef ds:uri="512ad970-e211-4551-badd-1c89141866b5"/>
-    <ds:schemaRef ds:uri="http://purl.org/dc/dcmitype/"/>
-    <ds:schemaRef ds:uri="http://schemas.microsoft.com/office/2006/documentManagement/types"/>
-    <ds:schemaRef ds:uri="http://schemas.microsoft.com/office/infopath/2007/PartnerControls"/>
-    <ds:schemaRef ds:uri="39b51ea6-d3c9-44a5-b163-cfe7ba19310b"/>
-    <ds:schemaRef ds:uri="http://schemas.microsoft.com/office/2006/metadata/properties"/>
-    <ds:schemaRef ds:uri="http://www.w3.org/XML/1998/namespace"/>
-    <ds:schemaRef ds:uri="http://purl.org/dc/elements/1.1/"/>
-  </ds:schemaRefs>
-</ds:datastoreItem>
+<file path=customXml/item2.xml><?xml version="1.0" encoding="utf-8"?>
+<?mso-contentType ?>
+<FormTemplates xmlns="http://schemas.microsoft.com/sharepoint/v3/contenttype/forms">
+  <Display>DocumentLibraryForm</Display>
+  <Edit>DocumentLibraryForm</Edit>
+  <New>DocumentLibraryForm</New>
+</FormTemplates>
 </file>
 
-<file path=customXml/itemProps2.xml><?xml version="1.0" encoding="utf-8"?>
-<ds:datastoreItem xmlns:ds="http://schemas.openxmlformats.org/officeDocument/2006/customXml" ds:itemID="{ED6A1A82-244F-49B2-AE87-9E0E62E4BD07}">
-  <ds:schemaRefs>
-    <ds:schemaRef ds:uri="http://schemas.microsoft.com/sharepoint/v3/contenttype/forms"/>
-  </ds:schemaRefs>
-</ds:datastoreItem>
+<file path=customXml/item3.xml><?xml version="1.0" encoding="utf-8"?>
+<p:properties xmlns:p="http://schemas.microsoft.com/office/2006/metadata/properties" xmlns:xsi="http://www.w3.org/2001/XMLSchema-instance" xmlns:pc="http://schemas.microsoft.com/office/infopath/2007/PartnerControls">
+  <documentManagement>
+    <_activity xmlns="512ad970-e211-4551-badd-1c89141866b5" xsi:nil="true"/>
+  </documentManagement>
+</p:properties>
 </file>
 
-<file path=customXml/itemProps3.xml><?xml version="1.0" encoding="utf-8"?>
+<file path=customXml/itemProps1.xml><?xml version="1.0" encoding="utf-8"?>
 <ds:datastoreItem xmlns:ds="http://schemas.openxmlformats.org/officeDocument/2006/customXml" ds:itemID="{74D191D3-7CDB-438B-95CA-9F90BBE48D1D}">
   <ds:schemaRefs>
     <ds:schemaRef ds:uri="http://schemas.microsoft.com/office/2006/metadata/contentType"/>
@@ -8282,4 +10584,29 @@
     <ds:schemaRef ds:uri="http://schemas.microsoft.com/internal/obd"/>
   </ds:schemaRefs>
 </ds:datastoreItem>
+</file>
+
+<file path=customXml/itemProps2.xml><?xml version="1.0" encoding="utf-8"?>
+<ds:datastoreItem xmlns:ds="http://schemas.openxmlformats.org/officeDocument/2006/customXml" ds:itemID="{ED6A1A82-244F-49B2-AE87-9E0E62E4BD07}">
+  <ds:schemaRefs>
+    <ds:schemaRef ds:uri="http://schemas.microsoft.com/sharepoint/v3/contenttype/forms"/>
+  </ds:schemaRefs>
+</ds:datastoreItem>
+</file>
+
+<file path=customXml/itemProps3.xml><?xml version="1.0" encoding="utf-8"?>
+<ds:datastoreItem xmlns:ds="http://schemas.openxmlformats.org/officeDocument/2006/customXml" ds:itemID="{672770CA-3061-447B-B38E-0CE919B71026}">
+  <ds:schemaRefs>
+    <ds:schemaRef ds:uri="http://purl.org/dc/terms/"/>
+    <ds:schemaRef ds:uri="http://schemas.openxmlformats.org/package/2006/metadata/core-properties"/>
+    <ds:schemaRef ds:uri="512ad970-e211-4551-badd-1c89141866b5"/>
+    <ds:schemaRef ds:uri="http://purl.org/dc/dcmitype/"/>
+    <ds:schemaRef ds:uri="http://schemas.microsoft.com/office/2006/documentManagement/types"/>
+    <ds:schemaRef ds:uri="http://schemas.microsoft.com/office/infopath/2007/PartnerControls"/>
+    <ds:schemaRef ds:uri="39b51ea6-d3c9-44a5-b163-cfe7ba19310b"/>
+    <ds:schemaRef ds:uri="http://schemas.microsoft.com/office/2006/metadata/properties"/>
+    <ds:schemaRef ds:uri="http://www.w3.org/XML/1998/namespace"/>
+    <ds:schemaRef ds:uri="http://purl.org/dc/elements/1.1/"/>
+  </ds:schemaRefs>
+</ds:datastoreItem>
 </file>
--- a/LabBook_010.pptx
+++ b/LabBook_010.pptx
@@ -240,7 +240,7 @@
           <a:p>
             <a:fld id="{8438F8DC-35B0-48E6-A86E-42F1F08DD00F}" type="datetimeFigureOut">
               <a:rPr lang="es-ES" smtClean="0"/>
-              <a:t>16/02/2026</a:t>
+              <a:t>02/03/2026</a:t>
             </a:fld>
             <a:endParaRPr lang="es-ES"/>
           </a:p>
@@ -417,7 +417,7 @@
           <a:p>
             <a:fld id="{FACBDC12-F39B-4B97-8F4D-6734F9D366FF}" type="datetimeFigureOut">
               <a:rPr lang="es-ES" smtClean="0"/>
-              <a:t>16/02/2026</a:t>
+              <a:t>02/03/2026</a:t>
             </a:fld>
             <a:endParaRPr lang="es-ES"/>
           </a:p>
@@ -5888,7 +5888,7 @@
         <p:spPr>
           <a:xfrm>
             <a:off x="609441" y="4860334"/>
-            <a:ext cx="11199971" cy="1384995"/>
+            <a:ext cx="11199971" cy="1508105"/>
           </a:xfrm>
           <a:prstGeom prst="rect">
             <a:avLst/>
@@ -5921,341 +5921,6 @@
           </a:p>
           <a:p>
             <a:pPr algn="just"/>
-            <a:r>
-              <a:rPr lang="en-US" sz="1200" dirty="0" err="1">
-                <a:latin typeface="Arial" panose="020B0604020202020204" pitchFamily="34" charset="0"/>
-                <a:cs typeface="Arial" panose="020B0604020202020204" pitchFamily="34" charset="0"/>
-              </a:rPr>
-              <a:t>Tenemos</a:t>
-            </a:r>
-            <a:r>
-              <a:rPr lang="en-US" sz="1200" dirty="0">
-                <a:latin typeface="Arial" panose="020B0604020202020204" pitchFamily="34" charset="0"/>
-                <a:cs typeface="Arial" panose="020B0604020202020204" pitchFamily="34" charset="0"/>
-              </a:rPr>
-              <a:t> 4 </a:t>
-            </a:r>
-            <a:r>
-              <a:rPr lang="en-US" sz="1200" dirty="0" err="1">
-                <a:latin typeface="Arial" panose="020B0604020202020204" pitchFamily="34" charset="0"/>
-                <a:cs typeface="Arial" panose="020B0604020202020204" pitchFamily="34" charset="0"/>
-              </a:rPr>
-              <a:t>modos</a:t>
-            </a:r>
-            <a:r>
-              <a:rPr lang="en-US" sz="1200" dirty="0">
-                <a:latin typeface="Arial" panose="020B0604020202020204" pitchFamily="34" charset="0"/>
-                <a:cs typeface="Arial" panose="020B0604020202020204" pitchFamily="34" charset="0"/>
-              </a:rPr>
-              <a:t> </a:t>
-            </a:r>
-            <a:r>
-              <a:rPr lang="en-US" sz="1200" dirty="0" err="1">
-                <a:latin typeface="Arial" panose="020B0604020202020204" pitchFamily="34" charset="0"/>
-                <a:cs typeface="Arial" panose="020B0604020202020204" pitchFamily="34" charset="0"/>
-              </a:rPr>
-              <a:t>que</a:t>
-            </a:r>
-            <a:r>
-              <a:rPr lang="en-US" sz="1200" dirty="0">
-                <a:latin typeface="Arial" panose="020B0604020202020204" pitchFamily="34" charset="0"/>
-                <a:cs typeface="Arial" panose="020B0604020202020204" pitchFamily="34" charset="0"/>
-              </a:rPr>
-              <a:t> se </a:t>
-            </a:r>
-            <a:r>
-              <a:rPr lang="en-US" sz="1200" dirty="0" err="1">
-                <a:latin typeface="Arial" panose="020B0604020202020204" pitchFamily="34" charset="0"/>
-                <a:cs typeface="Arial" panose="020B0604020202020204" pitchFamily="34" charset="0"/>
-              </a:rPr>
-              <a:t>propagan</a:t>
-            </a:r>
-            <a:r>
-              <a:rPr lang="en-US" sz="1200" dirty="0">
-                <a:latin typeface="Arial" panose="020B0604020202020204" pitchFamily="34" charset="0"/>
-                <a:cs typeface="Arial" panose="020B0604020202020204" pitchFamily="34" charset="0"/>
-              </a:rPr>
-              <a:t>: </a:t>
-            </a:r>
-            <a:r>
-              <a:rPr lang="en-US" sz="1200" dirty="0" err="1">
-                <a:latin typeface="Arial" panose="020B0604020202020204" pitchFamily="34" charset="0"/>
-                <a:cs typeface="Arial" panose="020B0604020202020204" pitchFamily="34" charset="0"/>
-              </a:rPr>
-              <a:t>los</a:t>
-            </a:r>
-            <a:r>
-              <a:rPr lang="en-US" sz="1200" dirty="0">
-                <a:latin typeface="Arial" panose="020B0604020202020204" pitchFamily="34" charset="0"/>
-                <a:cs typeface="Arial" panose="020B0604020202020204" pitchFamily="34" charset="0"/>
-              </a:rPr>
-              <a:t> </a:t>
-            </a:r>
-            <a:r>
-              <a:rPr lang="en-US" sz="1200" dirty="0" err="1">
-                <a:latin typeface="Arial" panose="020B0604020202020204" pitchFamily="34" charset="0"/>
-                <a:cs typeface="Arial" panose="020B0604020202020204" pitchFamily="34" charset="0"/>
-              </a:rPr>
-              <a:t>modos</a:t>
-            </a:r>
-            <a:r>
-              <a:rPr lang="en-US" sz="1200" dirty="0">
-                <a:latin typeface="Arial" panose="020B0604020202020204" pitchFamily="34" charset="0"/>
-                <a:cs typeface="Arial" panose="020B0604020202020204" pitchFamily="34" charset="0"/>
-              </a:rPr>
-              <a:t> 0 y 2 son </a:t>
-            </a:r>
-            <a:r>
-              <a:rPr lang="en-US" sz="1200" dirty="0" err="1">
-                <a:latin typeface="Arial" panose="020B0604020202020204" pitchFamily="34" charset="0"/>
-                <a:cs typeface="Arial" panose="020B0604020202020204" pitchFamily="34" charset="0"/>
-              </a:rPr>
-              <a:t>modos</a:t>
-            </a:r>
-            <a:r>
-              <a:rPr lang="en-US" sz="1200" dirty="0">
-                <a:latin typeface="Arial" panose="020B0604020202020204" pitchFamily="34" charset="0"/>
-                <a:cs typeface="Arial" panose="020B0604020202020204" pitchFamily="34" charset="0"/>
-              </a:rPr>
-              <a:t> TE y </a:t>
-            </a:r>
-            <a:r>
-              <a:rPr lang="en-US" sz="1200" dirty="0" err="1">
-                <a:latin typeface="Arial" panose="020B0604020202020204" pitchFamily="34" charset="0"/>
-                <a:cs typeface="Arial" panose="020B0604020202020204" pitchFamily="34" charset="0"/>
-              </a:rPr>
-              <a:t>los</a:t>
-            </a:r>
-            <a:r>
-              <a:rPr lang="en-US" sz="1200" dirty="0">
-                <a:latin typeface="Arial" panose="020B0604020202020204" pitchFamily="34" charset="0"/>
-                <a:cs typeface="Arial" panose="020B0604020202020204" pitchFamily="34" charset="0"/>
-              </a:rPr>
-              <a:t> </a:t>
-            </a:r>
-            <a:r>
-              <a:rPr lang="en-US" sz="1200" dirty="0" err="1">
-                <a:latin typeface="Arial" panose="020B0604020202020204" pitchFamily="34" charset="0"/>
-                <a:cs typeface="Arial" panose="020B0604020202020204" pitchFamily="34" charset="0"/>
-              </a:rPr>
-              <a:t>modos</a:t>
-            </a:r>
-            <a:r>
-              <a:rPr lang="en-US" sz="1200" dirty="0">
-                <a:latin typeface="Arial" panose="020B0604020202020204" pitchFamily="34" charset="0"/>
-                <a:cs typeface="Arial" panose="020B0604020202020204" pitchFamily="34" charset="0"/>
-              </a:rPr>
-              <a:t> 1 y 3 son TM.</a:t>
-            </a:r>
-          </a:p>
-          <a:p>
-            <a:pPr algn="just"/>
-            <a:r>
-              <a:rPr lang="en-US" sz="1200" dirty="0">
-                <a:latin typeface="Arial" panose="020B0604020202020204" pitchFamily="34" charset="0"/>
-                <a:cs typeface="Arial" panose="020B0604020202020204" pitchFamily="34" charset="0"/>
-              </a:rPr>
-              <a:t>Se </a:t>
-            </a:r>
-            <a:r>
-              <a:rPr lang="en-US" sz="1200" dirty="0" err="1">
-                <a:latin typeface="Arial" panose="020B0604020202020204" pitchFamily="34" charset="0"/>
-                <a:cs typeface="Arial" panose="020B0604020202020204" pitchFamily="34" charset="0"/>
-              </a:rPr>
-              <a:t>puede</a:t>
-            </a:r>
-            <a:r>
-              <a:rPr lang="en-US" sz="1200" dirty="0">
-                <a:latin typeface="Arial" panose="020B0604020202020204" pitchFamily="34" charset="0"/>
-                <a:cs typeface="Arial" panose="020B0604020202020204" pitchFamily="34" charset="0"/>
-              </a:rPr>
-              <a:t> </a:t>
-            </a:r>
-            <a:r>
-              <a:rPr lang="en-US" sz="1200" dirty="0" err="1">
-                <a:latin typeface="Arial" panose="020B0604020202020204" pitchFamily="34" charset="0"/>
-                <a:cs typeface="Arial" panose="020B0604020202020204" pitchFamily="34" charset="0"/>
-              </a:rPr>
-              <a:t>observar</a:t>
-            </a:r>
-            <a:r>
-              <a:rPr lang="en-US" sz="1200" dirty="0">
-                <a:latin typeface="Arial" panose="020B0604020202020204" pitchFamily="34" charset="0"/>
-                <a:cs typeface="Arial" panose="020B0604020202020204" pitchFamily="34" charset="0"/>
-              </a:rPr>
-              <a:t> </a:t>
-            </a:r>
-            <a:r>
-              <a:rPr lang="en-US" sz="1200" dirty="0" err="1">
-                <a:latin typeface="Arial" panose="020B0604020202020204" pitchFamily="34" charset="0"/>
-                <a:cs typeface="Arial" panose="020B0604020202020204" pitchFamily="34" charset="0"/>
-              </a:rPr>
-              <a:t>en</a:t>
-            </a:r>
-            <a:r>
-              <a:rPr lang="en-US" sz="1200" dirty="0">
-                <a:latin typeface="Arial" panose="020B0604020202020204" pitchFamily="34" charset="0"/>
-                <a:cs typeface="Arial" panose="020B0604020202020204" pitchFamily="34" charset="0"/>
-              </a:rPr>
-              <a:t> </a:t>
-            </a:r>
-            <a:r>
-              <a:rPr lang="en-US" sz="1200" dirty="0" err="1">
-                <a:latin typeface="Arial" panose="020B0604020202020204" pitchFamily="34" charset="0"/>
-                <a:cs typeface="Arial" panose="020B0604020202020204" pitchFamily="34" charset="0"/>
-              </a:rPr>
-              <a:t>los</a:t>
-            </a:r>
-            <a:r>
-              <a:rPr lang="en-US" sz="1200" dirty="0">
-                <a:latin typeface="Arial" panose="020B0604020202020204" pitchFamily="34" charset="0"/>
-                <a:cs typeface="Arial" panose="020B0604020202020204" pitchFamily="34" charset="0"/>
-              </a:rPr>
-              <a:t> plots </a:t>
-            </a:r>
-            <a:r>
-              <a:rPr lang="en-US" sz="1200" dirty="0" err="1">
-                <a:latin typeface="Arial" panose="020B0604020202020204" pitchFamily="34" charset="0"/>
-                <a:cs typeface="Arial" panose="020B0604020202020204" pitchFamily="34" charset="0"/>
-              </a:rPr>
-              <a:t>que</a:t>
-            </a:r>
-            <a:r>
-              <a:rPr lang="en-US" sz="1200" dirty="0">
-                <a:latin typeface="Arial" panose="020B0604020202020204" pitchFamily="34" charset="0"/>
-                <a:cs typeface="Arial" panose="020B0604020202020204" pitchFamily="34" charset="0"/>
-              </a:rPr>
-              <a:t> </a:t>
-            </a:r>
-            <a:r>
-              <a:rPr lang="en-US" sz="1200" dirty="0" err="1">
-                <a:latin typeface="Arial" panose="020B0604020202020204" pitchFamily="34" charset="0"/>
-                <a:cs typeface="Arial" panose="020B0604020202020204" pitchFamily="34" charset="0"/>
-              </a:rPr>
-              <a:t>el</a:t>
-            </a:r>
-            <a:r>
-              <a:rPr lang="en-US" sz="1200" dirty="0">
-                <a:latin typeface="Arial" panose="020B0604020202020204" pitchFamily="34" charset="0"/>
-                <a:cs typeface="Arial" panose="020B0604020202020204" pitchFamily="34" charset="0"/>
-              </a:rPr>
-              <a:t> campo </a:t>
-            </a:r>
-            <a:r>
-              <a:rPr lang="en-US" sz="1200" dirty="0" err="1">
-                <a:latin typeface="Arial" panose="020B0604020202020204" pitchFamily="34" charset="0"/>
-                <a:cs typeface="Arial" panose="020B0604020202020204" pitchFamily="34" charset="0"/>
-              </a:rPr>
-              <a:t>en</a:t>
-            </a:r>
-            <a:r>
-              <a:rPr lang="en-US" sz="1200" dirty="0">
-                <a:latin typeface="Arial" panose="020B0604020202020204" pitchFamily="34" charset="0"/>
-                <a:cs typeface="Arial" panose="020B0604020202020204" pitchFamily="34" charset="0"/>
-              </a:rPr>
-              <a:t> </a:t>
-            </a:r>
-            <a:r>
-              <a:rPr lang="en-US" sz="1200" dirty="0" err="1">
-                <a:latin typeface="Arial" panose="020B0604020202020204" pitchFamily="34" charset="0"/>
-                <a:cs typeface="Arial" panose="020B0604020202020204" pitchFamily="34" charset="0"/>
-              </a:rPr>
-              <a:t>los</a:t>
-            </a:r>
-            <a:r>
-              <a:rPr lang="en-US" sz="1200" dirty="0">
-                <a:latin typeface="Arial" panose="020B0604020202020204" pitchFamily="34" charset="0"/>
-                <a:cs typeface="Arial" panose="020B0604020202020204" pitchFamily="34" charset="0"/>
-              </a:rPr>
-              <a:t> </a:t>
-            </a:r>
-            <a:r>
-              <a:rPr lang="en-US" sz="1200" dirty="0" err="1">
-                <a:latin typeface="Arial" panose="020B0604020202020204" pitchFamily="34" charset="0"/>
-                <a:cs typeface="Arial" panose="020B0604020202020204" pitchFamily="34" charset="0"/>
-              </a:rPr>
-              <a:t>modos</a:t>
-            </a:r>
-            <a:r>
-              <a:rPr lang="en-US" sz="1200" dirty="0">
-                <a:latin typeface="Arial" panose="020B0604020202020204" pitchFamily="34" charset="0"/>
-                <a:cs typeface="Arial" panose="020B0604020202020204" pitchFamily="34" charset="0"/>
-              </a:rPr>
-              <a:t> 0 (TE) y 1 (TM) </a:t>
-            </a:r>
-            <a:r>
-              <a:rPr lang="en-US" sz="1200" dirty="0" err="1">
-                <a:latin typeface="Arial" panose="020B0604020202020204" pitchFamily="34" charset="0"/>
-                <a:cs typeface="Arial" panose="020B0604020202020204" pitchFamily="34" charset="0"/>
-              </a:rPr>
-              <a:t>estan</a:t>
-            </a:r>
-            <a:r>
-              <a:rPr lang="en-US" sz="1200" dirty="0">
-                <a:latin typeface="Arial" panose="020B0604020202020204" pitchFamily="34" charset="0"/>
-                <a:cs typeface="Arial" panose="020B0604020202020204" pitchFamily="34" charset="0"/>
-              </a:rPr>
-              <a:t> </a:t>
-            </a:r>
-            <a:r>
-              <a:rPr lang="en-US" sz="1200" dirty="0" err="1">
-                <a:latin typeface="Arial" panose="020B0604020202020204" pitchFamily="34" charset="0"/>
-                <a:cs typeface="Arial" panose="020B0604020202020204" pitchFamily="34" charset="0"/>
-              </a:rPr>
-              <a:t>confinados</a:t>
-            </a:r>
-            <a:r>
-              <a:rPr lang="en-US" sz="1200" dirty="0">
-                <a:latin typeface="Arial" panose="020B0604020202020204" pitchFamily="34" charset="0"/>
-                <a:cs typeface="Arial" panose="020B0604020202020204" pitchFamily="34" charset="0"/>
-              </a:rPr>
-              <a:t> a </a:t>
-            </a:r>
-            <a:r>
-              <a:rPr lang="en-US" sz="1200" dirty="0" err="1">
-                <a:latin typeface="Arial" panose="020B0604020202020204" pitchFamily="34" charset="0"/>
-                <a:cs typeface="Arial" panose="020B0604020202020204" pitchFamily="34" charset="0"/>
-              </a:rPr>
-              <a:t>difernecia</a:t>
-            </a:r>
-            <a:r>
-              <a:rPr lang="en-US" sz="1200" dirty="0">
-                <a:latin typeface="Arial" panose="020B0604020202020204" pitchFamily="34" charset="0"/>
-                <a:cs typeface="Arial" panose="020B0604020202020204" pitchFamily="34" charset="0"/>
-              </a:rPr>
-              <a:t> de </a:t>
-            </a:r>
-            <a:r>
-              <a:rPr lang="en-US" sz="1200" dirty="0" err="1">
-                <a:latin typeface="Arial" panose="020B0604020202020204" pitchFamily="34" charset="0"/>
-                <a:cs typeface="Arial" panose="020B0604020202020204" pitchFamily="34" charset="0"/>
-              </a:rPr>
-              <a:t>los</a:t>
-            </a:r>
-            <a:r>
-              <a:rPr lang="en-US" sz="1200" dirty="0">
-                <a:latin typeface="Arial" panose="020B0604020202020204" pitchFamily="34" charset="0"/>
-                <a:cs typeface="Arial" panose="020B0604020202020204" pitchFamily="34" charset="0"/>
-              </a:rPr>
-              <a:t> </a:t>
-            </a:r>
-            <a:r>
-              <a:rPr lang="en-US" sz="1200" dirty="0" err="1">
-                <a:latin typeface="Arial" panose="020B0604020202020204" pitchFamily="34" charset="0"/>
-                <a:cs typeface="Arial" panose="020B0604020202020204" pitchFamily="34" charset="0"/>
-              </a:rPr>
-              <a:t>modos</a:t>
-            </a:r>
-            <a:r>
-              <a:rPr lang="en-US" sz="1200" dirty="0">
-                <a:latin typeface="Arial" panose="020B0604020202020204" pitchFamily="34" charset="0"/>
-                <a:cs typeface="Arial" panose="020B0604020202020204" pitchFamily="34" charset="0"/>
-              </a:rPr>
-              <a:t> 2 (TE) y 3 (TM).</a:t>
-            </a:r>
-          </a:p>
-          <a:p>
-            <a:pPr algn="just"/>
             <a:endParaRPr lang="en-US" sz="1200" dirty="0">
               <a:latin typeface="Arial" panose="020B0604020202020204" pitchFamily="34" charset="0"/>
               <a:cs typeface="Arial" panose="020B0604020202020204" pitchFamily="34" charset="0"/>
@@ -6263,14 +5928,352 @@
           </a:p>
           <a:p>
             <a:pPr algn="just"/>
-            <a:endParaRPr lang="en-US" sz="1200" dirty="0">
+            <a:r>
+              <a:rPr lang="en-US" sz="1400" dirty="0" err="1">
+                <a:latin typeface="Arial" panose="020B0604020202020204" pitchFamily="34" charset="0"/>
+                <a:cs typeface="Arial" panose="020B0604020202020204" pitchFamily="34" charset="0"/>
+              </a:rPr>
+              <a:t>Tenemos</a:t>
+            </a:r>
+            <a:r>
+              <a:rPr lang="en-US" sz="1400" dirty="0">
+                <a:latin typeface="Arial" panose="020B0604020202020204" pitchFamily="34" charset="0"/>
+                <a:cs typeface="Arial" panose="020B0604020202020204" pitchFamily="34" charset="0"/>
+              </a:rPr>
+              <a:t> 4 </a:t>
+            </a:r>
+            <a:r>
+              <a:rPr lang="en-US" sz="1400" dirty="0" err="1">
+                <a:latin typeface="Arial" panose="020B0604020202020204" pitchFamily="34" charset="0"/>
+                <a:cs typeface="Arial" panose="020B0604020202020204" pitchFamily="34" charset="0"/>
+              </a:rPr>
+              <a:t>modos</a:t>
+            </a:r>
+            <a:r>
+              <a:rPr lang="en-US" sz="1400" dirty="0">
+                <a:latin typeface="Arial" panose="020B0604020202020204" pitchFamily="34" charset="0"/>
+                <a:cs typeface="Arial" panose="020B0604020202020204" pitchFamily="34" charset="0"/>
+              </a:rPr>
+              <a:t> </a:t>
+            </a:r>
+            <a:r>
+              <a:rPr lang="en-US" sz="1400" dirty="0" err="1">
+                <a:latin typeface="Arial" panose="020B0604020202020204" pitchFamily="34" charset="0"/>
+                <a:cs typeface="Arial" panose="020B0604020202020204" pitchFamily="34" charset="0"/>
+              </a:rPr>
+              <a:t>que</a:t>
+            </a:r>
+            <a:r>
+              <a:rPr lang="en-US" sz="1400" dirty="0">
+                <a:latin typeface="Arial" panose="020B0604020202020204" pitchFamily="34" charset="0"/>
+                <a:cs typeface="Arial" panose="020B0604020202020204" pitchFamily="34" charset="0"/>
+              </a:rPr>
+              <a:t> se </a:t>
+            </a:r>
+            <a:r>
+              <a:rPr lang="en-US" sz="1400" dirty="0" err="1">
+                <a:latin typeface="Arial" panose="020B0604020202020204" pitchFamily="34" charset="0"/>
+                <a:cs typeface="Arial" panose="020B0604020202020204" pitchFamily="34" charset="0"/>
+              </a:rPr>
+              <a:t>propagan</a:t>
+            </a:r>
+            <a:r>
+              <a:rPr lang="en-US" sz="1400" dirty="0">
+                <a:latin typeface="Arial" panose="020B0604020202020204" pitchFamily="34" charset="0"/>
+                <a:cs typeface="Arial" panose="020B0604020202020204" pitchFamily="34" charset="0"/>
+              </a:rPr>
+              <a:t>: </a:t>
+            </a:r>
+            <a:r>
+              <a:rPr lang="en-US" sz="1400" dirty="0" err="1">
+                <a:latin typeface="Arial" panose="020B0604020202020204" pitchFamily="34" charset="0"/>
+                <a:cs typeface="Arial" panose="020B0604020202020204" pitchFamily="34" charset="0"/>
+              </a:rPr>
+              <a:t>los</a:t>
+            </a:r>
+            <a:r>
+              <a:rPr lang="en-US" sz="1400" dirty="0">
+                <a:latin typeface="Arial" panose="020B0604020202020204" pitchFamily="34" charset="0"/>
+                <a:cs typeface="Arial" panose="020B0604020202020204" pitchFamily="34" charset="0"/>
+              </a:rPr>
+              <a:t> </a:t>
+            </a:r>
+            <a:r>
+              <a:rPr lang="en-US" sz="1400" dirty="0" err="1">
+                <a:latin typeface="Arial" panose="020B0604020202020204" pitchFamily="34" charset="0"/>
+                <a:cs typeface="Arial" panose="020B0604020202020204" pitchFamily="34" charset="0"/>
+              </a:rPr>
+              <a:t>modos</a:t>
+            </a:r>
+            <a:r>
+              <a:rPr lang="en-US" sz="1400" dirty="0">
+                <a:latin typeface="Arial" panose="020B0604020202020204" pitchFamily="34" charset="0"/>
+                <a:cs typeface="Arial" panose="020B0604020202020204" pitchFamily="34" charset="0"/>
+              </a:rPr>
+              <a:t> 0 y 2 son </a:t>
+            </a:r>
+            <a:r>
+              <a:rPr lang="en-US" sz="1400" dirty="0" err="1">
+                <a:latin typeface="Arial" panose="020B0604020202020204" pitchFamily="34" charset="0"/>
+                <a:cs typeface="Arial" panose="020B0604020202020204" pitchFamily="34" charset="0"/>
+              </a:rPr>
+              <a:t>modos</a:t>
+            </a:r>
+            <a:r>
+              <a:rPr lang="en-US" sz="1400" dirty="0">
+                <a:latin typeface="Arial" panose="020B0604020202020204" pitchFamily="34" charset="0"/>
+                <a:cs typeface="Arial" panose="020B0604020202020204" pitchFamily="34" charset="0"/>
+              </a:rPr>
+              <a:t> TE y </a:t>
+            </a:r>
+            <a:r>
+              <a:rPr lang="en-US" sz="1400" dirty="0" err="1">
+                <a:latin typeface="Arial" panose="020B0604020202020204" pitchFamily="34" charset="0"/>
+                <a:cs typeface="Arial" panose="020B0604020202020204" pitchFamily="34" charset="0"/>
+              </a:rPr>
+              <a:t>los</a:t>
+            </a:r>
+            <a:r>
+              <a:rPr lang="en-US" sz="1400" dirty="0">
+                <a:latin typeface="Arial" panose="020B0604020202020204" pitchFamily="34" charset="0"/>
+                <a:cs typeface="Arial" panose="020B0604020202020204" pitchFamily="34" charset="0"/>
+              </a:rPr>
+              <a:t> </a:t>
+            </a:r>
+            <a:r>
+              <a:rPr lang="en-US" sz="1400" dirty="0" err="1">
+                <a:latin typeface="Arial" panose="020B0604020202020204" pitchFamily="34" charset="0"/>
+                <a:cs typeface="Arial" panose="020B0604020202020204" pitchFamily="34" charset="0"/>
+              </a:rPr>
+              <a:t>modos</a:t>
+            </a:r>
+            <a:r>
+              <a:rPr lang="en-US" sz="1400" dirty="0">
+                <a:latin typeface="Arial" panose="020B0604020202020204" pitchFamily="34" charset="0"/>
+                <a:cs typeface="Arial" panose="020B0604020202020204" pitchFamily="34" charset="0"/>
+              </a:rPr>
+              <a:t> 1 y 3 son TM.</a:t>
+            </a:r>
+          </a:p>
+          <a:p>
+            <a:pPr algn="just"/>
+            <a:r>
+              <a:rPr lang="en-US" sz="1400" dirty="0">
+                <a:latin typeface="Arial" panose="020B0604020202020204" pitchFamily="34" charset="0"/>
+                <a:cs typeface="Arial" panose="020B0604020202020204" pitchFamily="34" charset="0"/>
+              </a:rPr>
+              <a:t>Se </a:t>
+            </a:r>
+            <a:r>
+              <a:rPr lang="en-US" sz="1400" dirty="0" err="1">
+                <a:latin typeface="Arial" panose="020B0604020202020204" pitchFamily="34" charset="0"/>
+                <a:cs typeface="Arial" panose="020B0604020202020204" pitchFamily="34" charset="0"/>
+              </a:rPr>
+              <a:t>puede</a:t>
+            </a:r>
+            <a:r>
+              <a:rPr lang="en-US" sz="1400" dirty="0">
+                <a:latin typeface="Arial" panose="020B0604020202020204" pitchFamily="34" charset="0"/>
+                <a:cs typeface="Arial" panose="020B0604020202020204" pitchFamily="34" charset="0"/>
+              </a:rPr>
+              <a:t> </a:t>
+            </a:r>
+            <a:r>
+              <a:rPr lang="en-US" sz="1400" dirty="0" err="1">
+                <a:latin typeface="Arial" panose="020B0604020202020204" pitchFamily="34" charset="0"/>
+                <a:cs typeface="Arial" panose="020B0604020202020204" pitchFamily="34" charset="0"/>
+              </a:rPr>
+              <a:t>observar</a:t>
+            </a:r>
+            <a:r>
+              <a:rPr lang="en-US" sz="1400" dirty="0">
+                <a:latin typeface="Arial" panose="020B0604020202020204" pitchFamily="34" charset="0"/>
+                <a:cs typeface="Arial" panose="020B0604020202020204" pitchFamily="34" charset="0"/>
+              </a:rPr>
+              <a:t> </a:t>
+            </a:r>
+            <a:r>
+              <a:rPr lang="en-US" sz="1400" dirty="0" err="1">
+                <a:latin typeface="Arial" panose="020B0604020202020204" pitchFamily="34" charset="0"/>
+                <a:cs typeface="Arial" panose="020B0604020202020204" pitchFamily="34" charset="0"/>
+              </a:rPr>
+              <a:t>en</a:t>
+            </a:r>
+            <a:r>
+              <a:rPr lang="en-US" sz="1400" dirty="0">
+                <a:latin typeface="Arial" panose="020B0604020202020204" pitchFamily="34" charset="0"/>
+                <a:cs typeface="Arial" panose="020B0604020202020204" pitchFamily="34" charset="0"/>
+              </a:rPr>
+              <a:t> </a:t>
+            </a:r>
+            <a:r>
+              <a:rPr lang="en-US" sz="1400" dirty="0" err="1">
+                <a:latin typeface="Arial" panose="020B0604020202020204" pitchFamily="34" charset="0"/>
+                <a:cs typeface="Arial" panose="020B0604020202020204" pitchFamily="34" charset="0"/>
+              </a:rPr>
+              <a:t>los</a:t>
+            </a:r>
+            <a:r>
+              <a:rPr lang="en-US" sz="1400" dirty="0">
+                <a:latin typeface="Arial" panose="020B0604020202020204" pitchFamily="34" charset="0"/>
+                <a:cs typeface="Arial" panose="020B0604020202020204" pitchFamily="34" charset="0"/>
+              </a:rPr>
+              <a:t> plots </a:t>
+            </a:r>
+            <a:r>
+              <a:rPr lang="en-US" sz="1400" dirty="0" err="1">
+                <a:latin typeface="Arial" panose="020B0604020202020204" pitchFamily="34" charset="0"/>
+                <a:cs typeface="Arial" panose="020B0604020202020204" pitchFamily="34" charset="0"/>
+              </a:rPr>
+              <a:t>que</a:t>
+            </a:r>
+            <a:r>
+              <a:rPr lang="en-US" sz="1400" dirty="0">
+                <a:latin typeface="Arial" panose="020B0604020202020204" pitchFamily="34" charset="0"/>
+                <a:cs typeface="Arial" panose="020B0604020202020204" pitchFamily="34" charset="0"/>
+              </a:rPr>
+              <a:t> </a:t>
+            </a:r>
+            <a:r>
+              <a:rPr lang="en-US" sz="1400" dirty="0" err="1">
+                <a:latin typeface="Arial" panose="020B0604020202020204" pitchFamily="34" charset="0"/>
+                <a:cs typeface="Arial" panose="020B0604020202020204" pitchFamily="34" charset="0"/>
+              </a:rPr>
+              <a:t>el</a:t>
+            </a:r>
+            <a:r>
+              <a:rPr lang="en-US" sz="1400" dirty="0">
+                <a:latin typeface="Arial" panose="020B0604020202020204" pitchFamily="34" charset="0"/>
+                <a:cs typeface="Arial" panose="020B0604020202020204" pitchFamily="34" charset="0"/>
+              </a:rPr>
+              <a:t> campo </a:t>
+            </a:r>
+            <a:r>
+              <a:rPr lang="en-US" sz="1400" dirty="0" err="1">
+                <a:latin typeface="Arial" panose="020B0604020202020204" pitchFamily="34" charset="0"/>
+                <a:cs typeface="Arial" panose="020B0604020202020204" pitchFamily="34" charset="0"/>
+              </a:rPr>
+              <a:t>en</a:t>
+            </a:r>
+            <a:r>
+              <a:rPr lang="en-US" sz="1400" dirty="0">
+                <a:latin typeface="Arial" panose="020B0604020202020204" pitchFamily="34" charset="0"/>
+                <a:cs typeface="Arial" panose="020B0604020202020204" pitchFamily="34" charset="0"/>
+              </a:rPr>
+              <a:t> </a:t>
+            </a:r>
+            <a:r>
+              <a:rPr lang="en-US" sz="1400" dirty="0" err="1">
+                <a:latin typeface="Arial" panose="020B0604020202020204" pitchFamily="34" charset="0"/>
+                <a:cs typeface="Arial" panose="020B0604020202020204" pitchFamily="34" charset="0"/>
+              </a:rPr>
+              <a:t>los</a:t>
+            </a:r>
+            <a:r>
+              <a:rPr lang="en-US" sz="1400" dirty="0">
+                <a:latin typeface="Arial" panose="020B0604020202020204" pitchFamily="34" charset="0"/>
+                <a:cs typeface="Arial" panose="020B0604020202020204" pitchFamily="34" charset="0"/>
+              </a:rPr>
+              <a:t> </a:t>
+            </a:r>
+            <a:r>
+              <a:rPr lang="en-US" sz="1400" dirty="0" err="1">
+                <a:latin typeface="Arial" panose="020B0604020202020204" pitchFamily="34" charset="0"/>
+                <a:cs typeface="Arial" panose="020B0604020202020204" pitchFamily="34" charset="0"/>
+              </a:rPr>
+              <a:t>modos</a:t>
+            </a:r>
+            <a:r>
+              <a:rPr lang="en-US" sz="1400" dirty="0">
+                <a:latin typeface="Arial" panose="020B0604020202020204" pitchFamily="34" charset="0"/>
+                <a:cs typeface="Arial" panose="020B0604020202020204" pitchFamily="34" charset="0"/>
+              </a:rPr>
+              <a:t> 0 (TE) y 1 (TM) </a:t>
+            </a:r>
+            <a:r>
+              <a:rPr lang="en-US" sz="1400" dirty="0" err="1">
+                <a:latin typeface="Arial" panose="020B0604020202020204" pitchFamily="34" charset="0"/>
+                <a:cs typeface="Arial" panose="020B0604020202020204" pitchFamily="34" charset="0"/>
+              </a:rPr>
+              <a:t>estan</a:t>
+            </a:r>
+            <a:r>
+              <a:rPr lang="en-US" sz="1400" dirty="0">
+                <a:latin typeface="Arial" panose="020B0604020202020204" pitchFamily="34" charset="0"/>
+                <a:cs typeface="Arial" panose="020B0604020202020204" pitchFamily="34" charset="0"/>
+              </a:rPr>
+              <a:t> </a:t>
+            </a:r>
+            <a:r>
+              <a:rPr lang="en-US" sz="1400" dirty="0" err="1">
+                <a:latin typeface="Arial" panose="020B0604020202020204" pitchFamily="34" charset="0"/>
+                <a:cs typeface="Arial" panose="020B0604020202020204" pitchFamily="34" charset="0"/>
+              </a:rPr>
+              <a:t>confinados</a:t>
+            </a:r>
+            <a:r>
+              <a:rPr lang="en-US" sz="1400" dirty="0">
+                <a:latin typeface="Arial" panose="020B0604020202020204" pitchFamily="34" charset="0"/>
+                <a:cs typeface="Arial" panose="020B0604020202020204" pitchFamily="34" charset="0"/>
+              </a:rPr>
+              <a:t> a </a:t>
+            </a:r>
+            <a:r>
+              <a:rPr lang="en-US" sz="1400" dirty="0" err="1">
+                <a:latin typeface="Arial" panose="020B0604020202020204" pitchFamily="34" charset="0"/>
+                <a:cs typeface="Arial" panose="020B0604020202020204" pitchFamily="34" charset="0"/>
+              </a:rPr>
+              <a:t>difernecia</a:t>
+            </a:r>
+            <a:r>
+              <a:rPr lang="en-US" sz="1400" dirty="0">
+                <a:latin typeface="Arial" panose="020B0604020202020204" pitchFamily="34" charset="0"/>
+                <a:cs typeface="Arial" panose="020B0604020202020204" pitchFamily="34" charset="0"/>
+              </a:rPr>
+              <a:t> de </a:t>
+            </a:r>
+            <a:r>
+              <a:rPr lang="en-US" sz="1400" dirty="0" err="1">
+                <a:latin typeface="Arial" panose="020B0604020202020204" pitchFamily="34" charset="0"/>
+                <a:cs typeface="Arial" panose="020B0604020202020204" pitchFamily="34" charset="0"/>
+              </a:rPr>
+              <a:t>los</a:t>
+            </a:r>
+            <a:r>
+              <a:rPr lang="en-US" sz="1400" dirty="0">
+                <a:latin typeface="Arial" panose="020B0604020202020204" pitchFamily="34" charset="0"/>
+                <a:cs typeface="Arial" panose="020B0604020202020204" pitchFamily="34" charset="0"/>
+              </a:rPr>
+              <a:t> </a:t>
+            </a:r>
+            <a:r>
+              <a:rPr lang="en-US" sz="1400" dirty="0" err="1">
+                <a:latin typeface="Arial" panose="020B0604020202020204" pitchFamily="34" charset="0"/>
+                <a:cs typeface="Arial" panose="020B0604020202020204" pitchFamily="34" charset="0"/>
+              </a:rPr>
+              <a:t>modos</a:t>
+            </a:r>
+            <a:r>
+              <a:rPr lang="en-US" sz="1400" dirty="0">
+                <a:latin typeface="Arial" panose="020B0604020202020204" pitchFamily="34" charset="0"/>
+                <a:cs typeface="Arial" panose="020B0604020202020204" pitchFamily="34" charset="0"/>
+              </a:rPr>
+              <a:t> 2 (TE) y 3 (TM).</a:t>
+            </a:r>
+          </a:p>
+          <a:p>
+            <a:pPr algn="just"/>
+            <a:endParaRPr lang="en-US" sz="1400" dirty="0">
+              <a:solidFill>
+                <a:schemeClr val="tx2"/>
+              </a:solidFill>
               <a:latin typeface="Arial" panose="020B0604020202020204" pitchFamily="34" charset="0"/>
               <a:cs typeface="Arial" panose="020B0604020202020204" pitchFamily="34" charset="0"/>
             </a:endParaRPr>
           </a:p>
           <a:p>
             <a:pPr algn="just"/>
-            <a:endParaRPr lang="en-US" sz="1200" dirty="0">
+            <a:endParaRPr lang="en-US" sz="1400" dirty="0">
               <a:latin typeface="Arial" panose="020B0604020202020204" pitchFamily="34" charset="0"/>
               <a:cs typeface="Arial" panose="020B0604020202020204" pitchFamily="34" charset="0"/>
             </a:endParaRPr>
@@ -6337,7 +6340,15 @@
           <a:p>
             <a:r>
               <a:rPr lang="es-ES" dirty="0"/>
-              <a:t>Comentario resultados obtenidos</a:t>
+              <a:t>Comentario </a:t>
+            </a:r>
+            <a:r>
+              <a:rPr lang="es-ES" dirty="0" err="1"/>
+              <a:t>Outcome</a:t>
+            </a:r>
+            <a:r>
+              <a:rPr lang="es-ES" dirty="0"/>
+              <a:t> #1</a:t>
             </a:r>
           </a:p>
         </p:txBody>
@@ -6586,7 +6597,7 @@
         </p:blipFill>
         <p:spPr>
           <a:xfrm>
-            <a:off x="701979" y="1451633"/>
+            <a:off x="4953000" y="387918"/>
             <a:ext cx="3448050" cy="1736563"/>
           </a:xfrm>
           <a:prstGeom prst="rect">
@@ -6610,8 +6621,8 @@
         </p:nvSpPr>
         <p:spPr>
           <a:xfrm>
-            <a:off x="5257800" y="548287"/>
-            <a:ext cx="6553200" cy="1292662"/>
+            <a:off x="365124" y="2494020"/>
+            <a:ext cx="11293476" cy="1292662"/>
           </a:xfrm>
           <a:prstGeom prst="rect">
             <a:avLst/>
@@ -6986,8 +6997,8 @@
         </p:blipFill>
         <p:spPr>
           <a:xfrm>
-            <a:off x="5790452" y="1147735"/>
-            <a:ext cx="2210548" cy="1292662"/>
+            <a:off x="3200400" y="3045258"/>
+            <a:ext cx="2969652" cy="1736563"/>
           </a:xfrm>
           <a:prstGeom prst="rect">
             <a:avLst/>
@@ -7016,8 +7027,8 @@
         </p:blipFill>
         <p:spPr>
           <a:xfrm>
-            <a:off x="8001000" y="1043326"/>
-            <a:ext cx="2412289" cy="1292662"/>
+            <a:off x="3215951" y="4869334"/>
+            <a:ext cx="3019817" cy="1618215"/>
           </a:xfrm>
           <a:prstGeom prst="rect">
             <a:avLst/>
@@ -7046,8 +7057,8 @@
         </p:blipFill>
         <p:spPr>
           <a:xfrm>
-            <a:off x="5962855" y="2474155"/>
-            <a:ext cx="2073912" cy="1116503"/>
+            <a:off x="9181278" y="3045258"/>
+            <a:ext cx="2969652" cy="1598730"/>
           </a:xfrm>
           <a:prstGeom prst="rect">
             <a:avLst/>
@@ -7076,1224 +7087,20 @@
         </p:blipFill>
         <p:spPr>
           <a:xfrm>
-            <a:off x="8214369" y="2474155"/>
-            <a:ext cx="2234687" cy="1126655"/>
+            <a:off x="9214375" y="4869334"/>
+            <a:ext cx="2856949" cy="1440379"/>
           </a:xfrm>
           <a:prstGeom prst="rect">
             <a:avLst/>
           </a:prstGeom>
         </p:spPr>
       </p:pic>
-    </p:spTree>
-    <p:extLst>
-      <p:ext uri="{BB962C8B-B14F-4D97-AF65-F5344CB8AC3E}">
-        <p14:creationId xmlns:p14="http://schemas.microsoft.com/office/powerpoint/2010/main" val="219364629"/>
-      </p:ext>
-    </p:extLst>
-  </p:cSld>
-  <p:clrMapOvr>
-    <a:masterClrMapping/>
-  </p:clrMapOvr>
-</p:sld>
-</file>
-
-<file path=ppt/slides/slide5.xml><?xml version="1.0" encoding="utf-8"?>
-<p:sld xmlns:a="http://schemas.openxmlformats.org/drawingml/2006/main" xmlns:r="http://schemas.openxmlformats.org/officeDocument/2006/relationships" xmlns:p="http://schemas.openxmlformats.org/presentationml/2006/main">
-  <p:cSld>
-    <p:spTree>
-      <p:nvGrpSpPr>
-        <p:cNvPr id="1" name="">
-          <a:extLst>
-            <a:ext uri="{FF2B5EF4-FFF2-40B4-BE49-F238E27FC236}">
-              <a16:creationId xmlns:a16="http://schemas.microsoft.com/office/drawing/2014/main" id="{371656EC-E197-239C-60DD-C11F7BA4B44A}"/>
-            </a:ext>
-          </a:extLst>
-        </p:cNvPr>
-        <p:cNvGrpSpPr/>
-        <p:nvPr/>
-      </p:nvGrpSpPr>
-      <p:grpSpPr>
-        <a:xfrm>
-          <a:off x="0" y="0"/>
-          <a:ext cx="0" cy="0"/>
-          <a:chOff x="0" y="0"/>
-          <a:chExt cx="0" cy="0"/>
-        </a:xfrm>
-      </p:grpSpPr>
-      <p:sp>
-        <p:nvSpPr>
-          <p:cNvPr id="16" name="object 16">
+      <p:sp>
+        <p:nvSpPr>
+          <p:cNvPr id="6" name="Marcador de texto 2">
             <a:extLst>
               <a:ext uri="{FF2B5EF4-FFF2-40B4-BE49-F238E27FC236}">
-                <a16:creationId xmlns:a16="http://schemas.microsoft.com/office/drawing/2014/main" id="{5431EA70-9578-8BF1-5A05-77CDC26788B4}"/>
-              </a:ext>
-            </a:extLst>
-          </p:cNvPr>
-          <p:cNvSpPr txBox="1">
-            <a:spLocks noGrp="1"/>
-          </p:cNvSpPr>
-          <p:nvPr>
-            <p:ph type="title"/>
-          </p:nvPr>
-        </p:nvSpPr>
-        <p:spPr>
-          <a:xfrm>
-            <a:off x="685800" y="408883"/>
-            <a:ext cx="10994410" cy="705321"/>
-          </a:xfrm>
-          <a:prstGeom prst="rect">
-            <a:avLst/>
-          </a:prstGeom>
-        </p:spPr>
-        <p:txBody>
-          <a:bodyPr vert="horz" wrap="square" lIns="0" tIns="12700" rIns="0" bIns="0" rtlCol="0">
-            <a:spAutoFit/>
-          </a:bodyPr>
-          <a:lstStyle/>
-          <a:p>
-            <a:pPr marL="12700">
-              <a:lnSpc>
-                <a:spcPct val="100000"/>
-              </a:lnSpc>
-              <a:spcBef>
-                <a:spcPts val="100"/>
-              </a:spcBef>
-            </a:pPr>
-            <a:r>
-              <a:rPr lang="en-US" sz="2500" dirty="0"/>
-              <a:t>Learning outcome #2 – Wavelength behavior</a:t>
-            </a:r>
-            <a:br>
-              <a:rPr lang="es-ES" sz="2500" spc="-5" dirty="0">
-                <a:latin typeface="+mj-lt"/>
-                <a:cs typeface="Lucida Sans"/>
-              </a:rPr>
-            </a:br>
-            <a:r>
-              <a:rPr lang="en-US" b="0" dirty="0"/>
-              <a:t>Wavelength 1.5-1.6 µm (step 0.02 µm) – width 1.2 µm</a:t>
-            </a:r>
-            <a:endParaRPr sz="2500" b="0" dirty="0">
-              <a:latin typeface="+mj-lt"/>
-              <a:cs typeface="Lucida Sans"/>
-            </a:endParaRPr>
-          </a:p>
-        </p:txBody>
-      </p:sp>
-      <p:pic>
-        <p:nvPicPr>
-          <p:cNvPr id="83" name="Gráfico 82">
-            <a:extLst>
-              <a:ext uri="{FF2B5EF4-FFF2-40B4-BE49-F238E27FC236}">
-                <a16:creationId xmlns:a16="http://schemas.microsoft.com/office/drawing/2014/main" id="{B6A02C28-9CC3-6E88-B695-04A48E5FDEAC}"/>
-              </a:ext>
-            </a:extLst>
-          </p:cNvPr>
-          <p:cNvPicPr>
-            <a:picLocks noChangeAspect="1"/>
-          </p:cNvPicPr>
-          <p:nvPr/>
-        </p:nvPicPr>
-        <p:blipFill>
-          <a:blip r:embed="rId3">
-            <a:extLst>
-              <a:ext uri="{96DAC541-7B7A-43D3-8B79-37D633B846F1}">
-                <asvg:svgBlip xmlns:asvg="http://schemas.microsoft.com/office/drawing/2016/SVG/main" r:embed="rId4"/>
-              </a:ext>
-            </a:extLst>
-          </a:blip>
-          <a:stretch>
-            <a:fillRect/>
-          </a:stretch>
-        </p:blipFill>
-        <p:spPr>
-          <a:xfrm>
-            <a:off x="5045006" y="6356057"/>
-            <a:ext cx="6409575" cy="363174"/>
-          </a:xfrm>
-          <a:prstGeom prst="rect">
-            <a:avLst/>
-          </a:prstGeom>
-        </p:spPr>
-      </p:pic>
-      <p:sp>
-        <p:nvSpPr>
-          <p:cNvPr id="84" name="Marcador de número de diapositiva 83">
-            <a:extLst>
-              <a:ext uri="{FF2B5EF4-FFF2-40B4-BE49-F238E27FC236}">
-                <a16:creationId xmlns:a16="http://schemas.microsoft.com/office/drawing/2014/main" id="{FB7F118F-AD79-0ED0-CE53-A8EE4409B4F8}"/>
-              </a:ext>
-            </a:extLst>
-          </p:cNvPr>
-          <p:cNvSpPr>
-            <a:spLocks noGrp="1"/>
-          </p:cNvSpPr>
-          <p:nvPr>
-            <p:ph type="sldNum" sz="quarter" idx="7"/>
-          </p:nvPr>
-        </p:nvSpPr>
-        <p:spPr/>
-        <p:txBody>
-          <a:bodyPr/>
-          <a:lstStyle/>
-          <a:p>
-            <a:fld id="{B6F15528-21DE-4FAA-801E-634DDDAF4B2B}" type="slidenum">
-              <a:rPr lang="es-ES" smtClean="0"/>
-              <a:t>5</a:t>
-            </a:fld>
-            <a:endParaRPr lang="es-ES"/>
-          </a:p>
-        </p:txBody>
-      </p:sp>
-      <p:sp>
-        <p:nvSpPr>
-          <p:cNvPr id="3" name="Marcador de pie de página 2">
-            <a:extLst>
-              <a:ext uri="{FF2B5EF4-FFF2-40B4-BE49-F238E27FC236}">
-                <a16:creationId xmlns:a16="http://schemas.microsoft.com/office/drawing/2014/main" id="{10846C9D-3FE3-8524-3349-96E1AD1712B3}"/>
-              </a:ext>
-            </a:extLst>
-          </p:cNvPr>
-          <p:cNvSpPr>
-            <a:spLocks noGrp="1"/>
-          </p:cNvSpPr>
-          <p:nvPr>
-            <p:ph type="ftr" sz="quarter" idx="5"/>
-          </p:nvPr>
-        </p:nvSpPr>
-        <p:spPr/>
-        <p:txBody>
-          <a:bodyPr/>
-          <a:lstStyle/>
-          <a:p>
-            <a:pPr marL="12700">
-              <a:spcBef>
-                <a:spcPts val="15"/>
-              </a:spcBef>
-            </a:pPr>
-            <a:r>
-              <a:rPr lang="es-ES" spc="-5" dirty="0"/>
-              <a:t>LAB 0.1. MODESOLVER</a:t>
-            </a:r>
-          </a:p>
-        </p:txBody>
-      </p:sp>
-      <p:sp>
-        <p:nvSpPr>
-          <p:cNvPr id="2" name="CuadroTexto 1">
-            <a:extLst>
-              <a:ext uri="{FF2B5EF4-FFF2-40B4-BE49-F238E27FC236}">
-                <a16:creationId xmlns:a16="http://schemas.microsoft.com/office/drawing/2014/main" id="{CA5F0FDF-2A95-453B-4ECA-AEB637FF2694}"/>
-              </a:ext>
-            </a:extLst>
-          </p:cNvPr>
-          <p:cNvSpPr txBox="1"/>
-          <p:nvPr/>
-        </p:nvSpPr>
-        <p:spPr>
-          <a:xfrm>
-            <a:off x="609441" y="4860334"/>
-            <a:ext cx="11199971" cy="830997"/>
-          </a:xfrm>
-          <a:prstGeom prst="rect">
-            <a:avLst/>
-          </a:prstGeom>
-          <a:solidFill>
-            <a:schemeClr val="bg1">
-              <a:lumMod val="95000"/>
-            </a:schemeClr>
-          </a:solidFill>
-          <a:ln w="28575">
-            <a:solidFill>
-              <a:srgbClr val="E0700D"/>
-            </a:solidFill>
-          </a:ln>
-        </p:spPr>
-        <p:txBody>
-          <a:bodyPr wrap="square" rtlCol="0">
-            <a:spAutoFit/>
-          </a:bodyPr>
-          <a:lstStyle/>
-          <a:p>
-            <a:pPr algn="just"/>
-            <a:r>
-              <a:rPr lang="en-US" sz="1200" dirty="0">
-                <a:latin typeface="Arial" panose="020B0604020202020204" pitchFamily="34" charset="0"/>
-                <a:cs typeface="Arial" panose="020B0604020202020204" pitchFamily="34" charset="0"/>
-              </a:rPr>
-              <a:t>Comment results (neff changes this way with wavelength, comparison between different waveguide cross-sections …)</a:t>
-            </a:r>
-          </a:p>
-          <a:p>
-            <a:pPr algn="just"/>
-            <a:endParaRPr lang="en-US" sz="1200" dirty="0">
-              <a:latin typeface="Arial" panose="020B0604020202020204" pitchFamily="34" charset="0"/>
-              <a:cs typeface="Arial" panose="020B0604020202020204" pitchFamily="34" charset="0"/>
-            </a:endParaRPr>
-          </a:p>
-          <a:p>
-            <a:pPr algn="just"/>
-            <a:r>
-              <a:rPr lang="en-US" sz="1200" dirty="0">
-                <a:latin typeface="Arial" panose="020B0604020202020204" pitchFamily="34" charset="0"/>
-                <a:cs typeface="Arial" panose="020B0604020202020204" pitchFamily="34" charset="0"/>
-              </a:rPr>
-              <a:t>En la </a:t>
-            </a:r>
-            <a:r>
-              <a:rPr lang="en-US" sz="1200" dirty="0" err="1">
-                <a:latin typeface="Arial" panose="020B0604020202020204" pitchFamily="34" charset="0"/>
-                <a:cs typeface="Arial" panose="020B0604020202020204" pitchFamily="34" charset="0"/>
-              </a:rPr>
-              <a:t>guía</a:t>
-            </a:r>
-            <a:r>
-              <a:rPr lang="en-US" sz="1200" dirty="0">
-                <a:latin typeface="Arial" panose="020B0604020202020204" pitchFamily="34" charset="0"/>
-                <a:cs typeface="Arial" panose="020B0604020202020204" pitchFamily="34" charset="0"/>
-              </a:rPr>
-              <a:t> de </a:t>
-            </a:r>
-            <a:r>
-              <a:rPr lang="en-US" sz="1200" dirty="0" err="1">
-                <a:latin typeface="Arial" panose="020B0604020202020204" pitchFamily="34" charset="0"/>
-                <a:cs typeface="Arial" panose="020B0604020202020204" pitchFamily="34" charset="0"/>
-              </a:rPr>
-              <a:t>onda</a:t>
-            </a:r>
-            <a:r>
-              <a:rPr lang="en-US" sz="1200" dirty="0">
-                <a:latin typeface="Arial" panose="020B0604020202020204" pitchFamily="34" charset="0"/>
-                <a:cs typeface="Arial" panose="020B0604020202020204" pitchFamily="34" charset="0"/>
-              </a:rPr>
-              <a:t> shallow se </a:t>
-            </a:r>
-            <a:r>
-              <a:rPr lang="en-US" sz="1200" dirty="0" err="1">
-                <a:latin typeface="Arial" panose="020B0604020202020204" pitchFamily="34" charset="0"/>
-                <a:cs typeface="Arial" panose="020B0604020202020204" pitchFamily="34" charset="0"/>
-              </a:rPr>
-              <a:t>propagan</a:t>
-            </a:r>
-            <a:r>
-              <a:rPr lang="en-US" sz="1200" dirty="0">
-                <a:latin typeface="Arial" panose="020B0604020202020204" pitchFamily="34" charset="0"/>
-                <a:cs typeface="Arial" panose="020B0604020202020204" pitchFamily="34" charset="0"/>
-              </a:rPr>
-              <a:t> </a:t>
-            </a:r>
-            <a:r>
-              <a:rPr lang="en-US" sz="1200" dirty="0" err="1">
-                <a:latin typeface="Arial" panose="020B0604020202020204" pitchFamily="34" charset="0"/>
-                <a:cs typeface="Arial" panose="020B0604020202020204" pitchFamily="34" charset="0"/>
-              </a:rPr>
-              <a:t>los</a:t>
-            </a:r>
-            <a:r>
-              <a:rPr lang="en-US" sz="1200" dirty="0">
-                <a:latin typeface="Arial" panose="020B0604020202020204" pitchFamily="34" charset="0"/>
-                <a:cs typeface="Arial" panose="020B0604020202020204" pitchFamily="34" charset="0"/>
-              </a:rPr>
-              <a:t> 4 </a:t>
-            </a:r>
-            <a:r>
-              <a:rPr lang="en-US" sz="1200" dirty="0" err="1">
-                <a:latin typeface="Arial" panose="020B0604020202020204" pitchFamily="34" charset="0"/>
-                <a:cs typeface="Arial" panose="020B0604020202020204" pitchFamily="34" charset="0"/>
-              </a:rPr>
-              <a:t>modos</a:t>
-            </a:r>
-            <a:r>
-              <a:rPr lang="en-US" sz="1200" dirty="0">
-                <a:latin typeface="Arial" panose="020B0604020202020204" pitchFamily="34" charset="0"/>
-                <a:cs typeface="Arial" panose="020B0604020202020204" pitchFamily="34" charset="0"/>
-              </a:rPr>
-              <a:t> </a:t>
-            </a:r>
-            <a:r>
-              <a:rPr lang="en-US" sz="1200" dirty="0" err="1">
-                <a:latin typeface="Arial" panose="020B0604020202020204" pitchFamily="34" charset="0"/>
-                <a:cs typeface="Arial" panose="020B0604020202020204" pitchFamily="34" charset="0"/>
-              </a:rPr>
-              <a:t>ya</a:t>
-            </a:r>
-            <a:r>
-              <a:rPr lang="en-US" sz="1200" dirty="0">
-                <a:latin typeface="Arial" panose="020B0604020202020204" pitchFamily="34" charset="0"/>
-                <a:cs typeface="Arial" panose="020B0604020202020204" pitchFamily="34" charset="0"/>
-              </a:rPr>
-              <a:t> </a:t>
-            </a:r>
-            <a:r>
-              <a:rPr lang="en-US" sz="1200" dirty="0" err="1">
-                <a:latin typeface="Arial" panose="020B0604020202020204" pitchFamily="34" charset="0"/>
-                <a:cs typeface="Arial" panose="020B0604020202020204" pitchFamily="34" charset="0"/>
-              </a:rPr>
-              <a:t>que</a:t>
-            </a:r>
-            <a:r>
-              <a:rPr lang="en-US" sz="1200" dirty="0">
-                <a:latin typeface="Arial" panose="020B0604020202020204" pitchFamily="34" charset="0"/>
-                <a:cs typeface="Arial" panose="020B0604020202020204" pitchFamily="34" charset="0"/>
-              </a:rPr>
-              <a:t> </a:t>
-            </a:r>
-            <a:r>
-              <a:rPr lang="en-US" sz="1200" dirty="0" err="1">
-                <a:latin typeface="Arial" panose="020B0604020202020204" pitchFamily="34" charset="0"/>
-                <a:cs typeface="Arial" panose="020B0604020202020204" pitchFamily="34" charset="0"/>
-              </a:rPr>
-              <a:t>su</a:t>
-            </a:r>
-            <a:r>
-              <a:rPr lang="en-US" sz="1200" dirty="0">
-                <a:latin typeface="Arial" panose="020B0604020202020204" pitchFamily="34" charset="0"/>
-                <a:cs typeface="Arial" panose="020B0604020202020204" pitchFamily="34" charset="0"/>
-              </a:rPr>
-              <a:t> </a:t>
-            </a:r>
-            <a:r>
-              <a:rPr lang="en-US" sz="1200" dirty="0" err="1">
-                <a:latin typeface="Arial" panose="020B0604020202020204" pitchFamily="34" charset="0"/>
-                <a:cs typeface="Arial" panose="020B0604020202020204" pitchFamily="34" charset="0"/>
-              </a:rPr>
-              <a:t>indice</a:t>
-            </a:r>
-            <a:r>
-              <a:rPr lang="en-US" sz="1200" dirty="0">
-                <a:latin typeface="Arial" panose="020B0604020202020204" pitchFamily="34" charset="0"/>
-                <a:cs typeface="Arial" panose="020B0604020202020204" pitchFamily="34" charset="0"/>
-              </a:rPr>
-              <a:t> de </a:t>
-            </a:r>
-            <a:r>
-              <a:rPr lang="en-US" sz="1200" dirty="0" err="1">
-                <a:latin typeface="Arial" panose="020B0604020202020204" pitchFamily="34" charset="0"/>
-                <a:cs typeface="Arial" panose="020B0604020202020204" pitchFamily="34" charset="0"/>
-              </a:rPr>
-              <a:t>refracción</a:t>
-            </a:r>
-            <a:r>
-              <a:rPr lang="en-US" sz="1200" dirty="0">
-                <a:latin typeface="Arial" panose="020B0604020202020204" pitchFamily="34" charset="0"/>
-                <a:cs typeface="Arial" panose="020B0604020202020204" pitchFamily="34" charset="0"/>
-              </a:rPr>
-              <a:t> </a:t>
-            </a:r>
-            <a:r>
-              <a:rPr lang="en-US" sz="1200" dirty="0" err="1">
-                <a:latin typeface="Arial" panose="020B0604020202020204" pitchFamily="34" charset="0"/>
-                <a:cs typeface="Arial" panose="020B0604020202020204" pitchFamily="34" charset="0"/>
-              </a:rPr>
-              <a:t>efectivo</a:t>
-            </a:r>
-            <a:r>
-              <a:rPr lang="en-US" sz="1200" dirty="0">
-                <a:latin typeface="Arial" panose="020B0604020202020204" pitchFamily="34" charset="0"/>
-                <a:cs typeface="Arial" panose="020B0604020202020204" pitchFamily="34" charset="0"/>
-              </a:rPr>
-              <a:t> es superior al </a:t>
-            </a:r>
-            <a:r>
-              <a:rPr lang="en-US" sz="1200" dirty="0" err="1">
-                <a:latin typeface="Arial" panose="020B0604020202020204" pitchFamily="34" charset="0"/>
-                <a:cs typeface="Arial" panose="020B0604020202020204" pitchFamily="34" charset="0"/>
-              </a:rPr>
-              <a:t>índice</a:t>
-            </a:r>
-            <a:r>
-              <a:rPr lang="en-US" sz="1200" dirty="0">
-                <a:latin typeface="Arial" panose="020B0604020202020204" pitchFamily="34" charset="0"/>
-                <a:cs typeface="Arial" panose="020B0604020202020204" pitchFamily="34" charset="0"/>
-              </a:rPr>
-              <a:t> del SiO2 , </a:t>
-            </a:r>
-            <a:r>
-              <a:rPr lang="en-US" sz="1200" dirty="0" err="1">
-                <a:latin typeface="Arial" panose="020B0604020202020204" pitchFamily="34" charset="0"/>
-                <a:cs typeface="Arial" panose="020B0604020202020204" pitchFamily="34" charset="0"/>
-              </a:rPr>
-              <a:t>en</a:t>
-            </a:r>
-            <a:r>
-              <a:rPr lang="en-US" sz="1200" dirty="0">
-                <a:latin typeface="Arial" panose="020B0604020202020204" pitchFamily="34" charset="0"/>
-                <a:cs typeface="Arial" panose="020B0604020202020204" pitchFamily="34" charset="0"/>
-              </a:rPr>
-              <a:t> </a:t>
-            </a:r>
-            <a:r>
-              <a:rPr lang="en-US" sz="1200" dirty="0" err="1">
-                <a:latin typeface="Arial" panose="020B0604020202020204" pitchFamily="34" charset="0"/>
-                <a:cs typeface="Arial" panose="020B0604020202020204" pitchFamily="34" charset="0"/>
-              </a:rPr>
-              <a:t>cambio</a:t>
-            </a:r>
-            <a:r>
-              <a:rPr lang="en-US" sz="1200" dirty="0">
-                <a:latin typeface="Arial" panose="020B0604020202020204" pitchFamily="34" charset="0"/>
-                <a:cs typeface="Arial" panose="020B0604020202020204" pitchFamily="34" charset="0"/>
-              </a:rPr>
-              <a:t> con la deep waveguide </a:t>
-            </a:r>
-            <a:r>
-              <a:rPr lang="en-US" sz="1200" dirty="0" err="1">
-                <a:latin typeface="Arial" panose="020B0604020202020204" pitchFamily="34" charset="0"/>
-                <a:cs typeface="Arial" panose="020B0604020202020204" pitchFamily="34" charset="0"/>
-              </a:rPr>
-              <a:t>los</a:t>
-            </a:r>
-            <a:r>
-              <a:rPr lang="en-US" sz="1200" dirty="0">
-                <a:latin typeface="Arial" panose="020B0604020202020204" pitchFamily="34" charset="0"/>
-                <a:cs typeface="Arial" panose="020B0604020202020204" pitchFamily="34" charset="0"/>
-              </a:rPr>
-              <a:t> </a:t>
-            </a:r>
-            <a:r>
-              <a:rPr lang="en-US" sz="1200" dirty="0" err="1">
-                <a:latin typeface="Arial" panose="020B0604020202020204" pitchFamily="34" charset="0"/>
-                <a:cs typeface="Arial" panose="020B0604020202020204" pitchFamily="34" charset="0"/>
-              </a:rPr>
-              <a:t>modos</a:t>
-            </a:r>
-            <a:r>
-              <a:rPr lang="en-US" sz="1200" dirty="0">
-                <a:latin typeface="Arial" panose="020B0604020202020204" pitchFamily="34" charset="0"/>
-                <a:cs typeface="Arial" panose="020B0604020202020204" pitchFamily="34" charset="0"/>
-              </a:rPr>
-              <a:t> 2 y 3 no se </a:t>
-            </a:r>
-            <a:r>
-              <a:rPr lang="en-US" sz="1200" dirty="0" err="1">
-                <a:latin typeface="Arial" panose="020B0604020202020204" pitchFamily="34" charset="0"/>
-                <a:cs typeface="Arial" panose="020B0604020202020204" pitchFamily="34" charset="0"/>
-              </a:rPr>
-              <a:t>propagan</a:t>
-            </a:r>
-            <a:r>
-              <a:rPr lang="en-US" sz="1200" dirty="0">
-                <a:latin typeface="Arial" panose="020B0604020202020204" pitchFamily="34" charset="0"/>
-                <a:cs typeface="Arial" panose="020B0604020202020204" pitchFamily="34" charset="0"/>
-              </a:rPr>
-              <a:t> </a:t>
-            </a:r>
-            <a:r>
-              <a:rPr lang="en-US" sz="1200" dirty="0" err="1">
-                <a:latin typeface="Arial" panose="020B0604020202020204" pitchFamily="34" charset="0"/>
-                <a:cs typeface="Arial" panose="020B0604020202020204" pitchFamily="34" charset="0"/>
-              </a:rPr>
-              <a:t>porque</a:t>
-            </a:r>
-            <a:r>
-              <a:rPr lang="en-US" sz="1200" dirty="0">
-                <a:latin typeface="Arial" panose="020B0604020202020204" pitchFamily="34" charset="0"/>
-                <a:cs typeface="Arial" panose="020B0604020202020204" pitchFamily="34" charset="0"/>
-              </a:rPr>
-              <a:t> </a:t>
-            </a:r>
-            <a:r>
-              <a:rPr lang="en-US" sz="1200" dirty="0" err="1">
-                <a:latin typeface="Arial" panose="020B0604020202020204" pitchFamily="34" charset="0"/>
-                <a:cs typeface="Arial" panose="020B0604020202020204" pitchFamily="34" charset="0"/>
-              </a:rPr>
-              <a:t>su</a:t>
-            </a:r>
-            <a:r>
-              <a:rPr lang="en-US" sz="1200" dirty="0">
-                <a:latin typeface="Arial" panose="020B0604020202020204" pitchFamily="34" charset="0"/>
-                <a:cs typeface="Arial" panose="020B0604020202020204" pitchFamily="34" charset="0"/>
-              </a:rPr>
-              <a:t> </a:t>
-            </a:r>
-            <a:r>
-              <a:rPr lang="en-US" sz="1200" dirty="0" err="1">
-                <a:latin typeface="Arial" panose="020B0604020202020204" pitchFamily="34" charset="0"/>
-                <a:cs typeface="Arial" panose="020B0604020202020204" pitchFamily="34" charset="0"/>
-              </a:rPr>
-              <a:t>indice</a:t>
-            </a:r>
-            <a:r>
-              <a:rPr lang="en-US" sz="1200" dirty="0">
-                <a:latin typeface="Arial" panose="020B0604020202020204" pitchFamily="34" charset="0"/>
-                <a:cs typeface="Arial" panose="020B0604020202020204" pitchFamily="34" charset="0"/>
-              </a:rPr>
-              <a:t> </a:t>
-            </a:r>
-            <a:r>
-              <a:rPr lang="en-US" sz="1200" dirty="0" err="1">
-                <a:latin typeface="Arial" panose="020B0604020202020204" pitchFamily="34" charset="0"/>
-                <a:cs typeface="Arial" panose="020B0604020202020204" pitchFamily="34" charset="0"/>
-              </a:rPr>
-              <a:t>efectivo</a:t>
-            </a:r>
-            <a:r>
-              <a:rPr lang="en-US" sz="1200" dirty="0">
-                <a:latin typeface="Arial" panose="020B0604020202020204" pitchFamily="34" charset="0"/>
-                <a:cs typeface="Arial" panose="020B0604020202020204" pitchFamily="34" charset="0"/>
-              </a:rPr>
-              <a:t> es </a:t>
-            </a:r>
-            <a:r>
-              <a:rPr lang="en-US" sz="1200" dirty="0" err="1">
-                <a:latin typeface="Arial" panose="020B0604020202020204" pitchFamily="34" charset="0"/>
-                <a:cs typeface="Arial" panose="020B0604020202020204" pitchFamily="34" charset="0"/>
-              </a:rPr>
-              <a:t>menor</a:t>
-            </a:r>
-            <a:r>
-              <a:rPr lang="en-US" sz="1200" dirty="0">
-                <a:latin typeface="Arial" panose="020B0604020202020204" pitchFamily="34" charset="0"/>
-                <a:cs typeface="Arial" panose="020B0604020202020204" pitchFamily="34" charset="0"/>
-              </a:rPr>
-              <a:t> </a:t>
-            </a:r>
-            <a:r>
-              <a:rPr lang="en-US" sz="1200" dirty="0" err="1">
-                <a:latin typeface="Arial" panose="020B0604020202020204" pitchFamily="34" charset="0"/>
-                <a:cs typeface="Arial" panose="020B0604020202020204" pitchFamily="34" charset="0"/>
-              </a:rPr>
-              <a:t>que</a:t>
-            </a:r>
-            <a:r>
-              <a:rPr lang="en-US" sz="1200" dirty="0">
-                <a:latin typeface="Arial" panose="020B0604020202020204" pitchFamily="34" charset="0"/>
-                <a:cs typeface="Arial" panose="020B0604020202020204" pitchFamily="34" charset="0"/>
-              </a:rPr>
-              <a:t> </a:t>
-            </a:r>
-            <a:r>
-              <a:rPr lang="en-US" sz="1200" dirty="0" err="1">
-                <a:latin typeface="Arial" panose="020B0604020202020204" pitchFamily="34" charset="0"/>
-                <a:cs typeface="Arial" panose="020B0604020202020204" pitchFamily="34" charset="0"/>
-              </a:rPr>
-              <a:t>el</a:t>
-            </a:r>
-            <a:r>
-              <a:rPr lang="en-US" sz="1200" dirty="0">
-                <a:latin typeface="Arial" panose="020B0604020202020204" pitchFamily="34" charset="0"/>
-                <a:cs typeface="Arial" panose="020B0604020202020204" pitchFamily="34" charset="0"/>
-              </a:rPr>
-              <a:t> </a:t>
-            </a:r>
-            <a:r>
-              <a:rPr lang="en-US" sz="1200" dirty="0" err="1">
-                <a:latin typeface="Arial" panose="020B0604020202020204" pitchFamily="34" charset="0"/>
-                <a:cs typeface="Arial" panose="020B0604020202020204" pitchFamily="34" charset="0"/>
-              </a:rPr>
-              <a:t>indice</a:t>
-            </a:r>
-            <a:r>
-              <a:rPr lang="en-US" sz="1200" dirty="0">
-                <a:latin typeface="Arial" panose="020B0604020202020204" pitchFamily="34" charset="0"/>
-                <a:cs typeface="Arial" panose="020B0604020202020204" pitchFamily="34" charset="0"/>
-              </a:rPr>
-              <a:t> del cladding.</a:t>
-            </a:r>
-          </a:p>
-        </p:txBody>
-      </p:sp>
-      <p:sp>
-        <p:nvSpPr>
-          <p:cNvPr id="5" name="Rectángulo 4">
-            <a:extLst>
-              <a:ext uri="{FF2B5EF4-FFF2-40B4-BE49-F238E27FC236}">
-                <a16:creationId xmlns:a16="http://schemas.microsoft.com/office/drawing/2014/main" id="{88F19863-7091-B8CA-F848-DBEA5CEEA027}"/>
-              </a:ext>
-            </a:extLst>
-          </p:cNvPr>
-          <p:cNvSpPr/>
-          <p:nvPr/>
-        </p:nvSpPr>
-        <p:spPr>
-          <a:xfrm>
-            <a:off x="609441" y="1418373"/>
-            <a:ext cx="5332571" cy="3306028"/>
-          </a:xfrm>
-          <a:prstGeom prst="rect">
-            <a:avLst/>
-          </a:prstGeom>
-          <a:noFill/>
-          <a:ln w="28575">
-            <a:solidFill>
-              <a:srgbClr val="E0700D"/>
-            </a:solidFill>
-          </a:ln>
-        </p:spPr>
-        <p:style>
-          <a:lnRef idx="2">
-            <a:schemeClr val="accent1">
-              <a:shade val="15000"/>
-            </a:schemeClr>
-          </a:lnRef>
-          <a:fillRef idx="1">
-            <a:schemeClr val="accent1"/>
-          </a:fillRef>
-          <a:effectRef idx="0">
-            <a:schemeClr val="accent1"/>
-          </a:effectRef>
-          <a:fontRef idx="minor">
-            <a:schemeClr val="lt1"/>
-          </a:fontRef>
-        </p:style>
-        <p:txBody>
-          <a:bodyPr rtlCol="0" anchor="ctr"/>
-          <a:lstStyle/>
-          <a:p>
-            <a:pPr algn="ctr"/>
-            <a:endParaRPr lang="en-US"/>
-          </a:p>
-        </p:txBody>
-      </p:sp>
-      <p:sp>
-        <p:nvSpPr>
-          <p:cNvPr id="6" name="CuadroTexto 5">
-            <a:extLst>
-              <a:ext uri="{FF2B5EF4-FFF2-40B4-BE49-F238E27FC236}">
-                <a16:creationId xmlns:a16="http://schemas.microsoft.com/office/drawing/2014/main" id="{3C4E7A47-20E2-3C27-D841-5A665642F6E2}"/>
-              </a:ext>
-            </a:extLst>
-          </p:cNvPr>
-          <p:cNvSpPr txBox="1"/>
-          <p:nvPr/>
-        </p:nvSpPr>
-        <p:spPr>
-          <a:xfrm>
-            <a:off x="2285455" y="2671278"/>
-            <a:ext cx="1980542" cy="923330"/>
-          </a:xfrm>
-          <a:prstGeom prst="rect">
-            <a:avLst/>
-          </a:prstGeom>
-          <a:noFill/>
-        </p:spPr>
-        <p:txBody>
-          <a:bodyPr wrap="none" rtlCol="0">
-            <a:spAutoFit/>
-          </a:bodyPr>
-          <a:lstStyle/>
-          <a:p>
-            <a:pPr algn="ctr"/>
-            <a:r>
-              <a:rPr lang="en-US" b="1" dirty="0"/>
-              <a:t>shallow</a:t>
-            </a:r>
-            <a:r>
-              <a:rPr lang="en-US" dirty="0"/>
-              <a:t> waveguide</a:t>
-            </a:r>
-          </a:p>
-          <a:p>
-            <a:pPr algn="ctr"/>
-            <a:endParaRPr lang="en-US" dirty="0"/>
-          </a:p>
-          <a:p>
-            <a:pPr algn="ctr"/>
-            <a:r>
-              <a:rPr lang="en-US" dirty="0"/>
-              <a:t>Paste plot here</a:t>
-            </a:r>
-          </a:p>
-        </p:txBody>
-      </p:sp>
-      <p:sp>
-        <p:nvSpPr>
-          <p:cNvPr id="7" name="Rectángulo 6">
-            <a:extLst>
-              <a:ext uri="{FF2B5EF4-FFF2-40B4-BE49-F238E27FC236}">
-                <a16:creationId xmlns:a16="http://schemas.microsoft.com/office/drawing/2014/main" id="{21F754A5-65BC-14A3-5F55-75716FFA9027}"/>
-              </a:ext>
-            </a:extLst>
-          </p:cNvPr>
-          <p:cNvSpPr/>
-          <p:nvPr/>
-        </p:nvSpPr>
-        <p:spPr>
-          <a:xfrm>
-            <a:off x="6476841" y="1418373"/>
-            <a:ext cx="5332571" cy="3306028"/>
-          </a:xfrm>
-          <a:prstGeom prst="rect">
-            <a:avLst/>
-          </a:prstGeom>
-          <a:noFill/>
-          <a:ln w="28575">
-            <a:solidFill>
-              <a:srgbClr val="E0700D"/>
-            </a:solidFill>
-          </a:ln>
-        </p:spPr>
-        <p:style>
-          <a:lnRef idx="2">
-            <a:schemeClr val="accent1">
-              <a:shade val="15000"/>
-            </a:schemeClr>
-          </a:lnRef>
-          <a:fillRef idx="1">
-            <a:schemeClr val="accent1"/>
-          </a:fillRef>
-          <a:effectRef idx="0">
-            <a:schemeClr val="accent1"/>
-          </a:effectRef>
-          <a:fontRef idx="minor">
-            <a:schemeClr val="lt1"/>
-          </a:fontRef>
-        </p:style>
-        <p:txBody>
-          <a:bodyPr rtlCol="0" anchor="ctr"/>
-          <a:lstStyle/>
-          <a:p>
-            <a:pPr algn="ctr"/>
-            <a:endParaRPr lang="en-US"/>
-          </a:p>
-        </p:txBody>
-      </p:sp>
-      <p:sp>
-        <p:nvSpPr>
-          <p:cNvPr id="8" name="CuadroTexto 7">
-            <a:extLst>
-              <a:ext uri="{FF2B5EF4-FFF2-40B4-BE49-F238E27FC236}">
-                <a16:creationId xmlns:a16="http://schemas.microsoft.com/office/drawing/2014/main" id="{CD9C65D4-5494-F5CE-1094-CB0A32C33876}"/>
-              </a:ext>
-            </a:extLst>
-          </p:cNvPr>
-          <p:cNvSpPr txBox="1"/>
-          <p:nvPr/>
-        </p:nvSpPr>
-        <p:spPr>
-          <a:xfrm>
-            <a:off x="8281672" y="2671278"/>
-            <a:ext cx="1722908" cy="923330"/>
-          </a:xfrm>
-          <a:prstGeom prst="rect">
-            <a:avLst/>
-          </a:prstGeom>
-          <a:noFill/>
-        </p:spPr>
-        <p:txBody>
-          <a:bodyPr wrap="none" rtlCol="0">
-            <a:spAutoFit/>
-          </a:bodyPr>
-          <a:lstStyle/>
-          <a:p>
-            <a:pPr algn="ctr"/>
-            <a:r>
-              <a:rPr lang="en-US" b="1" dirty="0"/>
-              <a:t>deep</a:t>
-            </a:r>
-            <a:r>
-              <a:rPr lang="en-US" dirty="0"/>
-              <a:t> waveguide</a:t>
-            </a:r>
-          </a:p>
-          <a:p>
-            <a:pPr algn="ctr"/>
-            <a:endParaRPr lang="en-US" dirty="0"/>
-          </a:p>
-          <a:p>
-            <a:pPr algn="ctr"/>
-            <a:r>
-              <a:rPr lang="en-US" dirty="0"/>
-              <a:t>Paste plot here</a:t>
-            </a:r>
-          </a:p>
-        </p:txBody>
-      </p:sp>
-      <p:sp>
-        <p:nvSpPr>
-          <p:cNvPr id="9" name="CuadroTexto 8">
-            <a:extLst>
-              <a:ext uri="{FF2B5EF4-FFF2-40B4-BE49-F238E27FC236}">
-                <a16:creationId xmlns:a16="http://schemas.microsoft.com/office/drawing/2014/main" id="{8BD4C233-B5D9-B6AA-93A8-CF2F130CFF9C}"/>
-              </a:ext>
-            </a:extLst>
-          </p:cNvPr>
-          <p:cNvSpPr txBox="1"/>
-          <p:nvPr/>
-        </p:nvSpPr>
-        <p:spPr>
-          <a:xfrm>
-            <a:off x="642989" y="4402885"/>
-            <a:ext cx="2269787" cy="369332"/>
-          </a:xfrm>
-          <a:prstGeom prst="rect">
-            <a:avLst/>
-          </a:prstGeom>
-          <a:noFill/>
-        </p:spPr>
-        <p:txBody>
-          <a:bodyPr wrap="square">
-            <a:spAutoFit/>
-          </a:bodyPr>
-          <a:lstStyle/>
-          <a:p>
-            <a:r>
-              <a:rPr lang="en-US"/>
-              <a:t>slab </a:t>
-            </a:r>
-            <a:r>
-              <a:rPr lang="en-US" dirty="0"/>
-              <a:t>= 150nm</a:t>
-            </a:r>
-            <a:endParaRPr lang="es-ES" dirty="0"/>
-          </a:p>
-        </p:txBody>
-      </p:sp>
-      <p:pic>
-        <p:nvPicPr>
-          <p:cNvPr id="4" name="Imagen 3" descr="Gráfico, Gráfico de líneas&#10;&#10;El contenido generado por IA puede ser incorrecto.">
-            <a:extLst>
-              <a:ext uri="{FF2B5EF4-FFF2-40B4-BE49-F238E27FC236}">
-                <a16:creationId xmlns:a16="http://schemas.microsoft.com/office/drawing/2014/main" id="{63260072-4336-C477-FDF6-3CF8F695AEC8}"/>
-              </a:ext>
-            </a:extLst>
-          </p:cNvPr>
-          <p:cNvPicPr>
-            <a:picLocks noChangeAspect="1"/>
-          </p:cNvPicPr>
-          <p:nvPr/>
-        </p:nvPicPr>
-        <p:blipFill>
-          <a:blip r:embed="rId5"/>
-          <a:stretch>
-            <a:fillRect/>
-          </a:stretch>
-        </p:blipFill>
-        <p:spPr>
-          <a:xfrm>
-            <a:off x="712459" y="1645482"/>
-            <a:ext cx="5126533" cy="2990478"/>
-          </a:xfrm>
-          <a:prstGeom prst="rect">
-            <a:avLst/>
-          </a:prstGeom>
-        </p:spPr>
-      </p:pic>
-      <p:pic>
-        <p:nvPicPr>
-          <p:cNvPr id="10" name="Imagen 9" descr="Gráfico, Gráfico de líneas&#10;&#10;El contenido generado por IA puede ser incorrecto.">
-            <a:extLst>
-              <a:ext uri="{FF2B5EF4-FFF2-40B4-BE49-F238E27FC236}">
-                <a16:creationId xmlns:a16="http://schemas.microsoft.com/office/drawing/2014/main" id="{8D8790E9-D5FA-BF84-1C13-E0C9F45B3C02}"/>
-              </a:ext>
-            </a:extLst>
-          </p:cNvPr>
-          <p:cNvPicPr>
-            <a:picLocks noChangeAspect="1"/>
-          </p:cNvPicPr>
-          <p:nvPr/>
-        </p:nvPicPr>
-        <p:blipFill>
-          <a:blip r:embed="rId6"/>
-          <a:stretch>
-            <a:fillRect/>
-          </a:stretch>
-        </p:blipFill>
-        <p:spPr>
-          <a:xfrm>
-            <a:off x="6467316" y="1571789"/>
-            <a:ext cx="5294562" cy="3088494"/>
-          </a:xfrm>
-          <a:prstGeom prst="rect">
-            <a:avLst/>
-          </a:prstGeom>
-        </p:spPr>
-      </p:pic>
-    </p:spTree>
-    <p:extLst>
-      <p:ext uri="{BB962C8B-B14F-4D97-AF65-F5344CB8AC3E}">
-        <p14:creationId xmlns:p14="http://schemas.microsoft.com/office/powerpoint/2010/main" val="3712356003"/>
-      </p:ext>
-    </p:extLst>
-  </p:cSld>
-  <p:clrMapOvr>
-    <a:masterClrMapping/>
-  </p:clrMapOvr>
-</p:sld>
-</file>
-
-<file path=ppt/slides/slide6.xml><?xml version="1.0" encoding="utf-8"?>
-<p:sld xmlns:a="http://schemas.openxmlformats.org/drawingml/2006/main" xmlns:r="http://schemas.openxmlformats.org/officeDocument/2006/relationships" xmlns:p="http://schemas.openxmlformats.org/presentationml/2006/main">
-  <p:cSld>
-    <p:spTree>
-      <p:nvGrpSpPr>
-        <p:cNvPr id="1" name=""/>
-        <p:cNvGrpSpPr/>
-        <p:nvPr/>
-      </p:nvGrpSpPr>
-      <p:grpSpPr>
-        <a:xfrm>
-          <a:off x="0" y="0"/>
-          <a:ext cx="0" cy="0"/>
-          <a:chOff x="0" y="0"/>
-          <a:chExt cx="0" cy="0"/>
-        </a:xfrm>
-      </p:grpSpPr>
-      <p:sp>
-        <p:nvSpPr>
-          <p:cNvPr id="2" name="Título 1">
-            <a:extLst>
-              <a:ext uri="{FF2B5EF4-FFF2-40B4-BE49-F238E27FC236}">
-                <a16:creationId xmlns:a16="http://schemas.microsoft.com/office/drawing/2014/main" id="{74E64652-1DB7-E694-D36B-985DB6D75567}"/>
-              </a:ext>
-            </a:extLst>
-          </p:cNvPr>
-          <p:cNvSpPr>
-            <a:spLocks noGrp="1"/>
-          </p:cNvSpPr>
-          <p:nvPr>
-            <p:ph type="title"/>
-          </p:nvPr>
-        </p:nvSpPr>
-        <p:spPr/>
-        <p:txBody>
-          <a:bodyPr/>
-          <a:lstStyle/>
-          <a:p>
-            <a:r>
-              <a:rPr lang="es-ES" dirty="0"/>
-              <a:t>Comentarios</a:t>
-            </a:r>
-          </a:p>
-        </p:txBody>
-      </p:sp>
-      <p:sp>
-        <p:nvSpPr>
-          <p:cNvPr id="3" name="Marcador de texto 2">
-            <a:extLst>
-              <a:ext uri="{FF2B5EF4-FFF2-40B4-BE49-F238E27FC236}">
-                <a16:creationId xmlns:a16="http://schemas.microsoft.com/office/drawing/2014/main" id="{CD70538A-68E4-F5CA-1BBB-7CD552AAD551}"/>
-              </a:ext>
-            </a:extLst>
-          </p:cNvPr>
-          <p:cNvSpPr>
-            <a:spLocks noGrp="1"/>
-          </p:cNvSpPr>
-          <p:nvPr>
-            <p:ph type="body" idx="1"/>
-          </p:nvPr>
-        </p:nvSpPr>
-        <p:spPr>
-          <a:xfrm>
-            <a:off x="590550" y="685800"/>
-            <a:ext cx="5200650" cy="430887"/>
-          </a:xfrm>
-        </p:spPr>
-        <p:txBody>
-          <a:bodyPr/>
-          <a:lstStyle/>
-          <a:p>
-            <a:pPr algn="just"/>
-            <a:r>
-              <a:rPr lang="en-US" sz="1400" dirty="0">
-                <a:latin typeface="Arial" panose="020B0604020202020204" pitchFamily="34" charset="0"/>
-                <a:cs typeface="Arial" panose="020B0604020202020204" pitchFamily="34" charset="0"/>
-              </a:rPr>
-              <a:t>Con la </a:t>
-            </a:r>
-            <a:r>
-              <a:rPr lang="en-US" sz="1400" dirty="0" err="1">
-                <a:latin typeface="Arial" panose="020B0604020202020204" pitchFamily="34" charset="0"/>
-                <a:cs typeface="Arial" panose="020B0604020202020204" pitchFamily="34" charset="0"/>
-              </a:rPr>
-              <a:t>guia</a:t>
-            </a:r>
-            <a:r>
-              <a:rPr lang="en-US" sz="1400" dirty="0">
-                <a:latin typeface="Arial" panose="020B0604020202020204" pitchFamily="34" charset="0"/>
-                <a:cs typeface="Arial" panose="020B0604020202020204" pitchFamily="34" charset="0"/>
-              </a:rPr>
-              <a:t> shallow </a:t>
-            </a:r>
-            <a:r>
-              <a:rPr lang="en-US" sz="1400" dirty="0" err="1">
-                <a:latin typeface="Arial" panose="020B0604020202020204" pitchFamily="34" charset="0"/>
-                <a:cs typeface="Arial" panose="020B0604020202020204" pitchFamily="34" charset="0"/>
-              </a:rPr>
-              <a:t>los</a:t>
-            </a:r>
-            <a:r>
-              <a:rPr lang="en-US" sz="1400" dirty="0">
-                <a:latin typeface="Arial" panose="020B0604020202020204" pitchFamily="34" charset="0"/>
-                <a:cs typeface="Arial" panose="020B0604020202020204" pitchFamily="34" charset="0"/>
-              </a:rPr>
-              <a:t> </a:t>
-            </a:r>
-            <a:r>
-              <a:rPr lang="en-US" sz="1400" dirty="0" err="1">
-                <a:latin typeface="Arial" panose="020B0604020202020204" pitchFamily="34" charset="0"/>
-                <a:cs typeface="Arial" panose="020B0604020202020204" pitchFamily="34" charset="0"/>
-              </a:rPr>
-              <a:t>modos</a:t>
-            </a:r>
-            <a:r>
-              <a:rPr lang="en-US" sz="1400" dirty="0">
-                <a:latin typeface="Arial" panose="020B0604020202020204" pitchFamily="34" charset="0"/>
-                <a:cs typeface="Arial" panose="020B0604020202020204" pitchFamily="34" charset="0"/>
-              </a:rPr>
-              <a:t> 0,y 3 son TE y </a:t>
-            </a:r>
-            <a:r>
-              <a:rPr lang="en-US" sz="1400" dirty="0" err="1">
-                <a:latin typeface="Arial" panose="020B0604020202020204" pitchFamily="34" charset="0"/>
-                <a:cs typeface="Arial" panose="020B0604020202020204" pitchFamily="34" charset="0"/>
-              </a:rPr>
-              <a:t>los</a:t>
-            </a:r>
-            <a:r>
-              <a:rPr lang="en-US" sz="1400" dirty="0">
-                <a:latin typeface="Arial" panose="020B0604020202020204" pitchFamily="34" charset="0"/>
-                <a:cs typeface="Arial" panose="020B0604020202020204" pitchFamily="34" charset="0"/>
-              </a:rPr>
-              <a:t> </a:t>
-            </a:r>
-            <a:r>
-              <a:rPr lang="en-US" sz="1400" dirty="0" err="1">
-                <a:latin typeface="Arial" panose="020B0604020202020204" pitchFamily="34" charset="0"/>
-                <a:cs typeface="Arial" panose="020B0604020202020204" pitchFamily="34" charset="0"/>
-              </a:rPr>
-              <a:t>modos</a:t>
-            </a:r>
-            <a:r>
-              <a:rPr lang="en-US" sz="1400" dirty="0">
-                <a:latin typeface="Arial" panose="020B0604020202020204" pitchFamily="34" charset="0"/>
-                <a:cs typeface="Arial" panose="020B0604020202020204" pitchFamily="34" charset="0"/>
-              </a:rPr>
-              <a:t> 1 y 2 son </a:t>
-            </a:r>
-            <a:r>
-              <a:rPr lang="en-US" sz="1400" dirty="0" err="1">
-                <a:latin typeface="Arial" panose="020B0604020202020204" pitchFamily="34" charset="0"/>
-                <a:cs typeface="Arial" panose="020B0604020202020204" pitchFamily="34" charset="0"/>
-              </a:rPr>
-              <a:t>hibridos</a:t>
-            </a:r>
-            <a:r>
-              <a:rPr lang="en-US" sz="1400" dirty="0">
-                <a:latin typeface="Arial" panose="020B0604020202020204" pitchFamily="34" charset="0"/>
-                <a:cs typeface="Arial" panose="020B0604020202020204" pitchFamily="34" charset="0"/>
-              </a:rPr>
-              <a:t>, </a:t>
-            </a:r>
-            <a:r>
-              <a:rPr lang="en-US" sz="1400" dirty="0" err="1">
-                <a:latin typeface="Arial" panose="020B0604020202020204" pitchFamily="34" charset="0"/>
-                <a:cs typeface="Arial" panose="020B0604020202020204" pitchFamily="34" charset="0"/>
-              </a:rPr>
-              <a:t>mayoritariamente</a:t>
-            </a:r>
-            <a:r>
-              <a:rPr lang="en-US" sz="1400" dirty="0">
-                <a:latin typeface="Arial" panose="020B0604020202020204" pitchFamily="34" charset="0"/>
-                <a:cs typeface="Arial" panose="020B0604020202020204" pitchFamily="34" charset="0"/>
-              </a:rPr>
-              <a:t> TE.</a:t>
-            </a:r>
-          </a:p>
-          <a:p>
-            <a:endParaRPr lang="es-ES" sz="1400" dirty="0"/>
-          </a:p>
-        </p:txBody>
-      </p:sp>
-      <p:sp>
-        <p:nvSpPr>
-          <p:cNvPr id="4" name="Marcador de pie de página 3">
-            <a:extLst>
-              <a:ext uri="{FF2B5EF4-FFF2-40B4-BE49-F238E27FC236}">
-                <a16:creationId xmlns:a16="http://schemas.microsoft.com/office/drawing/2014/main" id="{69A70AEF-A0E3-E117-BB88-746F97AD7C23}"/>
-              </a:ext>
-            </a:extLst>
-          </p:cNvPr>
-          <p:cNvSpPr>
-            <a:spLocks noGrp="1"/>
-          </p:cNvSpPr>
-          <p:nvPr>
-            <p:ph type="ftr" sz="quarter" idx="5"/>
-          </p:nvPr>
-        </p:nvSpPr>
-        <p:spPr/>
-        <p:txBody>
-          <a:bodyPr/>
-          <a:lstStyle/>
-          <a:p>
-            <a:pPr marL="12700">
-              <a:spcBef>
-                <a:spcPts val="15"/>
-              </a:spcBef>
-            </a:pPr>
-            <a:r>
-              <a:rPr lang="es-ES" spc="-5"/>
-              <a:t>LAB 0.1. MODESOLVER</a:t>
-            </a:r>
-            <a:endParaRPr lang="es-ES" spc="-5" dirty="0"/>
-          </a:p>
-        </p:txBody>
-      </p:sp>
-      <p:sp>
-        <p:nvSpPr>
-          <p:cNvPr id="5" name="Marcador de número de diapositiva 4">
-            <a:extLst>
-              <a:ext uri="{FF2B5EF4-FFF2-40B4-BE49-F238E27FC236}">
-                <a16:creationId xmlns:a16="http://schemas.microsoft.com/office/drawing/2014/main" id="{B196C78E-166D-AE50-D427-CD26140F5941}"/>
-              </a:ext>
-            </a:extLst>
-          </p:cNvPr>
-          <p:cNvSpPr>
-            <a:spLocks noGrp="1"/>
-          </p:cNvSpPr>
-          <p:nvPr>
-            <p:ph type="sldNum" sz="quarter" idx="7"/>
-          </p:nvPr>
-        </p:nvSpPr>
-        <p:spPr/>
-        <p:txBody>
-          <a:bodyPr/>
-          <a:lstStyle/>
-          <a:p>
-            <a:fld id="{B6F15528-21DE-4FAA-801E-634DDDAF4B2B}" type="slidenum">
-              <a:rPr lang="es-ES" smtClean="0"/>
-              <a:t>6</a:t>
-            </a:fld>
-            <a:endParaRPr lang="es-ES"/>
-          </a:p>
-        </p:txBody>
-      </p:sp>
-      <p:pic>
-        <p:nvPicPr>
-          <p:cNvPr id="7" name="Imagen 6" descr="Texto&#10;&#10;El contenido generado por IA puede ser incorrecto.">
-            <a:extLst>
-              <a:ext uri="{FF2B5EF4-FFF2-40B4-BE49-F238E27FC236}">
-                <a16:creationId xmlns:a16="http://schemas.microsoft.com/office/drawing/2014/main" id="{D5E8ED96-2A1A-07AC-B725-88D2612B8CB6}"/>
-              </a:ext>
-            </a:extLst>
-          </p:cNvPr>
-          <p:cNvPicPr>
-            <a:picLocks noChangeAspect="1"/>
-          </p:cNvPicPr>
-          <p:nvPr/>
-        </p:nvPicPr>
-        <p:blipFill>
-          <a:blip r:embed="rId2"/>
-          <a:stretch>
-            <a:fillRect/>
-          </a:stretch>
-        </p:blipFill>
-        <p:spPr>
-          <a:xfrm>
-            <a:off x="590550" y="1224396"/>
-            <a:ext cx="5104614" cy="2562476"/>
-          </a:xfrm>
-          <a:prstGeom prst="rect">
-            <a:avLst/>
-          </a:prstGeom>
-        </p:spPr>
-      </p:pic>
-      <p:sp>
-        <p:nvSpPr>
-          <p:cNvPr id="8" name="Marcador de texto 2">
-            <a:extLst>
-              <a:ext uri="{FF2B5EF4-FFF2-40B4-BE49-F238E27FC236}">
-                <a16:creationId xmlns:a16="http://schemas.microsoft.com/office/drawing/2014/main" id="{15A913E1-D1BA-3C75-C94A-64EE39100AAA}"/>
+                <a16:creationId xmlns:a16="http://schemas.microsoft.com/office/drawing/2014/main" id="{3308301C-BA76-FDE3-F44A-FD5E5F5C2038}"/>
               </a:ext>
             </a:extLst>
           </p:cNvPr>
@@ -8304,8 +7111,8 @@
         </p:nvSpPr>
         <p:spPr>
           <a:xfrm>
-            <a:off x="6096000" y="685800"/>
-            <a:ext cx="5200650" cy="215444"/>
+            <a:off x="371344" y="3293774"/>
+            <a:ext cx="2743200" cy="1292662"/>
           </a:xfrm>
           <a:prstGeom prst="rect">
             <a:avLst/>
@@ -8383,112 +7190,21 @@
           <a:p>
             <a:pPr algn="just"/>
             <a:r>
-              <a:rPr lang="en-US" sz="1400" dirty="0">
-                <a:latin typeface="Arial" panose="020B0604020202020204" pitchFamily="34" charset="0"/>
-                <a:cs typeface="Arial" panose="020B0604020202020204" pitchFamily="34" charset="0"/>
-              </a:rPr>
-              <a:t>Con la </a:t>
-            </a:r>
-            <a:r>
-              <a:rPr lang="en-US" sz="1400" dirty="0" err="1">
-                <a:latin typeface="Arial" panose="020B0604020202020204" pitchFamily="34" charset="0"/>
-                <a:cs typeface="Arial" panose="020B0604020202020204" pitchFamily="34" charset="0"/>
-              </a:rPr>
-              <a:t>guia</a:t>
-            </a:r>
-            <a:r>
-              <a:rPr lang="en-US" sz="1400" dirty="0">
-                <a:latin typeface="Arial" panose="020B0604020202020204" pitchFamily="34" charset="0"/>
-                <a:cs typeface="Arial" panose="020B0604020202020204" pitchFamily="34" charset="0"/>
-              </a:rPr>
-              <a:t> deep </a:t>
-            </a:r>
-            <a:r>
-              <a:rPr lang="en-US" sz="1400" dirty="0" err="1">
-                <a:latin typeface="Arial" panose="020B0604020202020204" pitchFamily="34" charset="0"/>
-                <a:cs typeface="Arial" panose="020B0604020202020204" pitchFamily="34" charset="0"/>
-              </a:rPr>
-              <a:t>los</a:t>
-            </a:r>
-            <a:r>
-              <a:rPr lang="en-US" sz="1400" dirty="0">
-                <a:latin typeface="Arial" panose="020B0604020202020204" pitchFamily="34" charset="0"/>
-                <a:cs typeface="Arial" panose="020B0604020202020204" pitchFamily="34" charset="0"/>
-              </a:rPr>
-              <a:t> </a:t>
-            </a:r>
-            <a:r>
-              <a:rPr lang="en-US" sz="1400" dirty="0" err="1">
-                <a:latin typeface="Arial" panose="020B0604020202020204" pitchFamily="34" charset="0"/>
-                <a:cs typeface="Arial" panose="020B0604020202020204" pitchFamily="34" charset="0"/>
-              </a:rPr>
-              <a:t>modos</a:t>
-            </a:r>
-            <a:r>
-              <a:rPr lang="en-US" sz="1400" dirty="0">
-                <a:latin typeface="Arial" panose="020B0604020202020204" pitchFamily="34" charset="0"/>
-                <a:cs typeface="Arial" panose="020B0604020202020204" pitchFamily="34" charset="0"/>
-              </a:rPr>
-              <a:t> 0 y 2 son TE y </a:t>
-            </a:r>
-            <a:r>
-              <a:rPr lang="en-US" sz="1400" dirty="0" err="1">
-                <a:latin typeface="Arial" panose="020B0604020202020204" pitchFamily="34" charset="0"/>
-                <a:cs typeface="Arial" panose="020B0604020202020204" pitchFamily="34" charset="0"/>
-              </a:rPr>
-              <a:t>el</a:t>
-            </a:r>
-            <a:r>
-              <a:rPr lang="en-US" sz="1400" dirty="0">
-                <a:latin typeface="Arial" panose="020B0604020202020204" pitchFamily="34" charset="0"/>
-                <a:cs typeface="Arial" panose="020B0604020202020204" pitchFamily="34" charset="0"/>
-              </a:rPr>
-              <a:t> 1 y 3 son TM.</a:t>
-            </a:r>
-            <a:endParaRPr lang="es-ES" sz="1400" kern="0" dirty="0">
-              <a:solidFill>
-                <a:sysClr val="windowText" lastClr="000000"/>
-              </a:solidFill>
-            </a:endParaRPr>
-          </a:p>
-        </p:txBody>
-      </p:sp>
-      <p:pic>
-        <p:nvPicPr>
-          <p:cNvPr id="10" name="Imagen 9" descr="Texto&#10;&#10;El contenido generado por IA puede ser incorrecto.">
+              <a:rPr lang="es-ES" sz="1400" dirty="0">
+                <a:latin typeface="Arial" panose="020B0604020202020204" pitchFamily="34" charset="0"/>
+                <a:cs typeface="Arial" panose="020B0604020202020204" pitchFamily="34" charset="0"/>
+              </a:rPr>
+              <a:t>El modo 0 (TE) esta altamente confinado, presenta un único lóbulo central rojo intenso, indicando la máxima intensidad del campo electromagnético confinado.</a:t>
+            </a:r>
+          </a:p>
+        </p:txBody>
+      </p:sp>
+      <p:sp>
+        <p:nvSpPr>
+          <p:cNvPr id="11" name="Marcador de texto 2">
             <a:extLst>
               <a:ext uri="{FF2B5EF4-FFF2-40B4-BE49-F238E27FC236}">
-                <a16:creationId xmlns:a16="http://schemas.microsoft.com/office/drawing/2014/main" id="{073763D2-9E89-0921-5D36-E754F3F4B585}"/>
-              </a:ext>
-            </a:extLst>
-          </p:cNvPr>
-          <p:cNvPicPr>
-            <a:picLocks noChangeAspect="1"/>
-          </p:cNvPicPr>
-          <p:nvPr/>
-        </p:nvPicPr>
-        <p:blipFill>
-          <a:blip r:embed="rId3"/>
-          <a:stretch>
-            <a:fillRect/>
-          </a:stretch>
-        </p:blipFill>
-        <p:spPr>
-          <a:xfrm>
-            <a:off x="6096000" y="1199514"/>
-            <a:ext cx="4110409" cy="2573601"/>
-          </a:xfrm>
-          <a:prstGeom prst="rect">
-            <a:avLst/>
-          </a:prstGeom>
-        </p:spPr>
-      </p:pic>
-      <p:sp>
-        <p:nvSpPr>
-          <p:cNvPr id="13" name="Marcador de texto 2">
-            <a:extLst>
-              <a:ext uri="{FF2B5EF4-FFF2-40B4-BE49-F238E27FC236}">
-                <a16:creationId xmlns:a16="http://schemas.microsoft.com/office/drawing/2014/main" id="{067A748D-6BA9-60B0-DFF2-EC88EBA606B0}"/>
+                <a16:creationId xmlns:a16="http://schemas.microsoft.com/office/drawing/2014/main" id="{B2C7A0D5-6A7F-6E15-C85C-65B392860C8E}"/>
               </a:ext>
             </a:extLst>
           </p:cNvPr>
@@ -8499,8 +7215,8 @@
         </p:nvSpPr>
         <p:spPr>
           <a:xfrm>
-            <a:off x="609600" y="4114800"/>
-            <a:ext cx="9982200" cy="1508105"/>
+            <a:off x="365124" y="4850673"/>
+            <a:ext cx="2743200" cy="1077218"/>
           </a:xfrm>
           <a:prstGeom prst="rect">
             <a:avLst/>
@@ -8578,10 +7294,2213 @@
           <a:p>
             <a:pPr algn="just"/>
             <a:r>
+              <a:rPr lang="es-ES" sz="1400" dirty="0">
+                <a:latin typeface="Arial" panose="020B0604020202020204" pitchFamily="34" charset="0"/>
+                <a:cs typeface="Arial" panose="020B0604020202020204" pitchFamily="34" charset="0"/>
+              </a:rPr>
+              <a:t>Al igual que el modo 0, el modo 1 (TM) está fuertemente confinado en la estructura geométrica, mostrando un solo lóbulo principal en la distribución del campo.</a:t>
+            </a:r>
+          </a:p>
+        </p:txBody>
+      </p:sp>
+      <p:sp>
+        <p:nvSpPr>
+          <p:cNvPr id="15" name="Marcador de texto 2">
+            <a:extLst>
+              <a:ext uri="{FF2B5EF4-FFF2-40B4-BE49-F238E27FC236}">
+                <a16:creationId xmlns:a16="http://schemas.microsoft.com/office/drawing/2014/main" id="{97306283-14F4-EB15-CFE1-E2585363D3C0}"/>
+              </a:ext>
+            </a:extLst>
+          </p:cNvPr>
+          <p:cNvSpPr txBox="1">
+            <a:spLocks/>
+          </p:cNvSpPr>
+          <p:nvPr/>
+        </p:nvSpPr>
+        <p:spPr>
+          <a:xfrm>
+            <a:off x="6304065" y="3293774"/>
+            <a:ext cx="2969652" cy="1508105"/>
+          </a:xfrm>
+          <a:prstGeom prst="rect">
+            <a:avLst/>
+          </a:prstGeom>
+        </p:spPr>
+        <p:txBody>
+          <a:bodyPr wrap="square" lIns="0" tIns="0" rIns="0" bIns="0">
+            <a:spAutoFit/>
+          </a:bodyPr>
+          <a:lstStyle>
+            <a:lvl1pPr marL="0">
+              <a:defRPr>
+                <a:latin typeface="+mn-lt"/>
+                <a:ea typeface="+mn-ea"/>
+                <a:cs typeface="+mn-cs"/>
+              </a:defRPr>
+            </a:lvl1pPr>
+            <a:lvl2pPr marL="457200">
+              <a:defRPr>
+                <a:latin typeface="+mn-lt"/>
+                <a:ea typeface="+mn-ea"/>
+                <a:cs typeface="+mn-cs"/>
+              </a:defRPr>
+            </a:lvl2pPr>
+            <a:lvl3pPr marL="914400">
+              <a:defRPr>
+                <a:latin typeface="+mn-lt"/>
+                <a:ea typeface="+mn-ea"/>
+                <a:cs typeface="+mn-cs"/>
+              </a:defRPr>
+            </a:lvl3pPr>
+            <a:lvl4pPr marL="1371600">
+              <a:defRPr>
+                <a:latin typeface="+mn-lt"/>
+                <a:ea typeface="+mn-ea"/>
+                <a:cs typeface="+mn-cs"/>
+              </a:defRPr>
+            </a:lvl4pPr>
+            <a:lvl5pPr marL="1828800">
+              <a:defRPr>
+                <a:latin typeface="+mn-lt"/>
+                <a:ea typeface="+mn-ea"/>
+                <a:cs typeface="+mn-cs"/>
+              </a:defRPr>
+            </a:lvl5pPr>
+            <a:lvl6pPr marL="2286000">
+              <a:defRPr>
+                <a:latin typeface="+mn-lt"/>
+                <a:ea typeface="+mn-ea"/>
+                <a:cs typeface="+mn-cs"/>
+              </a:defRPr>
+            </a:lvl6pPr>
+            <a:lvl7pPr marL="2743200">
+              <a:defRPr>
+                <a:latin typeface="+mn-lt"/>
+                <a:ea typeface="+mn-ea"/>
+                <a:cs typeface="+mn-cs"/>
+              </a:defRPr>
+            </a:lvl7pPr>
+            <a:lvl8pPr marL="3200400">
+              <a:defRPr>
+                <a:latin typeface="+mn-lt"/>
+                <a:ea typeface="+mn-ea"/>
+                <a:cs typeface="+mn-cs"/>
+              </a:defRPr>
+            </a:lvl8pPr>
+            <a:lvl9pPr marL="3657600">
+              <a:defRPr>
+                <a:latin typeface="+mn-lt"/>
+                <a:ea typeface="+mn-ea"/>
+                <a:cs typeface="+mn-cs"/>
+              </a:defRPr>
+            </a:lvl9pPr>
+          </a:lstStyle>
+          <a:p>
+            <a:pPr algn="just"/>
+            <a:r>
+              <a:rPr lang="es-ES" sz="1400" dirty="0">
+                <a:latin typeface="Arial" panose="020B0604020202020204" pitchFamily="34" charset="0"/>
+                <a:cs typeface="Arial" panose="020B0604020202020204" pitchFamily="34" charset="0"/>
+              </a:rPr>
+              <a:t>A diferencia del modo 0, este modo presenta dos lóbulos distintos (uno rojo y uno azul, indicando un cambio de fase) distribuidos horizontalmente. El campo electromagnético se extiende mucho más hacia el </a:t>
+            </a:r>
+            <a:r>
+              <a:rPr lang="es-ES" sz="1400" dirty="0" err="1">
+                <a:latin typeface="Arial" panose="020B0604020202020204" pitchFamily="34" charset="0"/>
+                <a:cs typeface="Arial" panose="020B0604020202020204" pitchFamily="34" charset="0"/>
+              </a:rPr>
+              <a:t>cladding</a:t>
+            </a:r>
+            <a:r>
+              <a:rPr lang="es-ES" sz="1400" dirty="0">
+                <a:latin typeface="Arial" panose="020B0604020202020204" pitchFamily="34" charset="0"/>
+                <a:cs typeface="Arial" panose="020B0604020202020204" pitchFamily="34" charset="0"/>
+              </a:rPr>
+              <a:t> </a:t>
+            </a:r>
+          </a:p>
+        </p:txBody>
+      </p:sp>
+      <p:sp>
+        <p:nvSpPr>
+          <p:cNvPr id="17" name="Marcador de texto 2">
+            <a:extLst>
+              <a:ext uri="{FF2B5EF4-FFF2-40B4-BE49-F238E27FC236}">
+                <a16:creationId xmlns:a16="http://schemas.microsoft.com/office/drawing/2014/main" id="{4B6C1E31-23A5-E8EB-F42D-34774684EE5A}"/>
+              </a:ext>
+            </a:extLst>
+          </p:cNvPr>
+          <p:cNvSpPr txBox="1">
+            <a:spLocks/>
+          </p:cNvSpPr>
+          <p:nvPr/>
+        </p:nvSpPr>
+        <p:spPr>
+          <a:xfrm>
+            <a:off x="6343395" y="4986765"/>
+            <a:ext cx="2870980" cy="1077218"/>
+          </a:xfrm>
+          <a:prstGeom prst="rect">
+            <a:avLst/>
+          </a:prstGeom>
+        </p:spPr>
+        <p:txBody>
+          <a:bodyPr wrap="square" lIns="0" tIns="0" rIns="0" bIns="0">
+            <a:spAutoFit/>
+          </a:bodyPr>
+          <a:lstStyle>
+            <a:lvl1pPr marL="0">
+              <a:defRPr>
+                <a:latin typeface="+mn-lt"/>
+                <a:ea typeface="+mn-ea"/>
+                <a:cs typeface="+mn-cs"/>
+              </a:defRPr>
+            </a:lvl1pPr>
+            <a:lvl2pPr marL="457200">
+              <a:defRPr>
+                <a:latin typeface="+mn-lt"/>
+                <a:ea typeface="+mn-ea"/>
+                <a:cs typeface="+mn-cs"/>
+              </a:defRPr>
+            </a:lvl2pPr>
+            <a:lvl3pPr marL="914400">
+              <a:defRPr>
+                <a:latin typeface="+mn-lt"/>
+                <a:ea typeface="+mn-ea"/>
+                <a:cs typeface="+mn-cs"/>
+              </a:defRPr>
+            </a:lvl3pPr>
+            <a:lvl4pPr marL="1371600">
+              <a:defRPr>
+                <a:latin typeface="+mn-lt"/>
+                <a:ea typeface="+mn-ea"/>
+                <a:cs typeface="+mn-cs"/>
+              </a:defRPr>
+            </a:lvl4pPr>
+            <a:lvl5pPr marL="1828800">
+              <a:defRPr>
+                <a:latin typeface="+mn-lt"/>
+                <a:ea typeface="+mn-ea"/>
+                <a:cs typeface="+mn-cs"/>
+              </a:defRPr>
+            </a:lvl5pPr>
+            <a:lvl6pPr marL="2286000">
+              <a:defRPr>
+                <a:latin typeface="+mn-lt"/>
+                <a:ea typeface="+mn-ea"/>
+                <a:cs typeface="+mn-cs"/>
+              </a:defRPr>
+            </a:lvl6pPr>
+            <a:lvl7pPr marL="2743200">
+              <a:defRPr>
+                <a:latin typeface="+mn-lt"/>
+                <a:ea typeface="+mn-ea"/>
+                <a:cs typeface="+mn-cs"/>
+              </a:defRPr>
+            </a:lvl7pPr>
+            <a:lvl8pPr marL="3200400">
+              <a:defRPr>
+                <a:latin typeface="+mn-lt"/>
+                <a:ea typeface="+mn-ea"/>
+                <a:cs typeface="+mn-cs"/>
+              </a:defRPr>
+            </a:lvl8pPr>
+            <a:lvl9pPr marL="3657600">
+              <a:defRPr>
+                <a:latin typeface="+mn-lt"/>
+                <a:ea typeface="+mn-ea"/>
+                <a:cs typeface="+mn-cs"/>
+              </a:defRPr>
+            </a:lvl9pPr>
+          </a:lstStyle>
+          <a:p>
+            <a:pPr algn="just"/>
+            <a:r>
+              <a:rPr lang="es-ES" sz="1400" dirty="0">
+                <a:latin typeface="Arial" panose="020B0604020202020204" pitchFamily="34" charset="0"/>
+                <a:cs typeface="Arial" panose="020B0604020202020204" pitchFamily="34" charset="0"/>
+              </a:rPr>
+              <a:t>Este modo está muy poco confinado en el núcleo, lo que sugiere que es el modo con el menor índice efectivo de los cuatro y el menos confinado</a:t>
+            </a:r>
+          </a:p>
+        </p:txBody>
+      </p:sp>
+    </p:spTree>
+    <p:extLst>
+      <p:ext uri="{BB962C8B-B14F-4D97-AF65-F5344CB8AC3E}">
+        <p14:creationId xmlns:p14="http://schemas.microsoft.com/office/powerpoint/2010/main" val="219364629"/>
+      </p:ext>
+    </p:extLst>
+  </p:cSld>
+  <p:clrMapOvr>
+    <a:masterClrMapping/>
+  </p:clrMapOvr>
+</p:sld>
+</file>
+
+<file path=ppt/slides/slide5.xml><?xml version="1.0" encoding="utf-8"?>
+<p:sld xmlns:a="http://schemas.openxmlformats.org/drawingml/2006/main" xmlns:r="http://schemas.openxmlformats.org/officeDocument/2006/relationships" xmlns:p="http://schemas.openxmlformats.org/presentationml/2006/main">
+  <p:cSld>
+    <p:spTree>
+      <p:nvGrpSpPr>
+        <p:cNvPr id="1" name="">
+          <a:extLst>
+            <a:ext uri="{FF2B5EF4-FFF2-40B4-BE49-F238E27FC236}">
+              <a16:creationId xmlns:a16="http://schemas.microsoft.com/office/drawing/2014/main" id="{371656EC-E197-239C-60DD-C11F7BA4B44A}"/>
+            </a:ext>
+          </a:extLst>
+        </p:cNvPr>
+        <p:cNvGrpSpPr/>
+        <p:nvPr/>
+      </p:nvGrpSpPr>
+      <p:grpSpPr>
+        <a:xfrm>
+          <a:off x="0" y="0"/>
+          <a:ext cx="0" cy="0"/>
+          <a:chOff x="0" y="0"/>
+          <a:chExt cx="0" cy="0"/>
+        </a:xfrm>
+      </p:grpSpPr>
+      <p:sp>
+        <p:nvSpPr>
+          <p:cNvPr id="16" name="object 16">
+            <a:extLst>
+              <a:ext uri="{FF2B5EF4-FFF2-40B4-BE49-F238E27FC236}">
+                <a16:creationId xmlns:a16="http://schemas.microsoft.com/office/drawing/2014/main" id="{5431EA70-9578-8BF1-5A05-77CDC26788B4}"/>
+              </a:ext>
+            </a:extLst>
+          </p:cNvPr>
+          <p:cNvSpPr txBox="1">
+            <a:spLocks noGrp="1"/>
+          </p:cNvSpPr>
+          <p:nvPr>
+            <p:ph type="title"/>
+          </p:nvPr>
+        </p:nvSpPr>
+        <p:spPr>
+          <a:xfrm>
+            <a:off x="685800" y="408883"/>
+            <a:ext cx="10994410" cy="705321"/>
+          </a:xfrm>
+          <a:prstGeom prst="rect">
+            <a:avLst/>
+          </a:prstGeom>
+        </p:spPr>
+        <p:txBody>
+          <a:bodyPr vert="horz" wrap="square" lIns="0" tIns="12700" rIns="0" bIns="0" rtlCol="0">
+            <a:spAutoFit/>
+          </a:bodyPr>
+          <a:lstStyle/>
+          <a:p>
+            <a:pPr marL="12700">
+              <a:lnSpc>
+                <a:spcPct val="100000"/>
+              </a:lnSpc>
+              <a:spcBef>
+                <a:spcPts val="100"/>
+              </a:spcBef>
+            </a:pPr>
+            <a:r>
+              <a:rPr lang="en-US" sz="2500" dirty="0"/>
+              <a:t>Learning outcome #2 – Wavelength behavior</a:t>
+            </a:r>
+            <a:br>
+              <a:rPr lang="es-ES" sz="2500" spc="-5" dirty="0">
+                <a:latin typeface="+mj-lt"/>
+                <a:cs typeface="Lucida Sans"/>
+              </a:rPr>
+            </a:br>
+            <a:r>
+              <a:rPr lang="en-US" b="0" dirty="0"/>
+              <a:t>Wavelength 1.5-1.6 µm (step 0.02 µm) – width 1.2 µm</a:t>
+            </a:r>
+            <a:endParaRPr sz="2500" b="0" dirty="0">
+              <a:latin typeface="+mj-lt"/>
+              <a:cs typeface="Lucida Sans"/>
+            </a:endParaRPr>
+          </a:p>
+        </p:txBody>
+      </p:sp>
+      <p:pic>
+        <p:nvPicPr>
+          <p:cNvPr id="83" name="Gráfico 82">
+            <a:extLst>
+              <a:ext uri="{FF2B5EF4-FFF2-40B4-BE49-F238E27FC236}">
+                <a16:creationId xmlns:a16="http://schemas.microsoft.com/office/drawing/2014/main" id="{B6A02C28-9CC3-6E88-B695-04A48E5FDEAC}"/>
+              </a:ext>
+            </a:extLst>
+          </p:cNvPr>
+          <p:cNvPicPr>
+            <a:picLocks noChangeAspect="1"/>
+          </p:cNvPicPr>
+          <p:nvPr/>
+        </p:nvPicPr>
+        <p:blipFill>
+          <a:blip r:embed="rId3">
+            <a:extLst>
+              <a:ext uri="{96DAC541-7B7A-43D3-8B79-37D633B846F1}">
+                <asvg:svgBlip xmlns:asvg="http://schemas.microsoft.com/office/drawing/2016/SVG/main" r:embed="rId4"/>
+              </a:ext>
+            </a:extLst>
+          </a:blip>
+          <a:stretch>
+            <a:fillRect/>
+          </a:stretch>
+        </p:blipFill>
+        <p:spPr>
+          <a:xfrm>
+            <a:off x="5045006" y="6356057"/>
+            <a:ext cx="6409575" cy="363174"/>
+          </a:xfrm>
+          <a:prstGeom prst="rect">
+            <a:avLst/>
+          </a:prstGeom>
+        </p:spPr>
+      </p:pic>
+      <p:sp>
+        <p:nvSpPr>
+          <p:cNvPr id="84" name="Marcador de número de diapositiva 83">
+            <a:extLst>
+              <a:ext uri="{FF2B5EF4-FFF2-40B4-BE49-F238E27FC236}">
+                <a16:creationId xmlns:a16="http://schemas.microsoft.com/office/drawing/2014/main" id="{FB7F118F-AD79-0ED0-CE53-A8EE4409B4F8}"/>
+              </a:ext>
+            </a:extLst>
+          </p:cNvPr>
+          <p:cNvSpPr>
+            <a:spLocks noGrp="1"/>
+          </p:cNvSpPr>
+          <p:nvPr>
+            <p:ph type="sldNum" sz="quarter" idx="7"/>
+          </p:nvPr>
+        </p:nvSpPr>
+        <p:spPr/>
+        <p:txBody>
+          <a:bodyPr/>
+          <a:lstStyle/>
+          <a:p>
+            <a:fld id="{B6F15528-21DE-4FAA-801E-634DDDAF4B2B}" type="slidenum">
+              <a:rPr lang="es-ES" smtClean="0"/>
+              <a:t>5</a:t>
+            </a:fld>
+            <a:endParaRPr lang="es-ES"/>
+          </a:p>
+        </p:txBody>
+      </p:sp>
+      <p:sp>
+        <p:nvSpPr>
+          <p:cNvPr id="3" name="Marcador de pie de página 2">
+            <a:extLst>
+              <a:ext uri="{FF2B5EF4-FFF2-40B4-BE49-F238E27FC236}">
+                <a16:creationId xmlns:a16="http://schemas.microsoft.com/office/drawing/2014/main" id="{10846C9D-3FE3-8524-3349-96E1AD1712B3}"/>
+              </a:ext>
+            </a:extLst>
+          </p:cNvPr>
+          <p:cNvSpPr>
+            <a:spLocks noGrp="1"/>
+          </p:cNvSpPr>
+          <p:nvPr>
+            <p:ph type="ftr" sz="quarter" idx="5"/>
+          </p:nvPr>
+        </p:nvSpPr>
+        <p:spPr/>
+        <p:txBody>
+          <a:bodyPr/>
+          <a:lstStyle/>
+          <a:p>
+            <a:pPr marL="12700">
+              <a:spcBef>
+                <a:spcPts val="15"/>
+              </a:spcBef>
+            </a:pPr>
+            <a:r>
+              <a:rPr lang="es-ES" spc="-5" dirty="0"/>
+              <a:t>LAB 0.1. MODESOLVER</a:t>
+            </a:r>
+          </a:p>
+        </p:txBody>
+      </p:sp>
+      <p:sp>
+        <p:nvSpPr>
+          <p:cNvPr id="2" name="CuadroTexto 1">
+            <a:extLst>
+              <a:ext uri="{FF2B5EF4-FFF2-40B4-BE49-F238E27FC236}">
+                <a16:creationId xmlns:a16="http://schemas.microsoft.com/office/drawing/2014/main" id="{CA5F0FDF-2A95-453B-4ECA-AEB637FF2694}"/>
+              </a:ext>
+            </a:extLst>
+          </p:cNvPr>
+          <p:cNvSpPr txBox="1"/>
+          <p:nvPr/>
+        </p:nvSpPr>
+        <p:spPr>
+          <a:xfrm>
+            <a:off x="599916" y="4572390"/>
+            <a:ext cx="11199971" cy="1754326"/>
+          </a:xfrm>
+          <a:prstGeom prst="rect">
+            <a:avLst/>
+          </a:prstGeom>
+          <a:solidFill>
+            <a:schemeClr val="bg1">
+              <a:lumMod val="95000"/>
+            </a:schemeClr>
+          </a:solidFill>
+          <a:ln w="28575">
+            <a:solidFill>
+              <a:srgbClr val="E0700D"/>
+            </a:solidFill>
+          </a:ln>
+        </p:spPr>
+        <p:txBody>
+          <a:bodyPr wrap="square" rtlCol="0">
+            <a:spAutoFit/>
+          </a:bodyPr>
+          <a:lstStyle/>
+          <a:p>
+            <a:pPr algn="just"/>
+            <a:r>
+              <a:rPr lang="en-US" sz="1200" dirty="0">
+                <a:latin typeface="Arial" panose="020B0604020202020204" pitchFamily="34" charset="0"/>
+                <a:cs typeface="Arial" panose="020B0604020202020204" pitchFamily="34" charset="0"/>
+              </a:rPr>
+              <a:t>Comment results (neff changes this way with wavelength, comparison between different waveguide cross-sections …)</a:t>
+            </a:r>
+          </a:p>
+          <a:p>
+            <a:pPr algn="just"/>
+            <a:endParaRPr lang="en-US" sz="1200" dirty="0">
+              <a:latin typeface="Arial" panose="020B0604020202020204" pitchFamily="34" charset="0"/>
+              <a:cs typeface="Arial" panose="020B0604020202020204" pitchFamily="34" charset="0"/>
+            </a:endParaRPr>
+          </a:p>
+          <a:p>
+            <a:pPr algn="just"/>
+            <a:r>
+              <a:rPr lang="en-US" sz="1200" dirty="0">
+                <a:latin typeface="Arial" panose="020B0604020202020204" pitchFamily="34" charset="0"/>
+                <a:cs typeface="Arial" panose="020B0604020202020204" pitchFamily="34" charset="0"/>
+              </a:rPr>
+              <a:t>En ambas </a:t>
+            </a:r>
+            <a:r>
+              <a:rPr lang="en-US" sz="1200" dirty="0" err="1">
+                <a:latin typeface="Arial" panose="020B0604020202020204" pitchFamily="34" charset="0"/>
+                <a:cs typeface="Arial" panose="020B0604020202020204" pitchFamily="34" charset="0"/>
+              </a:rPr>
+              <a:t>gráficas</a:t>
+            </a:r>
+            <a:r>
+              <a:rPr lang="en-US" sz="1200" dirty="0">
+                <a:latin typeface="Arial" panose="020B0604020202020204" pitchFamily="34" charset="0"/>
+                <a:cs typeface="Arial" panose="020B0604020202020204" pitchFamily="34" charset="0"/>
+              </a:rPr>
+              <a:t> se </a:t>
+            </a:r>
+            <a:r>
+              <a:rPr lang="en-US" sz="1200" dirty="0" err="1">
+                <a:latin typeface="Arial" panose="020B0604020202020204" pitchFamily="34" charset="0"/>
+                <a:cs typeface="Arial" panose="020B0604020202020204" pitchFamily="34" charset="0"/>
+              </a:rPr>
+              <a:t>puede</a:t>
+            </a:r>
+            <a:r>
+              <a:rPr lang="en-US" sz="1200" dirty="0">
+                <a:latin typeface="Arial" panose="020B0604020202020204" pitchFamily="34" charset="0"/>
+                <a:cs typeface="Arial" panose="020B0604020202020204" pitchFamily="34" charset="0"/>
+              </a:rPr>
+              <a:t> </a:t>
+            </a:r>
+            <a:r>
+              <a:rPr lang="en-US" sz="1200" dirty="0" err="1">
+                <a:latin typeface="Arial" panose="020B0604020202020204" pitchFamily="34" charset="0"/>
+                <a:cs typeface="Arial" panose="020B0604020202020204" pitchFamily="34" charset="0"/>
+              </a:rPr>
+              <a:t>ver</a:t>
+            </a:r>
+            <a:r>
+              <a:rPr lang="en-US" sz="1200" dirty="0">
+                <a:latin typeface="Arial" panose="020B0604020202020204" pitchFamily="34" charset="0"/>
+                <a:cs typeface="Arial" panose="020B0604020202020204" pitchFamily="34" charset="0"/>
+              </a:rPr>
+              <a:t> </a:t>
+            </a:r>
+            <a:r>
+              <a:rPr lang="en-US" sz="1200" dirty="0" err="1">
+                <a:latin typeface="Arial" panose="020B0604020202020204" pitchFamily="34" charset="0"/>
+                <a:cs typeface="Arial" panose="020B0604020202020204" pitchFamily="34" charset="0"/>
+              </a:rPr>
+              <a:t>que</a:t>
+            </a:r>
+            <a:r>
+              <a:rPr lang="en-US" sz="1200" dirty="0">
+                <a:latin typeface="Arial" panose="020B0604020202020204" pitchFamily="34" charset="0"/>
+                <a:cs typeface="Arial" panose="020B0604020202020204" pitchFamily="34" charset="0"/>
+              </a:rPr>
+              <a:t> </a:t>
+            </a:r>
+            <a:r>
+              <a:rPr lang="en-US" sz="1200" dirty="0" err="1">
+                <a:latin typeface="Arial" panose="020B0604020202020204" pitchFamily="34" charset="0"/>
+                <a:cs typeface="Arial" panose="020B0604020202020204" pitchFamily="34" charset="0"/>
+              </a:rPr>
+              <a:t>el</a:t>
+            </a:r>
+            <a:r>
+              <a:rPr lang="en-US" sz="1200" dirty="0">
+                <a:latin typeface="Arial" panose="020B0604020202020204" pitchFamily="34" charset="0"/>
+                <a:cs typeface="Arial" panose="020B0604020202020204" pitchFamily="34" charset="0"/>
+              </a:rPr>
+              <a:t> </a:t>
+            </a:r>
+            <a:r>
+              <a:rPr lang="en-US" sz="1200" dirty="0" err="1">
+                <a:latin typeface="Arial" panose="020B0604020202020204" pitchFamily="34" charset="0"/>
+                <a:cs typeface="Arial" panose="020B0604020202020204" pitchFamily="34" charset="0"/>
+              </a:rPr>
+              <a:t>índice</a:t>
+            </a:r>
+            <a:r>
+              <a:rPr lang="en-US" sz="1200" dirty="0">
+                <a:latin typeface="Arial" panose="020B0604020202020204" pitchFamily="34" charset="0"/>
+                <a:cs typeface="Arial" panose="020B0604020202020204" pitchFamily="34" charset="0"/>
+              </a:rPr>
+              <a:t> </a:t>
+            </a:r>
+            <a:r>
+              <a:rPr lang="en-US" sz="1200" dirty="0" err="1">
+                <a:latin typeface="Arial" panose="020B0604020202020204" pitchFamily="34" charset="0"/>
+                <a:cs typeface="Arial" panose="020B0604020202020204" pitchFamily="34" charset="0"/>
+              </a:rPr>
+              <a:t>efectivo</a:t>
+            </a:r>
+            <a:r>
+              <a:rPr lang="en-US" sz="1200" dirty="0">
+                <a:latin typeface="Arial" panose="020B0604020202020204" pitchFamily="34" charset="0"/>
+                <a:cs typeface="Arial" panose="020B0604020202020204" pitchFamily="34" charset="0"/>
+              </a:rPr>
+              <a:t> </a:t>
+            </a:r>
+            <a:r>
+              <a:rPr lang="en-US" sz="1200" dirty="0" err="1">
+                <a:latin typeface="Arial" panose="020B0604020202020204" pitchFamily="34" charset="0"/>
+                <a:cs typeface="Arial" panose="020B0604020202020204" pitchFamily="34" charset="0"/>
+              </a:rPr>
+              <a:t>disminuye</a:t>
+            </a:r>
+            <a:r>
+              <a:rPr lang="en-US" sz="1200" dirty="0">
+                <a:latin typeface="Arial" panose="020B0604020202020204" pitchFamily="34" charset="0"/>
+                <a:cs typeface="Arial" panose="020B0604020202020204" pitchFamily="34" charset="0"/>
+              </a:rPr>
+              <a:t> </a:t>
+            </a:r>
+            <a:r>
+              <a:rPr lang="en-US" sz="1200" dirty="0" err="1">
+                <a:latin typeface="Arial" panose="020B0604020202020204" pitchFamily="34" charset="0"/>
+                <a:cs typeface="Arial" panose="020B0604020202020204" pitchFamily="34" charset="0"/>
+              </a:rPr>
+              <a:t>cuando</a:t>
+            </a:r>
+            <a:r>
+              <a:rPr lang="en-US" sz="1200" dirty="0">
+                <a:latin typeface="Arial" panose="020B0604020202020204" pitchFamily="34" charset="0"/>
+                <a:cs typeface="Arial" panose="020B0604020202020204" pitchFamily="34" charset="0"/>
+              </a:rPr>
+              <a:t> </a:t>
+            </a:r>
+            <a:r>
+              <a:rPr lang="en-US" sz="1200" dirty="0" err="1">
+                <a:latin typeface="Arial" panose="020B0604020202020204" pitchFamily="34" charset="0"/>
+                <a:cs typeface="Arial" panose="020B0604020202020204" pitchFamily="34" charset="0"/>
+              </a:rPr>
+              <a:t>aumenta</a:t>
+            </a:r>
+            <a:r>
+              <a:rPr lang="en-US" sz="1200" dirty="0">
+                <a:latin typeface="Arial" panose="020B0604020202020204" pitchFamily="34" charset="0"/>
+                <a:cs typeface="Arial" panose="020B0604020202020204" pitchFamily="34" charset="0"/>
+              </a:rPr>
+              <a:t> la </a:t>
+            </a:r>
+            <a:r>
+              <a:rPr lang="en-US" sz="1200" dirty="0" err="1">
+                <a:latin typeface="Arial" panose="020B0604020202020204" pitchFamily="34" charset="0"/>
+                <a:cs typeface="Arial" panose="020B0604020202020204" pitchFamily="34" charset="0"/>
+              </a:rPr>
+              <a:t>longitud</a:t>
+            </a:r>
+            <a:r>
+              <a:rPr lang="en-US" sz="1200" dirty="0">
+                <a:latin typeface="Arial" panose="020B0604020202020204" pitchFamily="34" charset="0"/>
+                <a:cs typeface="Arial" panose="020B0604020202020204" pitchFamily="34" charset="0"/>
+              </a:rPr>
+              <a:t> de </a:t>
+            </a:r>
+            <a:r>
+              <a:rPr lang="en-US" sz="1200" dirty="0" err="1">
+                <a:latin typeface="Arial" panose="020B0604020202020204" pitchFamily="34" charset="0"/>
+                <a:cs typeface="Arial" panose="020B0604020202020204" pitchFamily="34" charset="0"/>
+              </a:rPr>
+              <a:t>onda</a:t>
+            </a:r>
+            <a:r>
+              <a:rPr lang="en-US" sz="1200" dirty="0">
+                <a:latin typeface="Arial" panose="020B0604020202020204" pitchFamily="34" charset="0"/>
+                <a:cs typeface="Arial" panose="020B0604020202020204" pitchFamily="34" charset="0"/>
+              </a:rPr>
+              <a:t> </a:t>
+            </a:r>
+            <a:r>
+              <a:rPr lang="en-US" sz="1200" dirty="0" err="1">
+                <a:latin typeface="Arial" panose="020B0604020202020204" pitchFamily="34" charset="0"/>
+                <a:cs typeface="Arial" panose="020B0604020202020204" pitchFamily="34" charset="0"/>
+              </a:rPr>
+              <a:t>en</a:t>
+            </a:r>
+            <a:r>
+              <a:rPr lang="en-US" sz="1200" dirty="0">
+                <a:latin typeface="Arial" panose="020B0604020202020204" pitchFamily="34" charset="0"/>
+                <a:cs typeface="Arial" panose="020B0604020202020204" pitchFamily="34" charset="0"/>
+              </a:rPr>
+              <a:t> </a:t>
+            </a:r>
+            <a:r>
+              <a:rPr lang="en-US" sz="1200" dirty="0" err="1">
+                <a:latin typeface="Arial" panose="020B0604020202020204" pitchFamily="34" charset="0"/>
+                <a:cs typeface="Arial" panose="020B0604020202020204" pitchFamily="34" charset="0"/>
+              </a:rPr>
+              <a:t>todos</a:t>
+            </a:r>
+            <a:r>
+              <a:rPr lang="en-US" sz="1200" dirty="0">
+                <a:latin typeface="Arial" panose="020B0604020202020204" pitchFamily="34" charset="0"/>
+                <a:cs typeface="Arial" panose="020B0604020202020204" pitchFamily="34" charset="0"/>
+              </a:rPr>
+              <a:t> </a:t>
+            </a:r>
+            <a:r>
+              <a:rPr lang="en-US" sz="1200" dirty="0" err="1">
+                <a:latin typeface="Arial" panose="020B0604020202020204" pitchFamily="34" charset="0"/>
+                <a:cs typeface="Arial" panose="020B0604020202020204" pitchFamily="34" charset="0"/>
+              </a:rPr>
+              <a:t>los</a:t>
+            </a:r>
+            <a:r>
+              <a:rPr lang="en-US" sz="1200" dirty="0">
+                <a:latin typeface="Arial" panose="020B0604020202020204" pitchFamily="34" charset="0"/>
+                <a:cs typeface="Arial" panose="020B0604020202020204" pitchFamily="34" charset="0"/>
+              </a:rPr>
+              <a:t> </a:t>
+            </a:r>
+            <a:r>
+              <a:rPr lang="en-US" sz="1200" dirty="0" err="1">
+                <a:latin typeface="Arial" panose="020B0604020202020204" pitchFamily="34" charset="0"/>
+                <a:cs typeface="Arial" panose="020B0604020202020204" pitchFamily="34" charset="0"/>
+              </a:rPr>
+              <a:t>modos</a:t>
+            </a:r>
+            <a:r>
+              <a:rPr lang="en-US" sz="1200" dirty="0">
+                <a:latin typeface="Arial" panose="020B0604020202020204" pitchFamily="34" charset="0"/>
+                <a:cs typeface="Arial" panose="020B0604020202020204" pitchFamily="34" charset="0"/>
+              </a:rPr>
+              <a:t>. Esto es </a:t>
+            </a:r>
+            <a:r>
+              <a:rPr lang="en-US" sz="1200" dirty="0" err="1">
+                <a:latin typeface="Arial" panose="020B0604020202020204" pitchFamily="34" charset="0"/>
+                <a:cs typeface="Arial" panose="020B0604020202020204" pitchFamily="34" charset="0"/>
+              </a:rPr>
+              <a:t>porque</a:t>
+            </a:r>
+            <a:r>
+              <a:rPr lang="en-US" sz="1200" dirty="0">
+                <a:latin typeface="Arial" panose="020B0604020202020204" pitchFamily="34" charset="0"/>
+                <a:cs typeface="Arial" panose="020B0604020202020204" pitchFamily="34" charset="0"/>
+              </a:rPr>
+              <a:t> a </a:t>
+            </a:r>
+            <a:r>
+              <a:rPr lang="en-US" sz="1200" dirty="0" err="1">
+                <a:latin typeface="Arial" panose="020B0604020202020204" pitchFamily="34" charset="0"/>
+                <a:cs typeface="Arial" panose="020B0604020202020204" pitchFamily="34" charset="0"/>
+              </a:rPr>
+              <a:t>mayores</a:t>
+            </a:r>
+            <a:r>
+              <a:rPr lang="en-US" sz="1200" dirty="0">
+                <a:latin typeface="Arial" panose="020B0604020202020204" pitchFamily="34" charset="0"/>
+                <a:cs typeface="Arial" panose="020B0604020202020204" pitchFamily="34" charset="0"/>
+              </a:rPr>
+              <a:t> longitudes de </a:t>
+            </a:r>
+            <a:r>
+              <a:rPr lang="en-US" sz="1200" dirty="0" err="1">
+                <a:latin typeface="Arial" panose="020B0604020202020204" pitchFamily="34" charset="0"/>
+                <a:cs typeface="Arial" panose="020B0604020202020204" pitchFamily="34" charset="0"/>
+              </a:rPr>
+              <a:t>onda</a:t>
+            </a:r>
+            <a:r>
+              <a:rPr lang="en-US" sz="1200" dirty="0">
+                <a:latin typeface="Arial" panose="020B0604020202020204" pitchFamily="34" charset="0"/>
+                <a:cs typeface="Arial" panose="020B0604020202020204" pitchFamily="34" charset="0"/>
+              </a:rPr>
+              <a:t>, </a:t>
+            </a:r>
+            <a:r>
+              <a:rPr lang="en-US" sz="1200" dirty="0" err="1">
+                <a:latin typeface="Arial" panose="020B0604020202020204" pitchFamily="34" charset="0"/>
+                <a:cs typeface="Arial" panose="020B0604020202020204" pitchFamily="34" charset="0"/>
+              </a:rPr>
+              <a:t>aumenta</a:t>
+            </a:r>
+            <a:r>
+              <a:rPr lang="en-US" sz="1200" dirty="0">
+                <a:latin typeface="Arial" panose="020B0604020202020204" pitchFamily="34" charset="0"/>
+                <a:cs typeface="Arial" panose="020B0604020202020204" pitchFamily="34" charset="0"/>
+              </a:rPr>
+              <a:t> </a:t>
+            </a:r>
+            <a:r>
+              <a:rPr lang="en-US" sz="1200" dirty="0" err="1">
+                <a:latin typeface="Arial" panose="020B0604020202020204" pitchFamily="34" charset="0"/>
+                <a:cs typeface="Arial" panose="020B0604020202020204" pitchFamily="34" charset="0"/>
+              </a:rPr>
+              <a:t>el</a:t>
+            </a:r>
+            <a:r>
+              <a:rPr lang="en-US" sz="1200" dirty="0">
+                <a:latin typeface="Arial" panose="020B0604020202020204" pitchFamily="34" charset="0"/>
+                <a:cs typeface="Arial" panose="020B0604020202020204" pitchFamily="34" charset="0"/>
+              </a:rPr>
+              <a:t> </a:t>
+            </a:r>
+            <a:r>
+              <a:rPr lang="en-US" sz="1200" dirty="0" err="1">
+                <a:latin typeface="Arial" panose="020B0604020202020204" pitchFamily="34" charset="0"/>
+                <a:cs typeface="Arial" panose="020B0604020202020204" pitchFamily="34" charset="0"/>
+              </a:rPr>
+              <a:t>tamaño</a:t>
+            </a:r>
+            <a:r>
+              <a:rPr lang="en-US" sz="1200" dirty="0">
+                <a:latin typeface="Arial" panose="020B0604020202020204" pitchFamily="34" charset="0"/>
+                <a:cs typeface="Arial" panose="020B0604020202020204" pitchFamily="34" charset="0"/>
+              </a:rPr>
+              <a:t> del modo </a:t>
+            </a:r>
+            <a:r>
+              <a:rPr lang="en-US" sz="1200" dirty="0" err="1">
+                <a:latin typeface="Arial" panose="020B0604020202020204" pitchFamily="34" charset="0"/>
+                <a:cs typeface="Arial" panose="020B0604020202020204" pitchFamily="34" charset="0"/>
+              </a:rPr>
+              <a:t>óptico</a:t>
+            </a:r>
+            <a:r>
+              <a:rPr lang="en-US" sz="1200" dirty="0">
+                <a:latin typeface="Arial" panose="020B0604020202020204" pitchFamily="34" charset="0"/>
+                <a:cs typeface="Arial" panose="020B0604020202020204" pitchFamily="34" charset="0"/>
+              </a:rPr>
+              <a:t> y, </a:t>
+            </a:r>
+            <a:r>
+              <a:rPr lang="en-US" sz="1200" dirty="0" err="1">
+                <a:latin typeface="Arial" panose="020B0604020202020204" pitchFamily="34" charset="0"/>
+                <a:cs typeface="Arial" panose="020B0604020202020204" pitchFamily="34" charset="0"/>
+              </a:rPr>
+              <a:t>por</a:t>
+            </a:r>
+            <a:r>
+              <a:rPr lang="en-US" sz="1200" dirty="0">
+                <a:latin typeface="Arial" panose="020B0604020202020204" pitchFamily="34" charset="0"/>
+                <a:cs typeface="Arial" panose="020B0604020202020204" pitchFamily="34" charset="0"/>
+              </a:rPr>
+              <a:t> lo tanto, </a:t>
+            </a:r>
+            <a:r>
+              <a:rPr lang="en-US" sz="1200" dirty="0" err="1">
+                <a:latin typeface="Arial" panose="020B0604020202020204" pitchFamily="34" charset="0"/>
+                <a:cs typeface="Arial" panose="020B0604020202020204" pitchFamily="34" charset="0"/>
+              </a:rPr>
+              <a:t>pierde</a:t>
+            </a:r>
+            <a:r>
+              <a:rPr lang="en-US" sz="1200" dirty="0">
+                <a:latin typeface="Arial" panose="020B0604020202020204" pitchFamily="34" charset="0"/>
+                <a:cs typeface="Arial" panose="020B0604020202020204" pitchFamily="34" charset="0"/>
+              </a:rPr>
+              <a:t> </a:t>
+            </a:r>
+            <a:r>
+              <a:rPr lang="en-US" sz="1200" dirty="0" err="1">
+                <a:latin typeface="Arial" panose="020B0604020202020204" pitchFamily="34" charset="0"/>
+                <a:cs typeface="Arial" panose="020B0604020202020204" pitchFamily="34" charset="0"/>
+              </a:rPr>
+              <a:t>confinamiento</a:t>
+            </a:r>
+            <a:r>
+              <a:rPr lang="en-US" sz="1200" dirty="0">
+                <a:latin typeface="Arial" panose="020B0604020202020204" pitchFamily="34" charset="0"/>
+                <a:cs typeface="Arial" panose="020B0604020202020204" pitchFamily="34" charset="0"/>
+              </a:rPr>
+              <a:t> </a:t>
+            </a:r>
+            <a:r>
+              <a:rPr lang="en-US" sz="1200" dirty="0" err="1">
+                <a:latin typeface="Arial" panose="020B0604020202020204" pitchFamily="34" charset="0"/>
+                <a:cs typeface="Arial" panose="020B0604020202020204" pitchFamily="34" charset="0"/>
+              </a:rPr>
+              <a:t>en</a:t>
+            </a:r>
+            <a:r>
+              <a:rPr lang="en-US" sz="1200" dirty="0">
+                <a:latin typeface="Arial" panose="020B0604020202020204" pitchFamily="34" charset="0"/>
+                <a:cs typeface="Arial" panose="020B0604020202020204" pitchFamily="34" charset="0"/>
+              </a:rPr>
+              <a:t> </a:t>
+            </a:r>
+            <a:r>
+              <a:rPr lang="en-US" sz="1200" dirty="0" err="1">
+                <a:latin typeface="Arial" panose="020B0604020202020204" pitchFamily="34" charset="0"/>
+                <a:cs typeface="Arial" panose="020B0604020202020204" pitchFamily="34" charset="0"/>
+              </a:rPr>
+              <a:t>el</a:t>
+            </a:r>
+            <a:r>
+              <a:rPr lang="en-US" sz="1200" dirty="0">
+                <a:latin typeface="Arial" panose="020B0604020202020204" pitchFamily="34" charset="0"/>
+                <a:cs typeface="Arial" panose="020B0604020202020204" pitchFamily="34" charset="0"/>
+              </a:rPr>
+              <a:t> </a:t>
+            </a:r>
+            <a:r>
+              <a:rPr lang="en-US" sz="1200" dirty="0" err="1">
+                <a:latin typeface="Arial" panose="020B0604020202020204" pitchFamily="34" charset="0"/>
+                <a:cs typeface="Arial" panose="020B0604020202020204" pitchFamily="34" charset="0"/>
+              </a:rPr>
+              <a:t>núcleo</a:t>
+            </a:r>
+            <a:r>
+              <a:rPr lang="en-US" sz="1200" dirty="0">
+                <a:latin typeface="Arial" panose="020B0604020202020204" pitchFamily="34" charset="0"/>
+                <a:cs typeface="Arial" panose="020B0604020202020204" pitchFamily="34" charset="0"/>
+              </a:rPr>
+              <a:t>.</a:t>
+            </a:r>
+          </a:p>
+          <a:p>
+            <a:pPr algn="just"/>
+            <a:endParaRPr lang="en-US" sz="1200" dirty="0">
+              <a:latin typeface="Arial" panose="020B0604020202020204" pitchFamily="34" charset="0"/>
+              <a:cs typeface="Arial" panose="020B0604020202020204" pitchFamily="34" charset="0"/>
+            </a:endParaRPr>
+          </a:p>
+          <a:p>
+            <a:pPr algn="just"/>
+            <a:r>
+              <a:rPr lang="en-US" sz="1200" dirty="0">
+                <a:latin typeface="Arial" panose="020B0604020202020204" pitchFamily="34" charset="0"/>
+                <a:cs typeface="Arial" panose="020B0604020202020204" pitchFamily="34" charset="0"/>
+              </a:rPr>
+              <a:t>En la </a:t>
+            </a:r>
+            <a:r>
+              <a:rPr lang="en-US" sz="1200" dirty="0" err="1">
+                <a:latin typeface="Arial" panose="020B0604020202020204" pitchFamily="34" charset="0"/>
+                <a:cs typeface="Arial" panose="020B0604020202020204" pitchFamily="34" charset="0"/>
+              </a:rPr>
+              <a:t>guía</a:t>
+            </a:r>
+            <a:r>
+              <a:rPr lang="en-US" sz="1200" dirty="0">
+                <a:latin typeface="Arial" panose="020B0604020202020204" pitchFamily="34" charset="0"/>
+                <a:cs typeface="Arial" panose="020B0604020202020204" pitchFamily="34" charset="0"/>
+              </a:rPr>
+              <a:t> de </a:t>
+            </a:r>
+            <a:r>
+              <a:rPr lang="en-US" sz="1200" dirty="0" err="1">
+                <a:latin typeface="Arial" panose="020B0604020202020204" pitchFamily="34" charset="0"/>
+                <a:cs typeface="Arial" panose="020B0604020202020204" pitchFamily="34" charset="0"/>
+              </a:rPr>
+              <a:t>onda</a:t>
+            </a:r>
+            <a:r>
+              <a:rPr lang="en-US" sz="1200" dirty="0">
+                <a:latin typeface="Arial" panose="020B0604020202020204" pitchFamily="34" charset="0"/>
+                <a:cs typeface="Arial" panose="020B0604020202020204" pitchFamily="34" charset="0"/>
+              </a:rPr>
+              <a:t> shallow se </a:t>
+            </a:r>
+            <a:r>
+              <a:rPr lang="en-US" sz="1200" dirty="0" err="1">
+                <a:latin typeface="Arial" panose="020B0604020202020204" pitchFamily="34" charset="0"/>
+                <a:cs typeface="Arial" panose="020B0604020202020204" pitchFamily="34" charset="0"/>
+              </a:rPr>
+              <a:t>propagan</a:t>
+            </a:r>
+            <a:r>
+              <a:rPr lang="en-US" sz="1200" dirty="0">
+                <a:latin typeface="Arial" panose="020B0604020202020204" pitchFamily="34" charset="0"/>
+                <a:cs typeface="Arial" panose="020B0604020202020204" pitchFamily="34" charset="0"/>
+              </a:rPr>
+              <a:t> </a:t>
+            </a:r>
+            <a:r>
+              <a:rPr lang="en-US" sz="1200" dirty="0" err="1">
+                <a:latin typeface="Arial" panose="020B0604020202020204" pitchFamily="34" charset="0"/>
+                <a:cs typeface="Arial" panose="020B0604020202020204" pitchFamily="34" charset="0"/>
+              </a:rPr>
+              <a:t>los</a:t>
+            </a:r>
+            <a:r>
+              <a:rPr lang="en-US" sz="1200" dirty="0">
+                <a:latin typeface="Arial" panose="020B0604020202020204" pitchFamily="34" charset="0"/>
+                <a:cs typeface="Arial" panose="020B0604020202020204" pitchFamily="34" charset="0"/>
+              </a:rPr>
+              <a:t> 4 </a:t>
+            </a:r>
+            <a:r>
+              <a:rPr lang="en-US" sz="1200" dirty="0" err="1">
+                <a:latin typeface="Arial" panose="020B0604020202020204" pitchFamily="34" charset="0"/>
+                <a:cs typeface="Arial" panose="020B0604020202020204" pitchFamily="34" charset="0"/>
+              </a:rPr>
+              <a:t>modos</a:t>
+            </a:r>
+            <a:r>
+              <a:rPr lang="en-US" sz="1200" dirty="0">
+                <a:latin typeface="Arial" panose="020B0604020202020204" pitchFamily="34" charset="0"/>
+                <a:cs typeface="Arial" panose="020B0604020202020204" pitchFamily="34" charset="0"/>
+              </a:rPr>
+              <a:t>. Ya </a:t>
+            </a:r>
+            <a:r>
+              <a:rPr lang="en-US" sz="1200" dirty="0" err="1">
+                <a:latin typeface="Arial" panose="020B0604020202020204" pitchFamily="34" charset="0"/>
+                <a:cs typeface="Arial" panose="020B0604020202020204" pitchFamily="34" charset="0"/>
+              </a:rPr>
+              <a:t>que</a:t>
+            </a:r>
+            <a:r>
+              <a:rPr lang="en-US" sz="1200" dirty="0">
+                <a:latin typeface="Arial" panose="020B0604020202020204" pitchFamily="34" charset="0"/>
+                <a:cs typeface="Arial" panose="020B0604020202020204" pitchFamily="34" charset="0"/>
+              </a:rPr>
+              <a:t> </a:t>
+            </a:r>
+            <a:r>
+              <a:rPr lang="en-US" sz="1200" dirty="0" err="1">
+                <a:latin typeface="Arial" panose="020B0604020202020204" pitchFamily="34" charset="0"/>
+                <a:cs typeface="Arial" panose="020B0604020202020204" pitchFamily="34" charset="0"/>
+              </a:rPr>
+              <a:t>su</a:t>
+            </a:r>
+            <a:r>
+              <a:rPr lang="en-US" sz="1200" dirty="0">
+                <a:latin typeface="Arial" panose="020B0604020202020204" pitchFamily="34" charset="0"/>
+                <a:cs typeface="Arial" panose="020B0604020202020204" pitchFamily="34" charset="0"/>
+              </a:rPr>
+              <a:t> </a:t>
+            </a:r>
+            <a:r>
+              <a:rPr lang="en-US" sz="1200" dirty="0" err="1">
+                <a:latin typeface="Arial" panose="020B0604020202020204" pitchFamily="34" charset="0"/>
+                <a:cs typeface="Arial" panose="020B0604020202020204" pitchFamily="34" charset="0"/>
+              </a:rPr>
+              <a:t>índice</a:t>
+            </a:r>
+            <a:r>
+              <a:rPr lang="en-US" sz="1200" dirty="0">
+                <a:latin typeface="Arial" panose="020B0604020202020204" pitchFamily="34" charset="0"/>
+                <a:cs typeface="Arial" panose="020B0604020202020204" pitchFamily="34" charset="0"/>
+              </a:rPr>
+              <a:t> de </a:t>
+            </a:r>
+            <a:r>
+              <a:rPr lang="en-US" sz="1200" dirty="0" err="1">
+                <a:latin typeface="Arial" panose="020B0604020202020204" pitchFamily="34" charset="0"/>
+                <a:cs typeface="Arial" panose="020B0604020202020204" pitchFamily="34" charset="0"/>
+              </a:rPr>
+              <a:t>refracción</a:t>
+            </a:r>
+            <a:r>
+              <a:rPr lang="en-US" sz="1200" dirty="0">
+                <a:latin typeface="Arial" panose="020B0604020202020204" pitchFamily="34" charset="0"/>
+                <a:cs typeface="Arial" panose="020B0604020202020204" pitchFamily="34" charset="0"/>
+              </a:rPr>
+              <a:t> </a:t>
+            </a:r>
+            <a:r>
+              <a:rPr lang="en-US" sz="1200" dirty="0" err="1">
+                <a:latin typeface="Arial" panose="020B0604020202020204" pitchFamily="34" charset="0"/>
+                <a:cs typeface="Arial" panose="020B0604020202020204" pitchFamily="34" charset="0"/>
+              </a:rPr>
+              <a:t>efectivo</a:t>
+            </a:r>
+            <a:r>
+              <a:rPr lang="en-US" sz="1200" dirty="0">
+                <a:latin typeface="Arial" panose="020B0604020202020204" pitchFamily="34" charset="0"/>
+                <a:cs typeface="Arial" panose="020B0604020202020204" pitchFamily="34" charset="0"/>
+              </a:rPr>
+              <a:t> es superior al </a:t>
+            </a:r>
+            <a:r>
+              <a:rPr lang="en-US" sz="1200" dirty="0" err="1">
+                <a:latin typeface="Arial" panose="020B0604020202020204" pitchFamily="34" charset="0"/>
+                <a:cs typeface="Arial" panose="020B0604020202020204" pitchFamily="34" charset="0"/>
+              </a:rPr>
+              <a:t>índice</a:t>
+            </a:r>
+            <a:r>
+              <a:rPr lang="en-US" sz="1200" dirty="0">
+                <a:latin typeface="Arial" panose="020B0604020202020204" pitchFamily="34" charset="0"/>
+                <a:cs typeface="Arial" panose="020B0604020202020204" pitchFamily="34" charset="0"/>
+              </a:rPr>
+              <a:t> del SiO2. La </a:t>
+            </a:r>
+            <a:r>
+              <a:rPr lang="en-US" sz="1200" dirty="0" err="1">
+                <a:latin typeface="Arial" panose="020B0604020202020204" pitchFamily="34" charset="0"/>
+                <a:cs typeface="Arial" panose="020B0604020202020204" pitchFamily="34" charset="0"/>
+              </a:rPr>
+              <a:t>guía</a:t>
+            </a:r>
+            <a:r>
+              <a:rPr lang="en-US" sz="1200" dirty="0">
+                <a:latin typeface="Arial" panose="020B0604020202020204" pitchFamily="34" charset="0"/>
+                <a:cs typeface="Arial" panose="020B0604020202020204" pitchFamily="34" charset="0"/>
+              </a:rPr>
+              <a:t> </a:t>
+            </a:r>
+            <a:r>
+              <a:rPr lang="en-US" sz="1200" dirty="0" err="1">
+                <a:latin typeface="Arial" panose="020B0604020202020204" pitchFamily="34" charset="0"/>
+                <a:cs typeface="Arial" panose="020B0604020202020204" pitchFamily="34" charset="0"/>
+              </a:rPr>
+              <a:t>tiene</a:t>
+            </a:r>
+            <a:r>
+              <a:rPr lang="en-US" sz="1200" dirty="0">
+                <a:latin typeface="Arial" panose="020B0604020202020204" pitchFamily="34" charset="0"/>
+                <a:cs typeface="Arial" panose="020B0604020202020204" pitchFamily="34" charset="0"/>
+              </a:rPr>
+              <a:t> un </a:t>
+            </a:r>
+            <a:r>
+              <a:rPr lang="en-US" sz="1200" dirty="0" err="1">
+                <a:latin typeface="Arial" panose="020B0604020202020204" pitchFamily="34" charset="0"/>
+                <a:cs typeface="Arial" panose="020B0604020202020204" pitchFamily="34" charset="0"/>
+              </a:rPr>
+              <a:t>espacio</a:t>
+            </a:r>
+            <a:r>
+              <a:rPr lang="en-US" sz="1200" dirty="0">
+                <a:latin typeface="Arial" panose="020B0604020202020204" pitchFamily="34" charset="0"/>
+                <a:cs typeface="Arial" panose="020B0604020202020204" pitchFamily="34" charset="0"/>
+              </a:rPr>
+              <a:t> mayor y se </a:t>
+            </a:r>
+            <a:r>
+              <a:rPr lang="en-US" sz="1200" dirty="0" err="1">
+                <a:latin typeface="Arial" panose="020B0604020202020204" pitchFamily="34" charset="0"/>
+                <a:cs typeface="Arial" panose="020B0604020202020204" pitchFamily="34" charset="0"/>
+              </a:rPr>
+              <a:t>puede</a:t>
+            </a:r>
+            <a:r>
+              <a:rPr lang="en-US" sz="1200" dirty="0">
+                <a:latin typeface="Arial" panose="020B0604020202020204" pitchFamily="34" charset="0"/>
+                <a:cs typeface="Arial" panose="020B0604020202020204" pitchFamily="34" charset="0"/>
+              </a:rPr>
+              <a:t> </a:t>
+            </a:r>
+            <a:r>
+              <a:rPr lang="en-US" sz="1200" dirty="0" err="1">
+                <a:latin typeface="Arial" panose="020B0604020202020204" pitchFamily="34" charset="0"/>
+                <a:cs typeface="Arial" panose="020B0604020202020204" pitchFamily="34" charset="0"/>
+              </a:rPr>
+              <a:t>propagar</a:t>
+            </a:r>
+            <a:r>
+              <a:rPr lang="en-US" sz="1200" dirty="0">
+                <a:latin typeface="Arial" panose="020B0604020202020204" pitchFamily="34" charset="0"/>
+                <a:cs typeface="Arial" panose="020B0604020202020204" pitchFamily="34" charset="0"/>
+              </a:rPr>
+              <a:t> un mayor </a:t>
+            </a:r>
+            <a:r>
+              <a:rPr lang="en-US" sz="1200" dirty="0" err="1">
+                <a:latin typeface="Arial" panose="020B0604020202020204" pitchFamily="34" charset="0"/>
+                <a:cs typeface="Arial" panose="020B0604020202020204" pitchFamily="34" charset="0"/>
+              </a:rPr>
+              <a:t>orden</a:t>
+            </a:r>
+            <a:r>
+              <a:rPr lang="en-US" sz="1200" dirty="0">
+                <a:latin typeface="Arial" panose="020B0604020202020204" pitchFamily="34" charset="0"/>
+                <a:cs typeface="Arial" panose="020B0604020202020204" pitchFamily="34" charset="0"/>
+              </a:rPr>
+              <a:t> de </a:t>
+            </a:r>
+            <a:r>
+              <a:rPr lang="en-US" sz="1200" dirty="0" err="1">
+                <a:latin typeface="Arial" panose="020B0604020202020204" pitchFamily="34" charset="0"/>
+                <a:cs typeface="Arial" panose="020B0604020202020204" pitchFamily="34" charset="0"/>
+              </a:rPr>
+              <a:t>modos</a:t>
+            </a:r>
+            <a:r>
+              <a:rPr lang="en-US" sz="1200" dirty="0">
+                <a:latin typeface="Arial" panose="020B0604020202020204" pitchFamily="34" charset="0"/>
+                <a:cs typeface="Arial" panose="020B0604020202020204" pitchFamily="34" charset="0"/>
+              </a:rPr>
+              <a:t>.</a:t>
+            </a:r>
+          </a:p>
+          <a:p>
+            <a:pPr algn="just"/>
+            <a:endParaRPr lang="en-US" sz="1200" dirty="0">
+              <a:latin typeface="Arial" panose="020B0604020202020204" pitchFamily="34" charset="0"/>
+              <a:cs typeface="Arial" panose="020B0604020202020204" pitchFamily="34" charset="0"/>
+            </a:endParaRPr>
+          </a:p>
+          <a:p>
+            <a:pPr algn="just"/>
+            <a:r>
+              <a:rPr lang="en-US" sz="1200" dirty="0">
+                <a:latin typeface="Arial" panose="020B0604020202020204" pitchFamily="34" charset="0"/>
+                <a:cs typeface="Arial" panose="020B0604020202020204" pitchFamily="34" charset="0"/>
+              </a:rPr>
+              <a:t>En </a:t>
+            </a:r>
+            <a:r>
+              <a:rPr lang="en-US" sz="1200" dirty="0" err="1">
+                <a:latin typeface="Arial" panose="020B0604020202020204" pitchFamily="34" charset="0"/>
+                <a:cs typeface="Arial" panose="020B0604020202020204" pitchFamily="34" charset="0"/>
+              </a:rPr>
+              <a:t>cambio</a:t>
+            </a:r>
+            <a:r>
+              <a:rPr lang="en-US" sz="1200" dirty="0">
+                <a:latin typeface="Arial" panose="020B0604020202020204" pitchFamily="34" charset="0"/>
+                <a:cs typeface="Arial" panose="020B0604020202020204" pitchFamily="34" charset="0"/>
+              </a:rPr>
+              <a:t>, con la deep waveguide </a:t>
+            </a:r>
+            <a:r>
+              <a:rPr lang="en-US" sz="1200" dirty="0" err="1">
+                <a:latin typeface="Arial" panose="020B0604020202020204" pitchFamily="34" charset="0"/>
+                <a:cs typeface="Arial" panose="020B0604020202020204" pitchFamily="34" charset="0"/>
+              </a:rPr>
+              <a:t>los</a:t>
+            </a:r>
+            <a:r>
+              <a:rPr lang="en-US" sz="1200" dirty="0">
+                <a:latin typeface="Arial" panose="020B0604020202020204" pitchFamily="34" charset="0"/>
+                <a:cs typeface="Arial" panose="020B0604020202020204" pitchFamily="34" charset="0"/>
+              </a:rPr>
+              <a:t> </a:t>
+            </a:r>
+            <a:r>
+              <a:rPr lang="en-US" sz="1200" dirty="0" err="1">
+                <a:latin typeface="Arial" panose="020B0604020202020204" pitchFamily="34" charset="0"/>
+                <a:cs typeface="Arial" panose="020B0604020202020204" pitchFamily="34" charset="0"/>
+              </a:rPr>
+              <a:t>modos</a:t>
+            </a:r>
+            <a:r>
+              <a:rPr lang="en-US" sz="1200" dirty="0">
+                <a:latin typeface="Arial" panose="020B0604020202020204" pitchFamily="34" charset="0"/>
+                <a:cs typeface="Arial" panose="020B0604020202020204" pitchFamily="34" charset="0"/>
+              </a:rPr>
+              <a:t> 2 y 3 no se </a:t>
+            </a:r>
+            <a:r>
+              <a:rPr lang="en-US" sz="1200" dirty="0" err="1">
+                <a:latin typeface="Arial" panose="020B0604020202020204" pitchFamily="34" charset="0"/>
+                <a:cs typeface="Arial" panose="020B0604020202020204" pitchFamily="34" charset="0"/>
+              </a:rPr>
+              <a:t>propagan</a:t>
+            </a:r>
+            <a:r>
+              <a:rPr lang="en-US" sz="1200" dirty="0">
+                <a:latin typeface="Arial" panose="020B0604020202020204" pitchFamily="34" charset="0"/>
+                <a:cs typeface="Arial" panose="020B0604020202020204" pitchFamily="34" charset="0"/>
+              </a:rPr>
+              <a:t> </a:t>
+            </a:r>
+            <a:r>
+              <a:rPr lang="en-US" sz="1200" dirty="0" err="1">
+                <a:latin typeface="Arial" panose="020B0604020202020204" pitchFamily="34" charset="0"/>
+                <a:cs typeface="Arial" panose="020B0604020202020204" pitchFamily="34" charset="0"/>
+              </a:rPr>
+              <a:t>porque</a:t>
+            </a:r>
+            <a:r>
+              <a:rPr lang="en-US" sz="1200" dirty="0">
+                <a:latin typeface="Arial" panose="020B0604020202020204" pitchFamily="34" charset="0"/>
+                <a:cs typeface="Arial" panose="020B0604020202020204" pitchFamily="34" charset="0"/>
+              </a:rPr>
+              <a:t> </a:t>
+            </a:r>
+            <a:r>
+              <a:rPr lang="en-US" sz="1200" dirty="0" err="1">
+                <a:latin typeface="Arial" panose="020B0604020202020204" pitchFamily="34" charset="0"/>
+                <a:cs typeface="Arial" panose="020B0604020202020204" pitchFamily="34" charset="0"/>
+              </a:rPr>
+              <a:t>su</a:t>
+            </a:r>
+            <a:r>
+              <a:rPr lang="en-US" sz="1200" dirty="0">
+                <a:latin typeface="Arial" panose="020B0604020202020204" pitchFamily="34" charset="0"/>
+                <a:cs typeface="Arial" panose="020B0604020202020204" pitchFamily="34" charset="0"/>
+              </a:rPr>
+              <a:t> </a:t>
+            </a:r>
+            <a:r>
+              <a:rPr lang="en-US" sz="1200" dirty="0" err="1">
+                <a:latin typeface="Arial" panose="020B0604020202020204" pitchFamily="34" charset="0"/>
+                <a:cs typeface="Arial" panose="020B0604020202020204" pitchFamily="34" charset="0"/>
+              </a:rPr>
+              <a:t>índice</a:t>
+            </a:r>
+            <a:r>
+              <a:rPr lang="en-US" sz="1200" dirty="0">
+                <a:latin typeface="Arial" panose="020B0604020202020204" pitchFamily="34" charset="0"/>
+                <a:cs typeface="Arial" panose="020B0604020202020204" pitchFamily="34" charset="0"/>
+              </a:rPr>
+              <a:t> </a:t>
+            </a:r>
+            <a:r>
+              <a:rPr lang="en-US" sz="1200" dirty="0" err="1">
+                <a:latin typeface="Arial" panose="020B0604020202020204" pitchFamily="34" charset="0"/>
+                <a:cs typeface="Arial" panose="020B0604020202020204" pitchFamily="34" charset="0"/>
+              </a:rPr>
+              <a:t>efectivo</a:t>
+            </a:r>
+            <a:r>
+              <a:rPr lang="en-US" sz="1200" dirty="0">
+                <a:latin typeface="Arial" panose="020B0604020202020204" pitchFamily="34" charset="0"/>
+                <a:cs typeface="Arial" panose="020B0604020202020204" pitchFamily="34" charset="0"/>
+              </a:rPr>
+              <a:t> es </a:t>
+            </a:r>
+            <a:r>
+              <a:rPr lang="en-US" sz="1200" dirty="0" err="1">
+                <a:latin typeface="Arial" panose="020B0604020202020204" pitchFamily="34" charset="0"/>
+                <a:cs typeface="Arial" panose="020B0604020202020204" pitchFamily="34" charset="0"/>
+              </a:rPr>
+              <a:t>menor</a:t>
+            </a:r>
+            <a:r>
+              <a:rPr lang="en-US" sz="1200" dirty="0">
+                <a:latin typeface="Arial" panose="020B0604020202020204" pitchFamily="34" charset="0"/>
+                <a:cs typeface="Arial" panose="020B0604020202020204" pitchFamily="34" charset="0"/>
+              </a:rPr>
+              <a:t> </a:t>
+            </a:r>
+            <a:r>
+              <a:rPr lang="en-US" sz="1200" dirty="0" err="1">
+                <a:latin typeface="Arial" panose="020B0604020202020204" pitchFamily="34" charset="0"/>
+                <a:cs typeface="Arial" panose="020B0604020202020204" pitchFamily="34" charset="0"/>
+              </a:rPr>
+              <a:t>que</a:t>
+            </a:r>
+            <a:r>
+              <a:rPr lang="en-US" sz="1200" dirty="0">
+                <a:latin typeface="Arial" panose="020B0604020202020204" pitchFamily="34" charset="0"/>
+                <a:cs typeface="Arial" panose="020B0604020202020204" pitchFamily="34" charset="0"/>
+              </a:rPr>
+              <a:t> </a:t>
+            </a:r>
+            <a:r>
+              <a:rPr lang="en-US" sz="1200" dirty="0" err="1">
+                <a:latin typeface="Arial" panose="020B0604020202020204" pitchFamily="34" charset="0"/>
+                <a:cs typeface="Arial" panose="020B0604020202020204" pitchFamily="34" charset="0"/>
+              </a:rPr>
+              <a:t>el</a:t>
+            </a:r>
+            <a:r>
+              <a:rPr lang="en-US" sz="1200" dirty="0">
+                <a:latin typeface="Arial" panose="020B0604020202020204" pitchFamily="34" charset="0"/>
+                <a:cs typeface="Arial" panose="020B0604020202020204" pitchFamily="34" charset="0"/>
+              </a:rPr>
+              <a:t> </a:t>
+            </a:r>
+            <a:r>
+              <a:rPr lang="en-US" sz="1200" dirty="0" err="1">
+                <a:latin typeface="Arial" panose="020B0604020202020204" pitchFamily="34" charset="0"/>
+                <a:cs typeface="Arial" panose="020B0604020202020204" pitchFamily="34" charset="0"/>
+              </a:rPr>
+              <a:t>índice</a:t>
+            </a:r>
+            <a:r>
+              <a:rPr lang="en-US" sz="1200" dirty="0">
+                <a:latin typeface="Arial" panose="020B0604020202020204" pitchFamily="34" charset="0"/>
+                <a:cs typeface="Arial" panose="020B0604020202020204" pitchFamily="34" charset="0"/>
+              </a:rPr>
+              <a:t> del cladding.</a:t>
+            </a:r>
+          </a:p>
+        </p:txBody>
+      </p:sp>
+      <p:sp>
+        <p:nvSpPr>
+          <p:cNvPr id="5" name="Rectángulo 4">
+            <a:extLst>
+              <a:ext uri="{FF2B5EF4-FFF2-40B4-BE49-F238E27FC236}">
+                <a16:creationId xmlns:a16="http://schemas.microsoft.com/office/drawing/2014/main" id="{88F19863-7091-B8CA-F848-DBEA5CEEA027}"/>
+              </a:ext>
+            </a:extLst>
+          </p:cNvPr>
+          <p:cNvSpPr/>
+          <p:nvPr/>
+        </p:nvSpPr>
+        <p:spPr>
+          <a:xfrm>
+            <a:off x="609439" y="1202321"/>
+            <a:ext cx="5332571" cy="3306028"/>
+          </a:xfrm>
+          <a:prstGeom prst="rect">
+            <a:avLst/>
+          </a:prstGeom>
+          <a:noFill/>
+          <a:ln w="28575">
+            <a:solidFill>
+              <a:srgbClr val="E0700D"/>
+            </a:solidFill>
+          </a:ln>
+        </p:spPr>
+        <p:style>
+          <a:lnRef idx="2">
+            <a:schemeClr val="accent1">
+              <a:shade val="15000"/>
+            </a:schemeClr>
+          </a:lnRef>
+          <a:fillRef idx="1">
+            <a:schemeClr val="accent1"/>
+          </a:fillRef>
+          <a:effectRef idx="0">
+            <a:schemeClr val="accent1"/>
+          </a:effectRef>
+          <a:fontRef idx="minor">
+            <a:schemeClr val="lt1"/>
+          </a:fontRef>
+        </p:style>
+        <p:txBody>
+          <a:bodyPr rtlCol="0" anchor="ctr"/>
+          <a:lstStyle/>
+          <a:p>
+            <a:pPr algn="ctr"/>
+            <a:endParaRPr lang="en-US"/>
+          </a:p>
+        </p:txBody>
+      </p:sp>
+      <p:sp>
+        <p:nvSpPr>
+          <p:cNvPr id="6" name="CuadroTexto 5">
+            <a:extLst>
+              <a:ext uri="{FF2B5EF4-FFF2-40B4-BE49-F238E27FC236}">
+                <a16:creationId xmlns:a16="http://schemas.microsoft.com/office/drawing/2014/main" id="{3C4E7A47-20E2-3C27-D841-5A665642F6E2}"/>
+              </a:ext>
+            </a:extLst>
+          </p:cNvPr>
+          <p:cNvSpPr txBox="1"/>
+          <p:nvPr/>
+        </p:nvSpPr>
+        <p:spPr>
+          <a:xfrm>
+            <a:off x="2285455" y="2671278"/>
+            <a:ext cx="1980542" cy="923330"/>
+          </a:xfrm>
+          <a:prstGeom prst="rect">
+            <a:avLst/>
+          </a:prstGeom>
+          <a:noFill/>
+        </p:spPr>
+        <p:txBody>
+          <a:bodyPr wrap="none" rtlCol="0">
+            <a:spAutoFit/>
+          </a:bodyPr>
+          <a:lstStyle/>
+          <a:p>
+            <a:pPr algn="ctr"/>
+            <a:r>
+              <a:rPr lang="en-US" b="1" dirty="0"/>
+              <a:t>shallow</a:t>
+            </a:r>
+            <a:r>
+              <a:rPr lang="en-US" dirty="0"/>
+              <a:t> waveguide</a:t>
+            </a:r>
+          </a:p>
+          <a:p>
+            <a:pPr algn="ctr"/>
+            <a:endParaRPr lang="en-US" dirty="0"/>
+          </a:p>
+          <a:p>
+            <a:pPr algn="ctr"/>
+            <a:r>
+              <a:rPr lang="en-US" dirty="0"/>
+              <a:t>Paste plot here</a:t>
+            </a:r>
+          </a:p>
+        </p:txBody>
+      </p:sp>
+      <p:sp>
+        <p:nvSpPr>
+          <p:cNvPr id="7" name="Rectángulo 6">
+            <a:extLst>
+              <a:ext uri="{FF2B5EF4-FFF2-40B4-BE49-F238E27FC236}">
+                <a16:creationId xmlns:a16="http://schemas.microsoft.com/office/drawing/2014/main" id="{21F754A5-65BC-14A3-5F55-75716FFA9027}"/>
+              </a:ext>
+            </a:extLst>
+          </p:cNvPr>
+          <p:cNvSpPr/>
+          <p:nvPr/>
+        </p:nvSpPr>
+        <p:spPr>
+          <a:xfrm>
+            <a:off x="6467316" y="1195084"/>
+            <a:ext cx="5332571" cy="3306028"/>
+          </a:xfrm>
+          <a:prstGeom prst="rect">
+            <a:avLst/>
+          </a:prstGeom>
+          <a:noFill/>
+          <a:ln w="28575">
+            <a:solidFill>
+              <a:srgbClr val="E0700D"/>
+            </a:solidFill>
+          </a:ln>
+        </p:spPr>
+        <p:style>
+          <a:lnRef idx="2">
+            <a:schemeClr val="accent1">
+              <a:shade val="15000"/>
+            </a:schemeClr>
+          </a:lnRef>
+          <a:fillRef idx="1">
+            <a:schemeClr val="accent1"/>
+          </a:fillRef>
+          <a:effectRef idx="0">
+            <a:schemeClr val="accent1"/>
+          </a:effectRef>
+          <a:fontRef idx="minor">
+            <a:schemeClr val="lt1"/>
+          </a:fontRef>
+        </p:style>
+        <p:txBody>
+          <a:bodyPr rtlCol="0" anchor="ctr"/>
+          <a:lstStyle/>
+          <a:p>
+            <a:pPr algn="ctr"/>
+            <a:endParaRPr lang="en-US"/>
+          </a:p>
+        </p:txBody>
+      </p:sp>
+      <p:sp>
+        <p:nvSpPr>
+          <p:cNvPr id="8" name="CuadroTexto 7">
+            <a:extLst>
+              <a:ext uri="{FF2B5EF4-FFF2-40B4-BE49-F238E27FC236}">
+                <a16:creationId xmlns:a16="http://schemas.microsoft.com/office/drawing/2014/main" id="{CD9C65D4-5494-F5CE-1094-CB0A32C33876}"/>
+              </a:ext>
+            </a:extLst>
+          </p:cNvPr>
+          <p:cNvSpPr txBox="1"/>
+          <p:nvPr/>
+        </p:nvSpPr>
+        <p:spPr>
+          <a:xfrm>
+            <a:off x="8281672" y="2671278"/>
+            <a:ext cx="1722908" cy="923330"/>
+          </a:xfrm>
+          <a:prstGeom prst="rect">
+            <a:avLst/>
+          </a:prstGeom>
+          <a:noFill/>
+        </p:spPr>
+        <p:txBody>
+          <a:bodyPr wrap="none" rtlCol="0">
+            <a:spAutoFit/>
+          </a:bodyPr>
+          <a:lstStyle/>
+          <a:p>
+            <a:pPr algn="ctr"/>
+            <a:r>
+              <a:rPr lang="en-US" b="1" dirty="0"/>
+              <a:t>deep</a:t>
+            </a:r>
+            <a:r>
+              <a:rPr lang="en-US" dirty="0"/>
+              <a:t> waveguide</a:t>
+            </a:r>
+          </a:p>
+          <a:p>
+            <a:pPr algn="ctr"/>
+            <a:endParaRPr lang="en-US" dirty="0"/>
+          </a:p>
+          <a:p>
+            <a:pPr algn="ctr"/>
+            <a:r>
+              <a:rPr lang="en-US" dirty="0"/>
+              <a:t>Paste plot here</a:t>
+            </a:r>
+          </a:p>
+        </p:txBody>
+      </p:sp>
+      <p:pic>
+        <p:nvPicPr>
+          <p:cNvPr id="4" name="Imagen 3" descr="Gráfico, Gráfico de líneas&#10;&#10;El contenido generado por IA puede ser incorrecto.">
+            <a:extLst>
+              <a:ext uri="{FF2B5EF4-FFF2-40B4-BE49-F238E27FC236}">
+                <a16:creationId xmlns:a16="http://schemas.microsoft.com/office/drawing/2014/main" id="{63260072-4336-C477-FDF6-3CF8F695AEC8}"/>
+              </a:ext>
+            </a:extLst>
+          </p:cNvPr>
+          <p:cNvPicPr>
+            <a:picLocks noChangeAspect="1"/>
+          </p:cNvPicPr>
+          <p:nvPr/>
+        </p:nvPicPr>
+        <p:blipFill>
+          <a:blip r:embed="rId5"/>
+          <a:stretch>
+            <a:fillRect/>
+          </a:stretch>
+        </p:blipFill>
+        <p:spPr>
+          <a:xfrm>
+            <a:off x="690212" y="1227202"/>
+            <a:ext cx="5251798" cy="3106353"/>
+          </a:xfrm>
+          <a:prstGeom prst="rect">
+            <a:avLst/>
+          </a:prstGeom>
+        </p:spPr>
+      </p:pic>
+      <p:pic>
+        <p:nvPicPr>
+          <p:cNvPr id="10" name="Imagen 9" descr="Gráfico, Gráfico de líneas&#10;&#10;El contenido generado por IA puede ser incorrecto.">
+            <a:extLst>
+              <a:ext uri="{FF2B5EF4-FFF2-40B4-BE49-F238E27FC236}">
+                <a16:creationId xmlns:a16="http://schemas.microsoft.com/office/drawing/2014/main" id="{8D8790E9-D5FA-BF84-1C13-E0C9F45B3C02}"/>
+              </a:ext>
+            </a:extLst>
+          </p:cNvPr>
+          <p:cNvPicPr>
+            <a:picLocks noChangeAspect="1"/>
+          </p:cNvPicPr>
+          <p:nvPr/>
+        </p:nvPicPr>
+        <p:blipFill>
+          <a:blip r:embed="rId6"/>
+          <a:stretch>
+            <a:fillRect/>
+          </a:stretch>
+        </p:blipFill>
+        <p:spPr>
+          <a:xfrm>
+            <a:off x="6536282" y="1227202"/>
+            <a:ext cx="5263605" cy="3273909"/>
+          </a:xfrm>
+          <a:prstGeom prst="rect">
+            <a:avLst/>
+          </a:prstGeom>
+        </p:spPr>
+      </p:pic>
+    </p:spTree>
+    <p:extLst>
+      <p:ext uri="{BB962C8B-B14F-4D97-AF65-F5344CB8AC3E}">
+        <p14:creationId xmlns:p14="http://schemas.microsoft.com/office/powerpoint/2010/main" val="3712356003"/>
+      </p:ext>
+    </p:extLst>
+  </p:cSld>
+  <p:clrMapOvr>
+    <a:masterClrMapping/>
+  </p:clrMapOvr>
+</p:sld>
+</file>
+
+<file path=ppt/slides/slide6.xml><?xml version="1.0" encoding="utf-8"?>
+<p:sld xmlns:a="http://schemas.openxmlformats.org/drawingml/2006/main" xmlns:r="http://schemas.openxmlformats.org/officeDocument/2006/relationships" xmlns:p="http://schemas.openxmlformats.org/presentationml/2006/main">
+  <p:cSld>
+    <p:spTree>
+      <p:nvGrpSpPr>
+        <p:cNvPr id="1" name=""/>
+        <p:cNvGrpSpPr/>
+        <p:nvPr/>
+      </p:nvGrpSpPr>
+      <p:grpSpPr>
+        <a:xfrm>
+          <a:off x="0" y="0"/>
+          <a:ext cx="0" cy="0"/>
+          <a:chOff x="0" y="0"/>
+          <a:chExt cx="0" cy="0"/>
+        </a:xfrm>
+      </p:grpSpPr>
+      <p:sp>
+        <p:nvSpPr>
+          <p:cNvPr id="2" name="Título 1">
+            <a:extLst>
+              <a:ext uri="{FF2B5EF4-FFF2-40B4-BE49-F238E27FC236}">
+                <a16:creationId xmlns:a16="http://schemas.microsoft.com/office/drawing/2014/main" id="{74E64652-1DB7-E694-D36B-985DB6D75567}"/>
+              </a:ext>
+            </a:extLst>
+          </p:cNvPr>
+          <p:cNvSpPr>
+            <a:spLocks noGrp="1"/>
+          </p:cNvSpPr>
+          <p:nvPr>
+            <p:ph type="title"/>
+          </p:nvPr>
+        </p:nvSpPr>
+        <p:spPr/>
+        <p:txBody>
+          <a:bodyPr/>
+          <a:lstStyle/>
+          <a:p>
+            <a:r>
+              <a:rPr lang="es-ES" dirty="0"/>
+              <a:t>Comentarios </a:t>
+            </a:r>
+            <a:r>
+              <a:rPr lang="es-ES" dirty="0" err="1"/>
+              <a:t>Outcome</a:t>
+            </a:r>
+            <a:r>
+              <a:rPr lang="es-ES" dirty="0"/>
+              <a:t> #2</a:t>
+            </a:r>
+          </a:p>
+        </p:txBody>
+      </p:sp>
+      <p:sp>
+        <p:nvSpPr>
+          <p:cNvPr id="3" name="Marcador de texto 2">
+            <a:extLst>
+              <a:ext uri="{FF2B5EF4-FFF2-40B4-BE49-F238E27FC236}">
+                <a16:creationId xmlns:a16="http://schemas.microsoft.com/office/drawing/2014/main" id="{CD70538A-68E4-F5CA-1BBB-7CD552AAD551}"/>
+              </a:ext>
+            </a:extLst>
+          </p:cNvPr>
+          <p:cNvSpPr>
+            <a:spLocks noGrp="1"/>
+          </p:cNvSpPr>
+          <p:nvPr>
+            <p:ph type="body" idx="1"/>
+          </p:nvPr>
+        </p:nvSpPr>
+        <p:spPr>
+          <a:xfrm>
+            <a:off x="590550" y="685800"/>
+            <a:ext cx="5200650" cy="646331"/>
+          </a:xfrm>
+        </p:spPr>
+        <p:txBody>
+          <a:bodyPr/>
+          <a:lstStyle/>
+          <a:p>
+            <a:pPr algn="just"/>
+            <a:r>
               <a:rPr lang="en-US" sz="1400" dirty="0">
                 <a:latin typeface="Arial" panose="020B0604020202020204" pitchFamily="34" charset="0"/>
                 <a:cs typeface="Arial" panose="020B0604020202020204" pitchFamily="34" charset="0"/>
               </a:rPr>
+              <a:t>Con la </a:t>
+            </a:r>
+            <a:r>
+              <a:rPr lang="en-US" sz="1400" dirty="0" err="1">
+                <a:latin typeface="Arial" panose="020B0604020202020204" pitchFamily="34" charset="0"/>
+                <a:cs typeface="Arial" panose="020B0604020202020204" pitchFamily="34" charset="0"/>
+              </a:rPr>
+              <a:t>guia</a:t>
+            </a:r>
+            <a:r>
+              <a:rPr lang="en-US" sz="1400" dirty="0">
+                <a:latin typeface="Arial" panose="020B0604020202020204" pitchFamily="34" charset="0"/>
+                <a:cs typeface="Arial" panose="020B0604020202020204" pitchFamily="34" charset="0"/>
+              </a:rPr>
+              <a:t> shallow </a:t>
+            </a:r>
+            <a:r>
+              <a:rPr lang="en-US" sz="1400" dirty="0" err="1">
+                <a:latin typeface="Arial" panose="020B0604020202020204" pitchFamily="34" charset="0"/>
+                <a:cs typeface="Arial" panose="020B0604020202020204" pitchFamily="34" charset="0"/>
+              </a:rPr>
+              <a:t>los</a:t>
+            </a:r>
+            <a:r>
+              <a:rPr lang="en-US" sz="1400" dirty="0">
+                <a:latin typeface="Arial" panose="020B0604020202020204" pitchFamily="34" charset="0"/>
+                <a:cs typeface="Arial" panose="020B0604020202020204" pitchFamily="34" charset="0"/>
+              </a:rPr>
+              <a:t> </a:t>
+            </a:r>
+            <a:r>
+              <a:rPr lang="en-US" sz="1400" dirty="0" err="1">
+                <a:latin typeface="Arial" panose="020B0604020202020204" pitchFamily="34" charset="0"/>
+                <a:cs typeface="Arial" panose="020B0604020202020204" pitchFamily="34" charset="0"/>
+              </a:rPr>
+              <a:t>modos</a:t>
+            </a:r>
+            <a:r>
+              <a:rPr lang="en-US" sz="1400" dirty="0">
+                <a:latin typeface="Arial" panose="020B0604020202020204" pitchFamily="34" charset="0"/>
+                <a:cs typeface="Arial" panose="020B0604020202020204" pitchFamily="34" charset="0"/>
+              </a:rPr>
+              <a:t> 0 y 3 son TE y </a:t>
+            </a:r>
+            <a:r>
+              <a:rPr lang="en-US" sz="1400" dirty="0" err="1">
+                <a:latin typeface="Arial" panose="020B0604020202020204" pitchFamily="34" charset="0"/>
+                <a:cs typeface="Arial" panose="020B0604020202020204" pitchFamily="34" charset="0"/>
+              </a:rPr>
+              <a:t>los</a:t>
+            </a:r>
+            <a:r>
+              <a:rPr lang="en-US" sz="1400" dirty="0">
+                <a:latin typeface="Arial" panose="020B0604020202020204" pitchFamily="34" charset="0"/>
+                <a:cs typeface="Arial" panose="020B0604020202020204" pitchFamily="34" charset="0"/>
+              </a:rPr>
+              <a:t> </a:t>
+            </a:r>
+            <a:r>
+              <a:rPr lang="en-US" sz="1400" dirty="0" err="1">
+                <a:latin typeface="Arial" panose="020B0604020202020204" pitchFamily="34" charset="0"/>
+                <a:cs typeface="Arial" panose="020B0604020202020204" pitchFamily="34" charset="0"/>
+              </a:rPr>
+              <a:t>modos</a:t>
+            </a:r>
+            <a:r>
+              <a:rPr lang="en-US" sz="1400" dirty="0">
+                <a:latin typeface="Arial" panose="020B0604020202020204" pitchFamily="34" charset="0"/>
+                <a:cs typeface="Arial" panose="020B0604020202020204" pitchFamily="34" charset="0"/>
+              </a:rPr>
+              <a:t> 1 y 2 son </a:t>
+            </a:r>
+            <a:r>
+              <a:rPr lang="en-US" sz="1400" dirty="0" err="1">
+                <a:latin typeface="Arial" panose="020B0604020202020204" pitchFamily="34" charset="0"/>
+                <a:cs typeface="Arial" panose="020B0604020202020204" pitchFamily="34" charset="0"/>
+              </a:rPr>
+              <a:t>hibridos</a:t>
+            </a:r>
+            <a:r>
+              <a:rPr lang="en-US" sz="1400" dirty="0">
+                <a:latin typeface="Arial" panose="020B0604020202020204" pitchFamily="34" charset="0"/>
+                <a:cs typeface="Arial" panose="020B0604020202020204" pitchFamily="34" charset="0"/>
+              </a:rPr>
+              <a:t>, </a:t>
+            </a:r>
+            <a:r>
+              <a:rPr lang="en-US" sz="1400" dirty="0" err="1">
+                <a:latin typeface="Arial" panose="020B0604020202020204" pitchFamily="34" charset="0"/>
+                <a:cs typeface="Arial" panose="020B0604020202020204" pitchFamily="34" charset="0"/>
+              </a:rPr>
+              <a:t>mayoritariamente</a:t>
+            </a:r>
+            <a:r>
+              <a:rPr lang="en-US" sz="1400" dirty="0">
+                <a:latin typeface="Arial" panose="020B0604020202020204" pitchFamily="34" charset="0"/>
+                <a:cs typeface="Arial" panose="020B0604020202020204" pitchFamily="34" charset="0"/>
+              </a:rPr>
+              <a:t> TE.</a:t>
+            </a:r>
+          </a:p>
+          <a:p>
+            <a:endParaRPr lang="es-ES" sz="1400" dirty="0"/>
+          </a:p>
+        </p:txBody>
+      </p:sp>
+      <p:sp>
+        <p:nvSpPr>
+          <p:cNvPr id="4" name="Marcador de pie de página 3">
+            <a:extLst>
+              <a:ext uri="{FF2B5EF4-FFF2-40B4-BE49-F238E27FC236}">
+                <a16:creationId xmlns:a16="http://schemas.microsoft.com/office/drawing/2014/main" id="{69A70AEF-A0E3-E117-BB88-746F97AD7C23}"/>
+              </a:ext>
+            </a:extLst>
+          </p:cNvPr>
+          <p:cNvSpPr>
+            <a:spLocks noGrp="1"/>
+          </p:cNvSpPr>
+          <p:nvPr>
+            <p:ph type="ftr" sz="quarter" idx="5"/>
+          </p:nvPr>
+        </p:nvSpPr>
+        <p:spPr/>
+        <p:txBody>
+          <a:bodyPr/>
+          <a:lstStyle/>
+          <a:p>
+            <a:pPr marL="12700">
+              <a:spcBef>
+                <a:spcPts val="15"/>
+              </a:spcBef>
+            </a:pPr>
+            <a:r>
+              <a:rPr lang="es-ES" spc="-5"/>
+              <a:t>LAB 0.1. MODESOLVER</a:t>
+            </a:r>
+            <a:endParaRPr lang="es-ES" spc="-5" dirty="0"/>
+          </a:p>
+        </p:txBody>
+      </p:sp>
+      <p:sp>
+        <p:nvSpPr>
+          <p:cNvPr id="5" name="Marcador de número de diapositiva 4">
+            <a:extLst>
+              <a:ext uri="{FF2B5EF4-FFF2-40B4-BE49-F238E27FC236}">
+                <a16:creationId xmlns:a16="http://schemas.microsoft.com/office/drawing/2014/main" id="{B196C78E-166D-AE50-D427-CD26140F5941}"/>
+              </a:ext>
+            </a:extLst>
+          </p:cNvPr>
+          <p:cNvSpPr>
+            <a:spLocks noGrp="1"/>
+          </p:cNvSpPr>
+          <p:nvPr>
+            <p:ph type="sldNum" sz="quarter" idx="7"/>
+          </p:nvPr>
+        </p:nvSpPr>
+        <p:spPr/>
+        <p:txBody>
+          <a:bodyPr/>
+          <a:lstStyle/>
+          <a:p>
+            <a:fld id="{B6F15528-21DE-4FAA-801E-634DDDAF4B2B}" type="slidenum">
+              <a:rPr lang="es-ES" smtClean="0"/>
+              <a:t>6</a:t>
+            </a:fld>
+            <a:endParaRPr lang="es-ES"/>
+          </a:p>
+        </p:txBody>
+      </p:sp>
+      <p:pic>
+        <p:nvPicPr>
+          <p:cNvPr id="7" name="Imagen 6" descr="Texto&#10;&#10;El contenido generado por IA puede ser incorrecto.">
+            <a:extLst>
+              <a:ext uri="{FF2B5EF4-FFF2-40B4-BE49-F238E27FC236}">
+                <a16:creationId xmlns:a16="http://schemas.microsoft.com/office/drawing/2014/main" id="{D5E8ED96-2A1A-07AC-B725-88D2612B8CB6}"/>
+              </a:ext>
+            </a:extLst>
+          </p:cNvPr>
+          <p:cNvPicPr>
+            <a:picLocks noChangeAspect="1"/>
+          </p:cNvPicPr>
+          <p:nvPr/>
+        </p:nvPicPr>
+        <p:blipFill>
+          <a:blip r:embed="rId2"/>
+          <a:stretch>
+            <a:fillRect/>
+          </a:stretch>
+        </p:blipFill>
+        <p:spPr>
+          <a:xfrm>
+            <a:off x="590550" y="1224396"/>
+            <a:ext cx="5104614" cy="2562476"/>
+          </a:xfrm>
+          <a:prstGeom prst="rect">
+            <a:avLst/>
+          </a:prstGeom>
+        </p:spPr>
+      </p:pic>
+      <p:sp>
+        <p:nvSpPr>
+          <p:cNvPr id="8" name="Marcador de texto 2">
+            <a:extLst>
+              <a:ext uri="{FF2B5EF4-FFF2-40B4-BE49-F238E27FC236}">
+                <a16:creationId xmlns:a16="http://schemas.microsoft.com/office/drawing/2014/main" id="{15A913E1-D1BA-3C75-C94A-64EE39100AAA}"/>
+              </a:ext>
+            </a:extLst>
+          </p:cNvPr>
+          <p:cNvSpPr txBox="1">
+            <a:spLocks/>
+          </p:cNvSpPr>
+          <p:nvPr/>
+        </p:nvSpPr>
+        <p:spPr>
+          <a:xfrm>
+            <a:off x="6601756" y="693421"/>
+            <a:ext cx="5200650" cy="215444"/>
+          </a:xfrm>
+          <a:prstGeom prst="rect">
+            <a:avLst/>
+          </a:prstGeom>
+        </p:spPr>
+        <p:txBody>
+          <a:bodyPr wrap="square" lIns="0" tIns="0" rIns="0" bIns="0">
+            <a:spAutoFit/>
+          </a:bodyPr>
+          <a:lstStyle>
+            <a:lvl1pPr marL="0">
+              <a:defRPr>
+                <a:latin typeface="+mn-lt"/>
+                <a:ea typeface="+mn-ea"/>
+                <a:cs typeface="+mn-cs"/>
+              </a:defRPr>
+            </a:lvl1pPr>
+            <a:lvl2pPr marL="457200">
+              <a:defRPr>
+                <a:latin typeface="+mn-lt"/>
+                <a:ea typeface="+mn-ea"/>
+                <a:cs typeface="+mn-cs"/>
+              </a:defRPr>
+            </a:lvl2pPr>
+            <a:lvl3pPr marL="914400">
+              <a:defRPr>
+                <a:latin typeface="+mn-lt"/>
+                <a:ea typeface="+mn-ea"/>
+                <a:cs typeface="+mn-cs"/>
+              </a:defRPr>
+            </a:lvl3pPr>
+            <a:lvl4pPr marL="1371600">
+              <a:defRPr>
+                <a:latin typeface="+mn-lt"/>
+                <a:ea typeface="+mn-ea"/>
+                <a:cs typeface="+mn-cs"/>
+              </a:defRPr>
+            </a:lvl4pPr>
+            <a:lvl5pPr marL="1828800">
+              <a:defRPr>
+                <a:latin typeface="+mn-lt"/>
+                <a:ea typeface="+mn-ea"/>
+                <a:cs typeface="+mn-cs"/>
+              </a:defRPr>
+            </a:lvl5pPr>
+            <a:lvl6pPr marL="2286000">
+              <a:defRPr>
+                <a:latin typeface="+mn-lt"/>
+                <a:ea typeface="+mn-ea"/>
+                <a:cs typeface="+mn-cs"/>
+              </a:defRPr>
+            </a:lvl6pPr>
+            <a:lvl7pPr marL="2743200">
+              <a:defRPr>
+                <a:latin typeface="+mn-lt"/>
+                <a:ea typeface="+mn-ea"/>
+                <a:cs typeface="+mn-cs"/>
+              </a:defRPr>
+            </a:lvl7pPr>
+            <a:lvl8pPr marL="3200400">
+              <a:defRPr>
+                <a:latin typeface="+mn-lt"/>
+                <a:ea typeface="+mn-ea"/>
+                <a:cs typeface="+mn-cs"/>
+              </a:defRPr>
+            </a:lvl8pPr>
+            <a:lvl9pPr marL="3657600">
+              <a:defRPr>
+                <a:latin typeface="+mn-lt"/>
+                <a:ea typeface="+mn-ea"/>
+                <a:cs typeface="+mn-cs"/>
+              </a:defRPr>
+            </a:lvl9pPr>
+          </a:lstStyle>
+          <a:p>
+            <a:pPr algn="just"/>
+            <a:r>
+              <a:rPr lang="en-US" sz="1400" dirty="0">
+                <a:latin typeface="Arial" panose="020B0604020202020204" pitchFamily="34" charset="0"/>
+                <a:cs typeface="Arial" panose="020B0604020202020204" pitchFamily="34" charset="0"/>
+              </a:rPr>
+              <a:t>Con la </a:t>
+            </a:r>
+            <a:r>
+              <a:rPr lang="en-US" sz="1400" dirty="0" err="1">
+                <a:latin typeface="Arial" panose="020B0604020202020204" pitchFamily="34" charset="0"/>
+                <a:cs typeface="Arial" panose="020B0604020202020204" pitchFamily="34" charset="0"/>
+              </a:rPr>
+              <a:t>guia</a:t>
+            </a:r>
+            <a:r>
+              <a:rPr lang="en-US" sz="1400" dirty="0">
+                <a:latin typeface="Arial" panose="020B0604020202020204" pitchFamily="34" charset="0"/>
+                <a:cs typeface="Arial" panose="020B0604020202020204" pitchFamily="34" charset="0"/>
+              </a:rPr>
+              <a:t> deep </a:t>
+            </a:r>
+            <a:r>
+              <a:rPr lang="en-US" sz="1400" dirty="0" err="1">
+                <a:latin typeface="Arial" panose="020B0604020202020204" pitchFamily="34" charset="0"/>
+                <a:cs typeface="Arial" panose="020B0604020202020204" pitchFamily="34" charset="0"/>
+              </a:rPr>
+              <a:t>los</a:t>
+            </a:r>
+            <a:r>
+              <a:rPr lang="en-US" sz="1400" dirty="0">
+                <a:latin typeface="Arial" panose="020B0604020202020204" pitchFamily="34" charset="0"/>
+                <a:cs typeface="Arial" panose="020B0604020202020204" pitchFamily="34" charset="0"/>
+              </a:rPr>
+              <a:t> </a:t>
+            </a:r>
+            <a:r>
+              <a:rPr lang="en-US" sz="1400" dirty="0" err="1">
+                <a:latin typeface="Arial" panose="020B0604020202020204" pitchFamily="34" charset="0"/>
+                <a:cs typeface="Arial" panose="020B0604020202020204" pitchFamily="34" charset="0"/>
+              </a:rPr>
+              <a:t>modos</a:t>
+            </a:r>
+            <a:r>
+              <a:rPr lang="en-US" sz="1400" dirty="0">
+                <a:latin typeface="Arial" panose="020B0604020202020204" pitchFamily="34" charset="0"/>
+                <a:cs typeface="Arial" panose="020B0604020202020204" pitchFamily="34" charset="0"/>
+              </a:rPr>
+              <a:t> 0 y 2 son TE y </a:t>
+            </a:r>
+            <a:r>
+              <a:rPr lang="en-US" sz="1400" dirty="0" err="1">
+                <a:latin typeface="Arial" panose="020B0604020202020204" pitchFamily="34" charset="0"/>
+                <a:cs typeface="Arial" panose="020B0604020202020204" pitchFamily="34" charset="0"/>
+              </a:rPr>
+              <a:t>el</a:t>
+            </a:r>
+            <a:r>
+              <a:rPr lang="en-US" sz="1400" dirty="0">
+                <a:latin typeface="Arial" panose="020B0604020202020204" pitchFamily="34" charset="0"/>
+                <a:cs typeface="Arial" panose="020B0604020202020204" pitchFamily="34" charset="0"/>
+              </a:rPr>
+              <a:t> 1 y 3 son TM.</a:t>
+            </a:r>
+            <a:endParaRPr lang="es-ES" sz="1400" kern="0" dirty="0">
+              <a:solidFill>
+                <a:sysClr val="windowText" lastClr="000000"/>
+              </a:solidFill>
+            </a:endParaRPr>
+          </a:p>
+        </p:txBody>
+      </p:sp>
+      <p:pic>
+        <p:nvPicPr>
+          <p:cNvPr id="10" name="Imagen 9" descr="Texto&#10;&#10;El contenido generado por IA puede ser incorrecto.">
+            <a:extLst>
+              <a:ext uri="{FF2B5EF4-FFF2-40B4-BE49-F238E27FC236}">
+                <a16:creationId xmlns:a16="http://schemas.microsoft.com/office/drawing/2014/main" id="{073763D2-9E89-0921-5D36-E754F3F4B585}"/>
+              </a:ext>
+            </a:extLst>
+          </p:cNvPr>
+          <p:cNvPicPr>
+            <a:picLocks noChangeAspect="1"/>
+          </p:cNvPicPr>
+          <p:nvPr/>
+        </p:nvPicPr>
+        <p:blipFill>
+          <a:blip r:embed="rId3"/>
+          <a:stretch>
+            <a:fillRect/>
+          </a:stretch>
+        </p:blipFill>
+        <p:spPr>
+          <a:xfrm>
+            <a:off x="6601756" y="1110312"/>
+            <a:ext cx="4110409" cy="2573601"/>
+          </a:xfrm>
+          <a:prstGeom prst="rect">
+            <a:avLst/>
+          </a:prstGeom>
+        </p:spPr>
+      </p:pic>
+      <p:sp>
+        <p:nvSpPr>
+          <p:cNvPr id="13" name="Marcador de texto 2">
+            <a:extLst>
+              <a:ext uri="{FF2B5EF4-FFF2-40B4-BE49-F238E27FC236}">
+                <a16:creationId xmlns:a16="http://schemas.microsoft.com/office/drawing/2014/main" id="{067A748D-6BA9-60B0-DFF2-EC88EBA606B0}"/>
+              </a:ext>
+            </a:extLst>
+          </p:cNvPr>
+          <p:cNvSpPr txBox="1">
+            <a:spLocks/>
+          </p:cNvSpPr>
+          <p:nvPr/>
+        </p:nvSpPr>
+        <p:spPr>
+          <a:xfrm>
+            <a:off x="609600" y="4114800"/>
+            <a:ext cx="9982200" cy="1938992"/>
+          </a:xfrm>
+          <a:prstGeom prst="rect">
+            <a:avLst/>
+          </a:prstGeom>
+        </p:spPr>
+        <p:txBody>
+          <a:bodyPr wrap="square" lIns="0" tIns="0" rIns="0" bIns="0">
+            <a:spAutoFit/>
+          </a:bodyPr>
+          <a:lstStyle>
+            <a:lvl1pPr marL="0">
+              <a:defRPr>
+                <a:latin typeface="+mn-lt"/>
+                <a:ea typeface="+mn-ea"/>
+                <a:cs typeface="+mn-cs"/>
+              </a:defRPr>
+            </a:lvl1pPr>
+            <a:lvl2pPr marL="457200">
+              <a:defRPr>
+                <a:latin typeface="+mn-lt"/>
+                <a:ea typeface="+mn-ea"/>
+                <a:cs typeface="+mn-cs"/>
+              </a:defRPr>
+            </a:lvl2pPr>
+            <a:lvl3pPr marL="914400">
+              <a:defRPr>
+                <a:latin typeface="+mn-lt"/>
+                <a:ea typeface="+mn-ea"/>
+                <a:cs typeface="+mn-cs"/>
+              </a:defRPr>
+            </a:lvl3pPr>
+            <a:lvl4pPr marL="1371600">
+              <a:defRPr>
+                <a:latin typeface="+mn-lt"/>
+                <a:ea typeface="+mn-ea"/>
+                <a:cs typeface="+mn-cs"/>
+              </a:defRPr>
+            </a:lvl4pPr>
+            <a:lvl5pPr marL="1828800">
+              <a:defRPr>
+                <a:latin typeface="+mn-lt"/>
+                <a:ea typeface="+mn-ea"/>
+                <a:cs typeface="+mn-cs"/>
+              </a:defRPr>
+            </a:lvl5pPr>
+            <a:lvl6pPr marL="2286000">
+              <a:defRPr>
+                <a:latin typeface="+mn-lt"/>
+                <a:ea typeface="+mn-ea"/>
+                <a:cs typeface="+mn-cs"/>
+              </a:defRPr>
+            </a:lvl6pPr>
+            <a:lvl7pPr marL="2743200">
+              <a:defRPr>
+                <a:latin typeface="+mn-lt"/>
+                <a:ea typeface="+mn-ea"/>
+                <a:cs typeface="+mn-cs"/>
+              </a:defRPr>
+            </a:lvl7pPr>
+            <a:lvl8pPr marL="3200400">
+              <a:defRPr>
+                <a:latin typeface="+mn-lt"/>
+                <a:ea typeface="+mn-ea"/>
+                <a:cs typeface="+mn-cs"/>
+              </a:defRPr>
+            </a:lvl8pPr>
+            <a:lvl9pPr marL="3657600">
+              <a:defRPr>
+                <a:latin typeface="+mn-lt"/>
+                <a:ea typeface="+mn-ea"/>
+                <a:cs typeface="+mn-cs"/>
+              </a:defRPr>
+            </a:lvl9pPr>
+          </a:lstStyle>
+          <a:p>
+            <a:pPr algn="just"/>
+            <a:r>
+              <a:rPr lang="en-US" sz="1400" dirty="0">
+                <a:latin typeface="Arial" panose="020B0604020202020204" pitchFamily="34" charset="0"/>
+                <a:cs typeface="Arial" panose="020B0604020202020204" pitchFamily="34" charset="0"/>
+              </a:rPr>
               <a:t>El </a:t>
             </a:r>
             <a:r>
@@ -8589,7 +9508,7 @@
                 <a:latin typeface="Arial" panose="020B0604020202020204" pitchFamily="34" charset="0"/>
                 <a:cs typeface="Arial" panose="020B0604020202020204" pitchFamily="34" charset="0"/>
               </a:rPr>
-              <a:t>indice</a:t>
+              <a:t>índice</a:t>
             </a:r>
             <a:r>
               <a:rPr lang="en-US" sz="1400" dirty="0">
@@ -8893,7 +9812,7 @@
                 <a:latin typeface="Arial" panose="020B0604020202020204" pitchFamily="34" charset="0"/>
                 <a:cs typeface="Arial" panose="020B0604020202020204" pitchFamily="34" charset="0"/>
               </a:rPr>
-              <a:t>nucleo</a:t>
+              <a:t>núcleo</a:t>
             </a:r>
             <a:r>
               <a:rPr lang="en-US" sz="1400" dirty="0">
@@ -8970,7 +9889,24 @@
                 <a:latin typeface="Arial" panose="020B0604020202020204" pitchFamily="34" charset="0"/>
                 <a:cs typeface="Arial" panose="020B0604020202020204" pitchFamily="34" charset="0"/>
               </a:rPr>
-              <a:t>. Se </a:t>
+              <a:t>. </a:t>
+            </a:r>
+          </a:p>
+          <a:p>
+            <a:pPr algn="just"/>
+            <a:endParaRPr lang="en-US" sz="1400" dirty="0">
+              <a:latin typeface="Arial" panose="020B0604020202020204" pitchFamily="34" charset="0"/>
+              <a:cs typeface="Arial" panose="020B0604020202020204" pitchFamily="34" charset="0"/>
+            </a:endParaRPr>
+          </a:p>
+          <a:p>
+            <a:pPr algn="just"/>
+            <a:r>
+              <a:rPr lang="en-US" sz="1400" dirty="0">
+                <a:latin typeface="Arial" panose="020B0604020202020204" pitchFamily="34" charset="0"/>
+                <a:cs typeface="Arial" panose="020B0604020202020204" pitchFamily="34" charset="0"/>
+              </a:rPr>
+              <a:t>Se </a:t>
             </a:r>
             <a:r>
               <a:rPr lang="en-US" sz="1400" dirty="0" err="1">
@@ -9019,7 +9955,7 @@
                 <a:latin typeface="Arial" panose="020B0604020202020204" pitchFamily="34" charset="0"/>
                 <a:cs typeface="Arial" panose="020B0604020202020204" pitchFamily="34" charset="0"/>
               </a:rPr>
-              <a:t>indice</a:t>
+              <a:t>índice</a:t>
             </a:r>
             <a:r>
               <a:rPr lang="en-US" sz="1400" dirty="0">
@@ -9103,7 +10039,7 @@
                 <a:latin typeface="Arial" panose="020B0604020202020204" pitchFamily="34" charset="0"/>
                 <a:cs typeface="Arial" panose="020B0604020202020204" pitchFamily="34" charset="0"/>
               </a:rPr>
-              <a:t>guias</a:t>
+              <a:t>guías</a:t>
             </a:r>
             <a:r>
               <a:rPr lang="en-US" sz="1400" dirty="0">
@@ -9145,14 +10081,31 @@
                 <a:latin typeface="Arial" panose="020B0604020202020204" pitchFamily="34" charset="0"/>
                 <a:cs typeface="Arial" panose="020B0604020202020204" pitchFamily="34" charset="0"/>
               </a:rPr>
-              <a:t>indice</a:t>
+              <a:t>índice</a:t>
             </a:r>
             <a:r>
               <a:rPr lang="en-US" sz="1400" dirty="0">
                 <a:latin typeface="Arial" panose="020B0604020202020204" pitchFamily="34" charset="0"/>
                 <a:cs typeface="Arial" panose="020B0604020202020204" pitchFamily="34" charset="0"/>
               </a:rPr>
-              <a:t> del cladding (1.46). Como </a:t>
+              <a:t> del cladding (1.46). </a:t>
+            </a:r>
+          </a:p>
+          <a:p>
+            <a:pPr algn="just"/>
+            <a:endParaRPr lang="en-US" sz="1400" dirty="0">
+              <a:latin typeface="Arial" panose="020B0604020202020204" pitchFamily="34" charset="0"/>
+              <a:cs typeface="Arial" panose="020B0604020202020204" pitchFamily="34" charset="0"/>
+            </a:endParaRPr>
+          </a:p>
+          <a:p>
+            <a:pPr algn="just"/>
+            <a:r>
+              <a:rPr lang="en-US" sz="1400" dirty="0">
+                <a:latin typeface="Arial" panose="020B0604020202020204" pitchFamily="34" charset="0"/>
+                <a:cs typeface="Arial" panose="020B0604020202020204" pitchFamily="34" charset="0"/>
+              </a:rPr>
+              <a:t>Como </a:t>
             </a:r>
             <a:r>
               <a:rPr lang="en-US" sz="1400" dirty="0" err="1">
@@ -9173,7 +10126,7 @@
                 <a:latin typeface="Arial" panose="020B0604020202020204" pitchFamily="34" charset="0"/>
                 <a:cs typeface="Arial" panose="020B0604020202020204" pitchFamily="34" charset="0"/>
               </a:rPr>
-              <a:t>indice</a:t>
+              <a:t>índice</a:t>
             </a:r>
             <a:r>
               <a:rPr lang="en-US" sz="1400" dirty="0">
@@ -9208,7 +10161,21 @@
                 <a:latin typeface="Arial" panose="020B0604020202020204" pitchFamily="34" charset="0"/>
                 <a:cs typeface="Arial" panose="020B0604020202020204" pitchFamily="34" charset="0"/>
               </a:rPr>
-              <a:t> mas al del cladding </a:t>
+              <a:t> </a:t>
+            </a:r>
+            <a:r>
+              <a:rPr lang="en-US" sz="1400" dirty="0" err="1">
+                <a:latin typeface="Arial" panose="020B0604020202020204" pitchFamily="34" charset="0"/>
+                <a:cs typeface="Arial" panose="020B0604020202020204" pitchFamily="34" charset="0"/>
+              </a:rPr>
+              <a:t>más</a:t>
+            </a:r>
+            <a:r>
+              <a:rPr lang="en-US" sz="1400" dirty="0">
+                <a:latin typeface="Arial" panose="020B0604020202020204" pitchFamily="34" charset="0"/>
+                <a:cs typeface="Arial" panose="020B0604020202020204" pitchFamily="34" charset="0"/>
+              </a:rPr>
+              <a:t> al del cladding </a:t>
             </a:r>
             <a:r>
               <a:rPr lang="en-US" sz="1400" dirty="0" err="1">
@@ -10356,6 +11323,23 @@
 </file>
 
 <file path=customXml/item1.xml><?xml version="1.0" encoding="utf-8"?>
+<p:properties xmlns:p="http://schemas.microsoft.com/office/2006/metadata/properties" xmlns:xsi="http://www.w3.org/2001/XMLSchema-instance" xmlns:pc="http://schemas.microsoft.com/office/infopath/2007/PartnerControls">
+  <documentManagement>
+    <_activity xmlns="512ad970-e211-4551-badd-1c89141866b5" xsi:nil="true"/>
+  </documentManagement>
+</p:properties>
+</file>
+
+<file path=customXml/item2.xml><?xml version="1.0" encoding="utf-8"?>
+<?mso-contentType ?>
+<FormTemplates xmlns="http://schemas.microsoft.com/sharepoint/v3/contenttype/forms">
+  <Display>DocumentLibraryForm</Display>
+  <Edit>DocumentLibraryForm</Edit>
+  <New>DocumentLibraryForm</New>
+</FormTemplates>
+</file>
+
+<file path=customXml/item3.xml><?xml version="1.0" encoding="utf-8"?>
 <ct:contentTypeSchema xmlns:ct="http://schemas.microsoft.com/office/2006/metadata/contentType" xmlns:ma="http://schemas.microsoft.com/office/2006/metadata/properties/metaAttributes" ct:_="" ma:_="" ma:contentTypeName="Documento" ma:contentTypeID="0x010100B4F9E81278D9EF4B93FEF4C39323CCC6" ma:contentTypeVersion="9" ma:contentTypeDescription="Crear nuevo documento." ma:contentTypeScope="" ma:versionID="d3230f1af0420652ab6bb9cc9a7d79bf">
   <xsd:schema xmlns:xsd="http://www.w3.org/2001/XMLSchema" xmlns:xs="http://www.w3.org/2001/XMLSchema" xmlns:p="http://schemas.microsoft.com/office/2006/metadata/properties" xmlns:ns3="512ad970-e211-4551-badd-1c89141866b5" xmlns:ns4="39b51ea6-d3c9-44a5-b163-cfe7ba19310b" targetNamespace="http://schemas.microsoft.com/office/2006/metadata/properties" ma:root="true" ma:fieldsID="f33886ecf8d1a5727ad2dd4cfd712005" ns3:_="" ns4:_="">
     <xsd:import namespace="512ad970-e211-4551-badd-1c89141866b5"/>
@@ -10550,24 +11534,32 @@
 </ct:contentTypeSchema>
 </file>
 
-<file path=customXml/item2.xml><?xml version="1.0" encoding="utf-8"?>
-<?mso-contentType ?>
-<FormTemplates xmlns="http://schemas.microsoft.com/sharepoint/v3/contenttype/forms">
-  <Display>DocumentLibraryForm</Display>
-  <Edit>DocumentLibraryForm</Edit>
-  <New>DocumentLibraryForm</New>
-</FormTemplates>
+<file path=customXml/itemProps1.xml><?xml version="1.0" encoding="utf-8"?>
+<ds:datastoreItem xmlns:ds="http://schemas.openxmlformats.org/officeDocument/2006/customXml" ds:itemID="{672770CA-3061-447B-B38E-0CE919B71026}">
+  <ds:schemaRefs>
+    <ds:schemaRef ds:uri="http://purl.org/dc/terms/"/>
+    <ds:schemaRef ds:uri="http://schemas.openxmlformats.org/package/2006/metadata/core-properties"/>
+    <ds:schemaRef ds:uri="512ad970-e211-4551-badd-1c89141866b5"/>
+    <ds:schemaRef ds:uri="http://purl.org/dc/dcmitype/"/>
+    <ds:schemaRef ds:uri="http://schemas.microsoft.com/office/2006/documentManagement/types"/>
+    <ds:schemaRef ds:uri="http://schemas.microsoft.com/office/infopath/2007/PartnerControls"/>
+    <ds:schemaRef ds:uri="39b51ea6-d3c9-44a5-b163-cfe7ba19310b"/>
+    <ds:schemaRef ds:uri="http://schemas.microsoft.com/office/2006/metadata/properties"/>
+    <ds:schemaRef ds:uri="http://www.w3.org/XML/1998/namespace"/>
+    <ds:schemaRef ds:uri="http://purl.org/dc/elements/1.1/"/>
+  </ds:schemaRefs>
+</ds:datastoreItem>
 </file>
 
-<file path=customXml/item3.xml><?xml version="1.0" encoding="utf-8"?>
-<p:properties xmlns:p="http://schemas.microsoft.com/office/2006/metadata/properties" xmlns:xsi="http://www.w3.org/2001/XMLSchema-instance" xmlns:pc="http://schemas.microsoft.com/office/infopath/2007/PartnerControls">
-  <documentManagement>
-    <_activity xmlns="512ad970-e211-4551-badd-1c89141866b5" xsi:nil="true"/>
-  </documentManagement>
-</p:properties>
+<file path=customXml/itemProps2.xml><?xml version="1.0" encoding="utf-8"?>
+<ds:datastoreItem xmlns:ds="http://schemas.openxmlformats.org/officeDocument/2006/customXml" ds:itemID="{ED6A1A82-244F-49B2-AE87-9E0E62E4BD07}">
+  <ds:schemaRefs>
+    <ds:schemaRef ds:uri="http://schemas.microsoft.com/sharepoint/v3/contenttype/forms"/>
+  </ds:schemaRefs>
+</ds:datastoreItem>
 </file>
 
-<file path=customXml/itemProps1.xml><?xml version="1.0" encoding="utf-8"?>
+<file path=customXml/itemProps3.xml><?xml version="1.0" encoding="utf-8"?>
 <ds:datastoreItem xmlns:ds="http://schemas.openxmlformats.org/officeDocument/2006/customXml" ds:itemID="{74D191D3-7CDB-438B-95CA-9F90BBE48D1D}">
   <ds:schemaRefs>
     <ds:schemaRef ds:uri="http://schemas.microsoft.com/office/2006/metadata/contentType"/>
@@ -10584,29 +11576,4 @@
     <ds:schemaRef ds:uri="http://schemas.microsoft.com/internal/obd"/>
   </ds:schemaRefs>
 </ds:datastoreItem>
-</file>
-
-<file path=customXml/itemProps2.xml><?xml version="1.0" encoding="utf-8"?>
-<ds:datastoreItem xmlns:ds="http://schemas.openxmlformats.org/officeDocument/2006/customXml" ds:itemID="{ED6A1A82-244F-49B2-AE87-9E0E62E4BD07}">
-  <ds:schemaRefs>
-    <ds:schemaRef ds:uri="http://schemas.microsoft.com/sharepoint/v3/contenttype/forms"/>
-  </ds:schemaRefs>
-</ds:datastoreItem>
-</file>
-
-<file path=customXml/itemProps3.xml><?xml version="1.0" encoding="utf-8"?>
-<ds:datastoreItem xmlns:ds="http://schemas.openxmlformats.org/officeDocument/2006/customXml" ds:itemID="{672770CA-3061-447B-B38E-0CE919B71026}">
-  <ds:schemaRefs>
-    <ds:schemaRef ds:uri="http://purl.org/dc/terms/"/>
-    <ds:schemaRef ds:uri="http://schemas.openxmlformats.org/package/2006/metadata/core-properties"/>
-    <ds:schemaRef ds:uri="512ad970-e211-4551-badd-1c89141866b5"/>
-    <ds:schemaRef ds:uri="http://purl.org/dc/dcmitype/"/>
-    <ds:schemaRef ds:uri="http://schemas.microsoft.com/office/2006/documentManagement/types"/>
-    <ds:schemaRef ds:uri="http://schemas.microsoft.com/office/infopath/2007/PartnerControls"/>
-    <ds:schemaRef ds:uri="39b51ea6-d3c9-44a5-b163-cfe7ba19310b"/>
-    <ds:schemaRef ds:uri="http://schemas.microsoft.com/office/2006/metadata/properties"/>
-    <ds:schemaRef ds:uri="http://www.w3.org/XML/1998/namespace"/>
-    <ds:schemaRef ds:uri="http://purl.org/dc/elements/1.1/"/>
-  </ds:schemaRefs>
-</ds:datastoreItem>
 </file>